--- a/assets/theonetrade_en.pptx
+++ b/assets/theonetrade_en.pptx
@@ -265,7 +265,7 @@
   </p:defaultTextStyle>
   <p:extLst>
     <p:ext uri="GoogleSlidesCustomDataVersion2">
-      <go:slidesCustomData xmlns:go="http://customooxmlschemas.google.com/" r:id="rId23" roundtripDataSignature="AMtx7miibFpbFLuOSkiny2MByqUDLX4y2Q=="/>
+      <go:slidesCustomData xmlns:go="http://customooxmlschemas.google.com/" r:id="rId23" roundtripDataSignature="AMtx7mhT2nQn1OL1Iy1jCTtqFUCWy1x6Hw=="/>
     </p:ext>
   </p:extLst>
 </p:presentation>
@@ -322,13 +322,20 @@
           </a:bodyPr>
           <a:lstStyle>
             <a:lvl1pPr lvl="0" marR="0" rtl="0" algn="l">
-              <a:spcBef>
-                <a:spcPts val="0"/>
-              </a:spcBef>
-              <a:spcAft>
-                <a:spcPts val="0"/>
-              </a:spcAft>
+              <a:lnSpc>
+                <a:spcPct val="100000"/>
+              </a:lnSpc>
+              <a:spcBef>
+                <a:spcPts val="0"/>
+              </a:spcBef>
+              <a:spcAft>
+                <a:spcPts val="0"/>
+              </a:spcAft>
+              <a:buClr>
+                <a:srgbClr val="000000"/>
+              </a:buClr>
               <a:buSzPts val="1400"/>
+              <a:buFont typeface="Arial"/>
               <a:buNone/>
               <a:defRPr b="0" i="0" sz="1200" u="none" cap="none" strike="noStrike">
                 <a:solidFill>
@@ -341,13 +348,20 @@
               </a:defRPr>
             </a:lvl1pPr>
             <a:lvl2pPr lvl="1" marR="0" rtl="0" algn="l">
-              <a:spcBef>
-                <a:spcPts val="0"/>
-              </a:spcBef>
-              <a:spcAft>
-                <a:spcPts val="0"/>
-              </a:spcAft>
+              <a:lnSpc>
+                <a:spcPct val="100000"/>
+              </a:lnSpc>
+              <a:spcBef>
+                <a:spcPts val="0"/>
+              </a:spcBef>
+              <a:spcAft>
+                <a:spcPts val="0"/>
+              </a:spcAft>
+              <a:buClr>
+                <a:srgbClr val="000000"/>
+              </a:buClr>
               <a:buSzPts val="1400"/>
+              <a:buFont typeface="Arial"/>
               <a:buNone/>
               <a:defRPr b="0" i="0" sz="1800" u="none" cap="none" strike="noStrike">
                 <a:solidFill>
@@ -360,13 +374,20 @@
               </a:defRPr>
             </a:lvl2pPr>
             <a:lvl3pPr lvl="2" marR="0" rtl="0" algn="l">
-              <a:spcBef>
-                <a:spcPts val="0"/>
-              </a:spcBef>
-              <a:spcAft>
-                <a:spcPts val="0"/>
-              </a:spcAft>
+              <a:lnSpc>
+                <a:spcPct val="100000"/>
+              </a:lnSpc>
+              <a:spcBef>
+                <a:spcPts val="0"/>
+              </a:spcBef>
+              <a:spcAft>
+                <a:spcPts val="0"/>
+              </a:spcAft>
+              <a:buClr>
+                <a:srgbClr val="000000"/>
+              </a:buClr>
               <a:buSzPts val="1400"/>
+              <a:buFont typeface="Arial"/>
               <a:buNone/>
               <a:defRPr b="0" i="0" sz="1800" u="none" cap="none" strike="noStrike">
                 <a:solidFill>
@@ -379,13 +400,20 @@
               </a:defRPr>
             </a:lvl3pPr>
             <a:lvl4pPr lvl="3" marR="0" rtl="0" algn="l">
-              <a:spcBef>
-                <a:spcPts val="0"/>
-              </a:spcBef>
-              <a:spcAft>
-                <a:spcPts val="0"/>
-              </a:spcAft>
+              <a:lnSpc>
+                <a:spcPct val="100000"/>
+              </a:lnSpc>
+              <a:spcBef>
+                <a:spcPts val="0"/>
+              </a:spcBef>
+              <a:spcAft>
+                <a:spcPts val="0"/>
+              </a:spcAft>
+              <a:buClr>
+                <a:srgbClr val="000000"/>
+              </a:buClr>
               <a:buSzPts val="1400"/>
+              <a:buFont typeface="Arial"/>
               <a:buNone/>
               <a:defRPr b="0" i="0" sz="1800" u="none" cap="none" strike="noStrike">
                 <a:solidFill>
@@ -398,13 +426,20 @@
               </a:defRPr>
             </a:lvl4pPr>
             <a:lvl5pPr lvl="4" marR="0" rtl="0" algn="l">
-              <a:spcBef>
-                <a:spcPts val="0"/>
-              </a:spcBef>
-              <a:spcAft>
-                <a:spcPts val="0"/>
-              </a:spcAft>
+              <a:lnSpc>
+                <a:spcPct val="100000"/>
+              </a:lnSpc>
+              <a:spcBef>
+                <a:spcPts val="0"/>
+              </a:spcBef>
+              <a:spcAft>
+                <a:spcPts val="0"/>
+              </a:spcAft>
+              <a:buClr>
+                <a:srgbClr val="000000"/>
+              </a:buClr>
               <a:buSzPts val="1400"/>
+              <a:buFont typeface="Arial"/>
               <a:buNone/>
               <a:defRPr b="0" i="0" sz="1800" u="none" cap="none" strike="noStrike">
                 <a:solidFill>
@@ -417,13 +452,20 @@
               </a:defRPr>
             </a:lvl5pPr>
             <a:lvl6pPr lvl="5" marR="0" rtl="0" algn="l">
-              <a:spcBef>
-                <a:spcPts val="0"/>
-              </a:spcBef>
-              <a:spcAft>
-                <a:spcPts val="0"/>
-              </a:spcAft>
+              <a:lnSpc>
+                <a:spcPct val="100000"/>
+              </a:lnSpc>
+              <a:spcBef>
+                <a:spcPts val="0"/>
+              </a:spcBef>
+              <a:spcAft>
+                <a:spcPts val="0"/>
+              </a:spcAft>
+              <a:buClr>
+                <a:srgbClr val="000000"/>
+              </a:buClr>
               <a:buSzPts val="1400"/>
+              <a:buFont typeface="Arial"/>
               <a:buNone/>
               <a:defRPr b="0" i="0" sz="1800" u="none" cap="none" strike="noStrike">
                 <a:solidFill>
@@ -436,13 +478,20 @@
               </a:defRPr>
             </a:lvl6pPr>
             <a:lvl7pPr lvl="6" marR="0" rtl="0" algn="l">
-              <a:spcBef>
-                <a:spcPts val="0"/>
-              </a:spcBef>
-              <a:spcAft>
-                <a:spcPts val="0"/>
-              </a:spcAft>
+              <a:lnSpc>
+                <a:spcPct val="100000"/>
+              </a:lnSpc>
+              <a:spcBef>
+                <a:spcPts val="0"/>
+              </a:spcBef>
+              <a:spcAft>
+                <a:spcPts val="0"/>
+              </a:spcAft>
+              <a:buClr>
+                <a:srgbClr val="000000"/>
+              </a:buClr>
               <a:buSzPts val="1400"/>
+              <a:buFont typeface="Arial"/>
               <a:buNone/>
               <a:defRPr b="0" i="0" sz="1800" u="none" cap="none" strike="noStrike">
                 <a:solidFill>
@@ -455,13 +504,20 @@
               </a:defRPr>
             </a:lvl7pPr>
             <a:lvl8pPr lvl="7" marR="0" rtl="0" algn="l">
-              <a:spcBef>
-                <a:spcPts val="0"/>
-              </a:spcBef>
-              <a:spcAft>
-                <a:spcPts val="0"/>
-              </a:spcAft>
+              <a:lnSpc>
+                <a:spcPct val="100000"/>
+              </a:lnSpc>
+              <a:spcBef>
+                <a:spcPts val="0"/>
+              </a:spcBef>
+              <a:spcAft>
+                <a:spcPts val="0"/>
+              </a:spcAft>
+              <a:buClr>
+                <a:srgbClr val="000000"/>
+              </a:buClr>
               <a:buSzPts val="1400"/>
+              <a:buFont typeface="Arial"/>
               <a:buNone/>
               <a:defRPr b="0" i="0" sz="1800" u="none" cap="none" strike="noStrike">
                 <a:solidFill>
@@ -474,13 +530,20 @@
               </a:defRPr>
             </a:lvl8pPr>
             <a:lvl9pPr lvl="8" marR="0" rtl="0" algn="l">
-              <a:spcBef>
-                <a:spcPts val="0"/>
-              </a:spcBef>
-              <a:spcAft>
-                <a:spcPts val="0"/>
-              </a:spcAft>
+              <a:lnSpc>
+                <a:spcPct val="100000"/>
+              </a:lnSpc>
+              <a:spcBef>
+                <a:spcPts val="0"/>
+              </a:spcBef>
+              <a:spcAft>
+                <a:spcPts val="0"/>
+              </a:spcAft>
+              <a:buClr>
+                <a:srgbClr val="000000"/>
+              </a:buClr>
               <a:buSzPts val="1400"/>
+              <a:buFont typeface="Arial"/>
               <a:buNone/>
               <a:defRPr b="0" i="0" sz="1800" u="none" cap="none" strike="noStrike">
                 <a:solidFill>
@@ -523,13 +586,20 @@
           </a:bodyPr>
           <a:lstStyle>
             <a:lvl1pPr lvl="0" marR="0" rtl="0" algn="r">
-              <a:spcBef>
-                <a:spcPts val="0"/>
-              </a:spcBef>
-              <a:spcAft>
-                <a:spcPts val="0"/>
-              </a:spcAft>
+              <a:lnSpc>
+                <a:spcPct val="100000"/>
+              </a:lnSpc>
+              <a:spcBef>
+                <a:spcPts val="0"/>
+              </a:spcBef>
+              <a:spcAft>
+                <a:spcPts val="0"/>
+              </a:spcAft>
+              <a:buClr>
+                <a:srgbClr val="000000"/>
+              </a:buClr>
               <a:buSzPts val="1400"/>
+              <a:buFont typeface="Arial"/>
               <a:buNone/>
               <a:defRPr b="0" i="0" sz="1200" u="none" cap="none" strike="noStrike">
                 <a:solidFill>
@@ -542,13 +612,20 @@
               </a:defRPr>
             </a:lvl1pPr>
             <a:lvl2pPr lvl="1" marR="0" rtl="0" algn="l">
-              <a:spcBef>
-                <a:spcPts val="0"/>
-              </a:spcBef>
-              <a:spcAft>
-                <a:spcPts val="0"/>
-              </a:spcAft>
+              <a:lnSpc>
+                <a:spcPct val="100000"/>
+              </a:lnSpc>
+              <a:spcBef>
+                <a:spcPts val="0"/>
+              </a:spcBef>
+              <a:spcAft>
+                <a:spcPts val="0"/>
+              </a:spcAft>
+              <a:buClr>
+                <a:srgbClr val="000000"/>
+              </a:buClr>
               <a:buSzPts val="1400"/>
+              <a:buFont typeface="Arial"/>
               <a:buNone/>
               <a:defRPr b="0" i="0" sz="1800" u="none" cap="none" strike="noStrike">
                 <a:solidFill>
@@ -561,13 +638,20 @@
               </a:defRPr>
             </a:lvl2pPr>
             <a:lvl3pPr lvl="2" marR="0" rtl="0" algn="l">
-              <a:spcBef>
-                <a:spcPts val="0"/>
-              </a:spcBef>
-              <a:spcAft>
-                <a:spcPts val="0"/>
-              </a:spcAft>
+              <a:lnSpc>
+                <a:spcPct val="100000"/>
+              </a:lnSpc>
+              <a:spcBef>
+                <a:spcPts val="0"/>
+              </a:spcBef>
+              <a:spcAft>
+                <a:spcPts val="0"/>
+              </a:spcAft>
+              <a:buClr>
+                <a:srgbClr val="000000"/>
+              </a:buClr>
               <a:buSzPts val="1400"/>
+              <a:buFont typeface="Arial"/>
               <a:buNone/>
               <a:defRPr b="0" i="0" sz="1800" u="none" cap="none" strike="noStrike">
                 <a:solidFill>
@@ -580,13 +664,20 @@
               </a:defRPr>
             </a:lvl3pPr>
             <a:lvl4pPr lvl="3" marR="0" rtl="0" algn="l">
-              <a:spcBef>
-                <a:spcPts val="0"/>
-              </a:spcBef>
-              <a:spcAft>
-                <a:spcPts val="0"/>
-              </a:spcAft>
+              <a:lnSpc>
+                <a:spcPct val="100000"/>
+              </a:lnSpc>
+              <a:spcBef>
+                <a:spcPts val="0"/>
+              </a:spcBef>
+              <a:spcAft>
+                <a:spcPts val="0"/>
+              </a:spcAft>
+              <a:buClr>
+                <a:srgbClr val="000000"/>
+              </a:buClr>
               <a:buSzPts val="1400"/>
+              <a:buFont typeface="Arial"/>
               <a:buNone/>
               <a:defRPr b="0" i="0" sz="1800" u="none" cap="none" strike="noStrike">
                 <a:solidFill>
@@ -599,13 +690,20 @@
               </a:defRPr>
             </a:lvl4pPr>
             <a:lvl5pPr lvl="4" marR="0" rtl="0" algn="l">
-              <a:spcBef>
-                <a:spcPts val="0"/>
-              </a:spcBef>
-              <a:spcAft>
-                <a:spcPts val="0"/>
-              </a:spcAft>
+              <a:lnSpc>
+                <a:spcPct val="100000"/>
+              </a:lnSpc>
+              <a:spcBef>
+                <a:spcPts val="0"/>
+              </a:spcBef>
+              <a:spcAft>
+                <a:spcPts val="0"/>
+              </a:spcAft>
+              <a:buClr>
+                <a:srgbClr val="000000"/>
+              </a:buClr>
               <a:buSzPts val="1400"/>
+              <a:buFont typeface="Arial"/>
               <a:buNone/>
               <a:defRPr b="0" i="0" sz="1800" u="none" cap="none" strike="noStrike">
                 <a:solidFill>
@@ -618,13 +716,20 @@
               </a:defRPr>
             </a:lvl5pPr>
             <a:lvl6pPr lvl="5" marR="0" rtl="0" algn="l">
-              <a:spcBef>
-                <a:spcPts val="0"/>
-              </a:spcBef>
-              <a:spcAft>
-                <a:spcPts val="0"/>
-              </a:spcAft>
+              <a:lnSpc>
+                <a:spcPct val="100000"/>
+              </a:lnSpc>
+              <a:spcBef>
+                <a:spcPts val="0"/>
+              </a:spcBef>
+              <a:spcAft>
+                <a:spcPts val="0"/>
+              </a:spcAft>
+              <a:buClr>
+                <a:srgbClr val="000000"/>
+              </a:buClr>
               <a:buSzPts val="1400"/>
+              <a:buFont typeface="Arial"/>
               <a:buNone/>
               <a:defRPr b="0" i="0" sz="1800" u="none" cap="none" strike="noStrike">
                 <a:solidFill>
@@ -637,13 +742,20 @@
               </a:defRPr>
             </a:lvl6pPr>
             <a:lvl7pPr lvl="6" marR="0" rtl="0" algn="l">
-              <a:spcBef>
-                <a:spcPts val="0"/>
-              </a:spcBef>
-              <a:spcAft>
-                <a:spcPts val="0"/>
-              </a:spcAft>
+              <a:lnSpc>
+                <a:spcPct val="100000"/>
+              </a:lnSpc>
+              <a:spcBef>
+                <a:spcPts val="0"/>
+              </a:spcBef>
+              <a:spcAft>
+                <a:spcPts val="0"/>
+              </a:spcAft>
+              <a:buClr>
+                <a:srgbClr val="000000"/>
+              </a:buClr>
               <a:buSzPts val="1400"/>
+              <a:buFont typeface="Arial"/>
               <a:buNone/>
               <a:defRPr b="0" i="0" sz="1800" u="none" cap="none" strike="noStrike">
                 <a:solidFill>
@@ -656,13 +768,20 @@
               </a:defRPr>
             </a:lvl7pPr>
             <a:lvl8pPr lvl="7" marR="0" rtl="0" algn="l">
-              <a:spcBef>
-                <a:spcPts val="0"/>
-              </a:spcBef>
-              <a:spcAft>
-                <a:spcPts val="0"/>
-              </a:spcAft>
+              <a:lnSpc>
+                <a:spcPct val="100000"/>
+              </a:lnSpc>
+              <a:spcBef>
+                <a:spcPts val="0"/>
+              </a:spcBef>
+              <a:spcAft>
+                <a:spcPts val="0"/>
+              </a:spcAft>
+              <a:buClr>
+                <a:srgbClr val="000000"/>
+              </a:buClr>
               <a:buSzPts val="1400"/>
+              <a:buFont typeface="Arial"/>
               <a:buNone/>
               <a:defRPr b="0" i="0" sz="1800" u="none" cap="none" strike="noStrike">
                 <a:solidFill>
@@ -675,13 +794,20 @@
               </a:defRPr>
             </a:lvl8pPr>
             <a:lvl9pPr lvl="8" marR="0" rtl="0" algn="l">
-              <a:spcBef>
-                <a:spcPts val="0"/>
-              </a:spcBef>
-              <a:spcAft>
-                <a:spcPts val="0"/>
-              </a:spcAft>
+              <a:lnSpc>
+                <a:spcPct val="100000"/>
+              </a:lnSpc>
+              <a:spcBef>
+                <a:spcPts val="0"/>
+              </a:spcBef>
+              <a:spcAft>
+                <a:spcPts val="0"/>
+              </a:spcAft>
+              <a:buClr>
+                <a:srgbClr val="000000"/>
+              </a:buClr>
               <a:buSzPts val="1400"/>
+              <a:buFont typeface="Arial"/>
               <a:buNone/>
               <a:defRPr b="0" i="0" sz="1800" u="none" cap="none" strike="noStrike">
                 <a:solidFill>
@@ -769,13 +895,20 @@
           </a:bodyPr>
           <a:lstStyle>
             <a:lvl1pPr indent="-228600" lvl="0" marL="457200" marR="0" rtl="0" algn="l">
-              <a:spcBef>
-                <a:spcPts val="0"/>
-              </a:spcBef>
-              <a:spcAft>
-                <a:spcPts val="0"/>
-              </a:spcAft>
+              <a:lnSpc>
+                <a:spcPct val="100000"/>
+              </a:lnSpc>
+              <a:spcBef>
+                <a:spcPts val="0"/>
+              </a:spcBef>
+              <a:spcAft>
+                <a:spcPts val="0"/>
+              </a:spcAft>
+              <a:buClr>
+                <a:srgbClr val="000000"/>
+              </a:buClr>
               <a:buSzPts val="1400"/>
+              <a:buFont typeface="Arial"/>
               <a:buNone/>
               <a:defRPr b="0" i="0" sz="1200" u="none" cap="none" strike="noStrike">
                 <a:solidFill>
@@ -788,13 +921,20 @@
               </a:defRPr>
             </a:lvl1pPr>
             <a:lvl2pPr indent="-228600" lvl="1" marL="914400" marR="0" rtl="0" algn="l">
-              <a:spcBef>
-                <a:spcPts val="0"/>
-              </a:spcBef>
-              <a:spcAft>
-                <a:spcPts val="0"/>
-              </a:spcAft>
+              <a:lnSpc>
+                <a:spcPct val="100000"/>
+              </a:lnSpc>
+              <a:spcBef>
+                <a:spcPts val="0"/>
+              </a:spcBef>
+              <a:spcAft>
+                <a:spcPts val="0"/>
+              </a:spcAft>
+              <a:buClr>
+                <a:srgbClr val="000000"/>
+              </a:buClr>
               <a:buSzPts val="1400"/>
+              <a:buFont typeface="Arial"/>
               <a:buNone/>
               <a:defRPr b="0" i="0" sz="1200" u="none" cap="none" strike="noStrike">
                 <a:solidFill>
@@ -807,13 +947,20 @@
               </a:defRPr>
             </a:lvl2pPr>
             <a:lvl3pPr indent="-228600" lvl="2" marL="1371600" marR="0" rtl="0" algn="l">
-              <a:spcBef>
-                <a:spcPts val="0"/>
-              </a:spcBef>
-              <a:spcAft>
-                <a:spcPts val="0"/>
-              </a:spcAft>
+              <a:lnSpc>
+                <a:spcPct val="100000"/>
+              </a:lnSpc>
+              <a:spcBef>
+                <a:spcPts val="0"/>
+              </a:spcBef>
+              <a:spcAft>
+                <a:spcPts val="0"/>
+              </a:spcAft>
+              <a:buClr>
+                <a:srgbClr val="000000"/>
+              </a:buClr>
               <a:buSzPts val="1400"/>
+              <a:buFont typeface="Arial"/>
               <a:buNone/>
               <a:defRPr b="0" i="0" sz="1200" u="none" cap="none" strike="noStrike">
                 <a:solidFill>
@@ -826,13 +973,20 @@
               </a:defRPr>
             </a:lvl3pPr>
             <a:lvl4pPr indent="-228600" lvl="3" marL="1828800" marR="0" rtl="0" algn="l">
-              <a:spcBef>
-                <a:spcPts val="0"/>
-              </a:spcBef>
-              <a:spcAft>
-                <a:spcPts val="0"/>
-              </a:spcAft>
+              <a:lnSpc>
+                <a:spcPct val="100000"/>
+              </a:lnSpc>
+              <a:spcBef>
+                <a:spcPts val="0"/>
+              </a:spcBef>
+              <a:spcAft>
+                <a:spcPts val="0"/>
+              </a:spcAft>
+              <a:buClr>
+                <a:srgbClr val="000000"/>
+              </a:buClr>
               <a:buSzPts val="1400"/>
+              <a:buFont typeface="Arial"/>
               <a:buNone/>
               <a:defRPr b="0" i="0" sz="1200" u="none" cap="none" strike="noStrike">
                 <a:solidFill>
@@ -845,13 +999,20 @@
               </a:defRPr>
             </a:lvl4pPr>
             <a:lvl5pPr indent="-228600" lvl="4" marL="2286000" marR="0" rtl="0" algn="l">
-              <a:spcBef>
-                <a:spcPts val="0"/>
-              </a:spcBef>
-              <a:spcAft>
-                <a:spcPts val="0"/>
-              </a:spcAft>
+              <a:lnSpc>
+                <a:spcPct val="100000"/>
+              </a:lnSpc>
+              <a:spcBef>
+                <a:spcPts val="0"/>
+              </a:spcBef>
+              <a:spcAft>
+                <a:spcPts val="0"/>
+              </a:spcAft>
+              <a:buClr>
+                <a:srgbClr val="000000"/>
+              </a:buClr>
               <a:buSzPts val="1400"/>
+              <a:buFont typeface="Arial"/>
               <a:buNone/>
               <a:defRPr b="0" i="0" sz="1200" u="none" cap="none" strike="noStrike">
                 <a:solidFill>
@@ -864,13 +1025,20 @@
               </a:defRPr>
             </a:lvl5pPr>
             <a:lvl6pPr indent="-228600" lvl="5" marL="2743200" marR="0" rtl="0" algn="l">
-              <a:spcBef>
-                <a:spcPts val="0"/>
-              </a:spcBef>
-              <a:spcAft>
-                <a:spcPts val="0"/>
-              </a:spcAft>
+              <a:lnSpc>
+                <a:spcPct val="100000"/>
+              </a:lnSpc>
+              <a:spcBef>
+                <a:spcPts val="0"/>
+              </a:spcBef>
+              <a:spcAft>
+                <a:spcPts val="0"/>
+              </a:spcAft>
+              <a:buClr>
+                <a:srgbClr val="000000"/>
+              </a:buClr>
               <a:buSzPts val="1400"/>
+              <a:buFont typeface="Arial"/>
               <a:buNone/>
               <a:defRPr b="0" i="0" sz="1200" u="none" cap="none" strike="noStrike">
                 <a:solidFill>
@@ -883,13 +1051,20 @@
               </a:defRPr>
             </a:lvl6pPr>
             <a:lvl7pPr indent="-228600" lvl="6" marL="3200400" marR="0" rtl="0" algn="l">
-              <a:spcBef>
-                <a:spcPts val="0"/>
-              </a:spcBef>
-              <a:spcAft>
-                <a:spcPts val="0"/>
-              </a:spcAft>
+              <a:lnSpc>
+                <a:spcPct val="100000"/>
+              </a:lnSpc>
+              <a:spcBef>
+                <a:spcPts val="0"/>
+              </a:spcBef>
+              <a:spcAft>
+                <a:spcPts val="0"/>
+              </a:spcAft>
+              <a:buClr>
+                <a:srgbClr val="000000"/>
+              </a:buClr>
               <a:buSzPts val="1400"/>
+              <a:buFont typeface="Arial"/>
               <a:buNone/>
               <a:defRPr b="0" i="0" sz="1200" u="none" cap="none" strike="noStrike">
                 <a:solidFill>
@@ -902,13 +1077,20 @@
               </a:defRPr>
             </a:lvl7pPr>
             <a:lvl8pPr indent="-228600" lvl="7" marL="3657600" marR="0" rtl="0" algn="l">
-              <a:spcBef>
-                <a:spcPts val="0"/>
-              </a:spcBef>
-              <a:spcAft>
-                <a:spcPts val="0"/>
-              </a:spcAft>
+              <a:lnSpc>
+                <a:spcPct val="100000"/>
+              </a:lnSpc>
+              <a:spcBef>
+                <a:spcPts val="0"/>
+              </a:spcBef>
+              <a:spcAft>
+                <a:spcPts val="0"/>
+              </a:spcAft>
+              <a:buClr>
+                <a:srgbClr val="000000"/>
+              </a:buClr>
               <a:buSzPts val="1400"/>
+              <a:buFont typeface="Arial"/>
               <a:buNone/>
               <a:defRPr b="0" i="0" sz="1200" u="none" cap="none" strike="noStrike">
                 <a:solidFill>
@@ -921,13 +1103,20 @@
               </a:defRPr>
             </a:lvl8pPr>
             <a:lvl9pPr indent="-228600" lvl="8" marL="4114800" marR="0" rtl="0" algn="l">
-              <a:spcBef>
-                <a:spcPts val="0"/>
-              </a:spcBef>
-              <a:spcAft>
-                <a:spcPts val="0"/>
-              </a:spcAft>
+              <a:lnSpc>
+                <a:spcPct val="100000"/>
+              </a:lnSpc>
+              <a:spcBef>
+                <a:spcPts val="0"/>
+              </a:spcBef>
+              <a:spcAft>
+                <a:spcPts val="0"/>
+              </a:spcAft>
+              <a:buClr>
+                <a:srgbClr val="000000"/>
+              </a:buClr>
               <a:buSzPts val="1400"/>
+              <a:buFont typeface="Arial"/>
               <a:buNone/>
               <a:defRPr b="0" i="0" sz="1200" u="none" cap="none" strike="noStrike">
                 <a:solidFill>
@@ -970,13 +1159,20 @@
           </a:bodyPr>
           <a:lstStyle>
             <a:lvl1pPr lvl="0" marR="0" rtl="0" algn="l">
-              <a:spcBef>
-                <a:spcPts val="0"/>
-              </a:spcBef>
-              <a:spcAft>
-                <a:spcPts val="0"/>
-              </a:spcAft>
+              <a:lnSpc>
+                <a:spcPct val="100000"/>
+              </a:lnSpc>
+              <a:spcBef>
+                <a:spcPts val="0"/>
+              </a:spcBef>
+              <a:spcAft>
+                <a:spcPts val="0"/>
+              </a:spcAft>
+              <a:buClr>
+                <a:srgbClr val="000000"/>
+              </a:buClr>
               <a:buSzPts val="1400"/>
+              <a:buFont typeface="Arial"/>
               <a:buNone/>
               <a:defRPr b="0" i="0" sz="1200" u="none" cap="none" strike="noStrike">
                 <a:solidFill>
@@ -989,13 +1185,20 @@
               </a:defRPr>
             </a:lvl1pPr>
             <a:lvl2pPr lvl="1" marR="0" rtl="0" algn="l">
-              <a:spcBef>
-                <a:spcPts val="0"/>
-              </a:spcBef>
-              <a:spcAft>
-                <a:spcPts val="0"/>
-              </a:spcAft>
+              <a:lnSpc>
+                <a:spcPct val="100000"/>
+              </a:lnSpc>
+              <a:spcBef>
+                <a:spcPts val="0"/>
+              </a:spcBef>
+              <a:spcAft>
+                <a:spcPts val="0"/>
+              </a:spcAft>
+              <a:buClr>
+                <a:srgbClr val="000000"/>
+              </a:buClr>
               <a:buSzPts val="1400"/>
+              <a:buFont typeface="Arial"/>
               <a:buNone/>
               <a:defRPr b="0" i="0" sz="1800" u="none" cap="none" strike="noStrike">
                 <a:solidFill>
@@ -1008,13 +1211,20 @@
               </a:defRPr>
             </a:lvl2pPr>
             <a:lvl3pPr lvl="2" marR="0" rtl="0" algn="l">
-              <a:spcBef>
-                <a:spcPts val="0"/>
-              </a:spcBef>
-              <a:spcAft>
-                <a:spcPts val="0"/>
-              </a:spcAft>
+              <a:lnSpc>
+                <a:spcPct val="100000"/>
+              </a:lnSpc>
+              <a:spcBef>
+                <a:spcPts val="0"/>
+              </a:spcBef>
+              <a:spcAft>
+                <a:spcPts val="0"/>
+              </a:spcAft>
+              <a:buClr>
+                <a:srgbClr val="000000"/>
+              </a:buClr>
               <a:buSzPts val="1400"/>
+              <a:buFont typeface="Arial"/>
               <a:buNone/>
               <a:defRPr b="0" i="0" sz="1800" u="none" cap="none" strike="noStrike">
                 <a:solidFill>
@@ -1027,13 +1237,20 @@
               </a:defRPr>
             </a:lvl3pPr>
             <a:lvl4pPr lvl="3" marR="0" rtl="0" algn="l">
-              <a:spcBef>
-                <a:spcPts val="0"/>
-              </a:spcBef>
-              <a:spcAft>
-                <a:spcPts val="0"/>
-              </a:spcAft>
+              <a:lnSpc>
+                <a:spcPct val="100000"/>
+              </a:lnSpc>
+              <a:spcBef>
+                <a:spcPts val="0"/>
+              </a:spcBef>
+              <a:spcAft>
+                <a:spcPts val="0"/>
+              </a:spcAft>
+              <a:buClr>
+                <a:srgbClr val="000000"/>
+              </a:buClr>
               <a:buSzPts val="1400"/>
+              <a:buFont typeface="Arial"/>
               <a:buNone/>
               <a:defRPr b="0" i="0" sz="1800" u="none" cap="none" strike="noStrike">
                 <a:solidFill>
@@ -1046,13 +1263,20 @@
               </a:defRPr>
             </a:lvl4pPr>
             <a:lvl5pPr lvl="4" marR="0" rtl="0" algn="l">
-              <a:spcBef>
-                <a:spcPts val="0"/>
-              </a:spcBef>
-              <a:spcAft>
-                <a:spcPts val="0"/>
-              </a:spcAft>
+              <a:lnSpc>
+                <a:spcPct val="100000"/>
+              </a:lnSpc>
+              <a:spcBef>
+                <a:spcPts val="0"/>
+              </a:spcBef>
+              <a:spcAft>
+                <a:spcPts val="0"/>
+              </a:spcAft>
+              <a:buClr>
+                <a:srgbClr val="000000"/>
+              </a:buClr>
               <a:buSzPts val="1400"/>
+              <a:buFont typeface="Arial"/>
               <a:buNone/>
               <a:defRPr b="0" i="0" sz="1800" u="none" cap="none" strike="noStrike">
                 <a:solidFill>
@@ -1065,13 +1289,20 @@
               </a:defRPr>
             </a:lvl5pPr>
             <a:lvl6pPr lvl="5" marR="0" rtl="0" algn="l">
-              <a:spcBef>
-                <a:spcPts val="0"/>
-              </a:spcBef>
-              <a:spcAft>
-                <a:spcPts val="0"/>
-              </a:spcAft>
+              <a:lnSpc>
+                <a:spcPct val="100000"/>
+              </a:lnSpc>
+              <a:spcBef>
+                <a:spcPts val="0"/>
+              </a:spcBef>
+              <a:spcAft>
+                <a:spcPts val="0"/>
+              </a:spcAft>
+              <a:buClr>
+                <a:srgbClr val="000000"/>
+              </a:buClr>
               <a:buSzPts val="1400"/>
+              <a:buFont typeface="Arial"/>
               <a:buNone/>
               <a:defRPr b="0" i="0" sz="1800" u="none" cap="none" strike="noStrike">
                 <a:solidFill>
@@ -1084,13 +1315,20 @@
               </a:defRPr>
             </a:lvl6pPr>
             <a:lvl7pPr lvl="6" marR="0" rtl="0" algn="l">
-              <a:spcBef>
-                <a:spcPts val="0"/>
-              </a:spcBef>
-              <a:spcAft>
-                <a:spcPts val="0"/>
-              </a:spcAft>
+              <a:lnSpc>
+                <a:spcPct val="100000"/>
+              </a:lnSpc>
+              <a:spcBef>
+                <a:spcPts val="0"/>
+              </a:spcBef>
+              <a:spcAft>
+                <a:spcPts val="0"/>
+              </a:spcAft>
+              <a:buClr>
+                <a:srgbClr val="000000"/>
+              </a:buClr>
               <a:buSzPts val="1400"/>
+              <a:buFont typeface="Arial"/>
               <a:buNone/>
               <a:defRPr b="0" i="0" sz="1800" u="none" cap="none" strike="noStrike">
                 <a:solidFill>
@@ -1103,13 +1341,20 @@
               </a:defRPr>
             </a:lvl7pPr>
             <a:lvl8pPr lvl="7" marR="0" rtl="0" algn="l">
-              <a:spcBef>
-                <a:spcPts val="0"/>
-              </a:spcBef>
-              <a:spcAft>
-                <a:spcPts val="0"/>
-              </a:spcAft>
+              <a:lnSpc>
+                <a:spcPct val="100000"/>
+              </a:lnSpc>
+              <a:spcBef>
+                <a:spcPts val="0"/>
+              </a:spcBef>
+              <a:spcAft>
+                <a:spcPts val="0"/>
+              </a:spcAft>
+              <a:buClr>
+                <a:srgbClr val="000000"/>
+              </a:buClr>
               <a:buSzPts val="1400"/>
+              <a:buFont typeface="Arial"/>
               <a:buNone/>
               <a:defRPr b="0" i="0" sz="1800" u="none" cap="none" strike="noStrike">
                 <a:solidFill>
@@ -1122,13 +1367,20 @@
               </a:defRPr>
             </a:lvl8pPr>
             <a:lvl9pPr lvl="8" marR="0" rtl="0" algn="l">
-              <a:spcBef>
-                <a:spcPts val="0"/>
-              </a:spcBef>
-              <a:spcAft>
-                <a:spcPts val="0"/>
-              </a:spcAft>
+              <a:lnSpc>
+                <a:spcPct val="100000"/>
+              </a:lnSpc>
+              <a:spcBef>
+                <a:spcPts val="0"/>
+              </a:spcBef>
+              <a:spcAft>
+                <a:spcPts val="0"/>
+              </a:spcAft>
+              <a:buClr>
+                <a:srgbClr val="000000"/>
+              </a:buClr>
               <a:buSzPts val="1400"/>
+              <a:buFont typeface="Arial"/>
               <a:buNone/>
               <a:defRPr b="0" i="0" sz="1800" u="none" cap="none" strike="noStrike">
                 <a:solidFill>
@@ -1172,12 +1424,20 @@
           <a:lstStyle/>
           <a:p>
             <a:pPr indent="0" lvl="0" marL="0" marR="0" rtl="0" algn="r">
-              <a:spcBef>
-                <a:spcPts val="0"/>
-              </a:spcBef>
-              <a:spcAft>
-                <a:spcPts val="0"/>
-              </a:spcAft>
+              <a:lnSpc>
+                <a:spcPct val="100000"/>
+              </a:lnSpc>
+              <a:spcBef>
+                <a:spcPts val="0"/>
+              </a:spcBef>
+              <a:spcAft>
+                <a:spcPts val="0"/>
+              </a:spcAft>
+              <a:buClr>
+                <a:srgbClr val="000000"/>
+              </a:buClr>
+              <a:buSzPts val="1200"/>
+              <a:buFont typeface="Arial"/>
               <a:buNone/>
             </a:pPr>
             <a:fld id="{00000000-1234-1234-1234-123412341234}" type="slidenum">
@@ -1529,12 +1789,16 @@
           <a:lstStyle/>
           <a:p>
             <a:pPr indent="0" lvl="0" marL="0" rtl="0" algn="l">
-              <a:spcBef>
-                <a:spcPts val="0"/>
-              </a:spcBef>
-              <a:spcAft>
-                <a:spcPts val="0"/>
-              </a:spcAft>
+              <a:lnSpc>
+                <a:spcPct val="100000"/>
+              </a:lnSpc>
+              <a:spcBef>
+                <a:spcPts val="0"/>
+              </a:spcBef>
+              <a:spcAft>
+                <a:spcPts val="0"/>
+              </a:spcAft>
+              <a:buSzPts val="1400"/>
               <a:buNone/>
             </a:pPr>
             <a:r>
@@ -1572,12 +1836,16 @@
           <a:lstStyle/>
           <a:p>
             <a:pPr indent="0" lvl="0" marL="0" rtl="0" algn="r">
-              <a:spcBef>
-                <a:spcPts val="0"/>
-              </a:spcBef>
-              <a:spcAft>
-                <a:spcPts val="0"/>
-              </a:spcAft>
+              <a:lnSpc>
+                <a:spcPct val="100000"/>
+              </a:lnSpc>
+              <a:spcBef>
+                <a:spcPts val="0"/>
+              </a:spcBef>
+              <a:spcAft>
+                <a:spcPts val="0"/>
+              </a:spcAft>
+              <a:buSzPts val="1400"/>
               <a:buNone/>
             </a:pPr>
             <a:fld id="{00000000-1234-1234-1234-123412341234}" type="slidenum">
@@ -1686,12 +1954,16 @@
           <a:lstStyle/>
           <a:p>
             <a:pPr indent="0" lvl="0" marL="0" rtl="0" algn="l">
-              <a:spcBef>
-                <a:spcPts val="0"/>
-              </a:spcBef>
-              <a:spcAft>
-                <a:spcPts val="0"/>
-              </a:spcAft>
+              <a:lnSpc>
+                <a:spcPct val="100000"/>
+              </a:lnSpc>
+              <a:spcBef>
+                <a:spcPts val="0"/>
+              </a:spcBef>
+              <a:spcAft>
+                <a:spcPts val="0"/>
+              </a:spcAft>
+              <a:buSzPts val="1400"/>
               <a:buNone/>
             </a:pPr>
             <a:r>
@@ -1729,12 +2001,16 @@
           <a:lstStyle/>
           <a:p>
             <a:pPr indent="0" lvl="0" marL="0" rtl="0" algn="r">
-              <a:spcBef>
-                <a:spcPts val="0"/>
-              </a:spcBef>
-              <a:spcAft>
-                <a:spcPts val="0"/>
-              </a:spcAft>
+              <a:lnSpc>
+                <a:spcPct val="100000"/>
+              </a:lnSpc>
+              <a:spcBef>
+                <a:spcPts val="0"/>
+              </a:spcBef>
+              <a:spcAft>
+                <a:spcPts val="0"/>
+              </a:spcAft>
+              <a:buSzPts val="1400"/>
               <a:buNone/>
             </a:pPr>
             <a:fld id="{00000000-1234-1234-1234-123412341234}" type="slidenum">
@@ -1843,12 +2119,16 @@
           <a:lstStyle/>
           <a:p>
             <a:pPr indent="0" lvl="0" marL="0" rtl="0" algn="l">
-              <a:spcBef>
-                <a:spcPts val="0"/>
-              </a:spcBef>
-              <a:spcAft>
-                <a:spcPts val="0"/>
-              </a:spcAft>
+              <a:lnSpc>
+                <a:spcPct val="100000"/>
+              </a:lnSpc>
+              <a:spcBef>
+                <a:spcPts val="0"/>
+              </a:spcBef>
+              <a:spcAft>
+                <a:spcPts val="0"/>
+              </a:spcAft>
+              <a:buSzPts val="1400"/>
               <a:buNone/>
             </a:pPr>
             <a:r>
@@ -1886,12 +2166,16 @@
           <a:lstStyle/>
           <a:p>
             <a:pPr indent="0" lvl="0" marL="0" rtl="0" algn="r">
-              <a:spcBef>
-                <a:spcPts val="0"/>
-              </a:spcBef>
-              <a:spcAft>
-                <a:spcPts val="0"/>
-              </a:spcAft>
+              <a:lnSpc>
+                <a:spcPct val="100000"/>
+              </a:lnSpc>
+              <a:spcBef>
+                <a:spcPts val="0"/>
+              </a:spcBef>
+              <a:spcAft>
+                <a:spcPts val="0"/>
+              </a:spcAft>
+              <a:buSzPts val="1400"/>
               <a:buNone/>
             </a:pPr>
             <a:fld id="{00000000-1234-1234-1234-123412341234}" type="slidenum">
@@ -2000,12 +2284,16 @@
           <a:lstStyle/>
           <a:p>
             <a:pPr indent="0" lvl="0" marL="0" rtl="0" algn="l">
-              <a:spcBef>
-                <a:spcPts val="0"/>
-              </a:spcBef>
-              <a:spcAft>
-                <a:spcPts val="0"/>
-              </a:spcAft>
+              <a:lnSpc>
+                <a:spcPct val="100000"/>
+              </a:lnSpc>
+              <a:spcBef>
+                <a:spcPts val="0"/>
+              </a:spcBef>
+              <a:spcAft>
+                <a:spcPts val="0"/>
+              </a:spcAft>
+              <a:buSzPts val="1400"/>
               <a:buNone/>
             </a:pPr>
             <a:r>
@@ -2043,12 +2331,16 @@
           <a:lstStyle/>
           <a:p>
             <a:pPr indent="0" lvl="0" marL="0" rtl="0" algn="r">
-              <a:spcBef>
-                <a:spcPts val="0"/>
-              </a:spcBef>
-              <a:spcAft>
-                <a:spcPts val="0"/>
-              </a:spcAft>
+              <a:lnSpc>
+                <a:spcPct val="100000"/>
+              </a:lnSpc>
+              <a:spcBef>
+                <a:spcPts val="0"/>
+              </a:spcBef>
+              <a:spcAft>
+                <a:spcPts val="0"/>
+              </a:spcAft>
+              <a:buSzPts val="1400"/>
               <a:buNone/>
             </a:pPr>
             <a:fld id="{00000000-1234-1234-1234-123412341234}" type="slidenum">
@@ -2157,12 +2449,16 @@
           <a:lstStyle/>
           <a:p>
             <a:pPr indent="0" lvl="0" marL="0" rtl="0" algn="l">
-              <a:spcBef>
-                <a:spcPts val="0"/>
-              </a:spcBef>
-              <a:spcAft>
-                <a:spcPts val="0"/>
-              </a:spcAft>
+              <a:lnSpc>
+                <a:spcPct val="100000"/>
+              </a:lnSpc>
+              <a:spcBef>
+                <a:spcPts val="0"/>
+              </a:spcBef>
+              <a:spcAft>
+                <a:spcPts val="0"/>
+              </a:spcAft>
+              <a:buSzPts val="1400"/>
               <a:buNone/>
             </a:pPr>
             <a:r>
@@ -2200,12 +2496,16 @@
           <a:lstStyle/>
           <a:p>
             <a:pPr indent="0" lvl="0" marL="0" rtl="0" algn="r">
-              <a:spcBef>
-                <a:spcPts val="0"/>
-              </a:spcBef>
-              <a:spcAft>
-                <a:spcPts val="0"/>
-              </a:spcAft>
+              <a:lnSpc>
+                <a:spcPct val="100000"/>
+              </a:lnSpc>
+              <a:spcBef>
+                <a:spcPts val="0"/>
+              </a:spcBef>
+              <a:spcAft>
+                <a:spcPts val="0"/>
+              </a:spcAft>
+              <a:buSzPts val="1400"/>
               <a:buNone/>
             </a:pPr>
             <a:fld id="{00000000-1234-1234-1234-123412341234}" type="slidenum">
@@ -2314,12 +2614,16 @@
           <a:lstStyle/>
           <a:p>
             <a:pPr indent="0" lvl="0" marL="0" rtl="0" algn="l">
-              <a:spcBef>
-                <a:spcPts val="0"/>
-              </a:spcBef>
-              <a:spcAft>
-                <a:spcPts val="0"/>
-              </a:spcAft>
+              <a:lnSpc>
+                <a:spcPct val="100000"/>
+              </a:lnSpc>
+              <a:spcBef>
+                <a:spcPts val="0"/>
+              </a:spcBef>
+              <a:spcAft>
+                <a:spcPts val="0"/>
+              </a:spcAft>
+              <a:buSzPts val="1400"/>
               <a:buNone/>
             </a:pPr>
             <a:r>
@@ -2357,12 +2661,16 @@
           <a:lstStyle/>
           <a:p>
             <a:pPr indent="0" lvl="0" marL="0" rtl="0" algn="r">
-              <a:spcBef>
-                <a:spcPts val="0"/>
-              </a:spcBef>
-              <a:spcAft>
-                <a:spcPts val="0"/>
-              </a:spcAft>
+              <a:lnSpc>
+                <a:spcPct val="100000"/>
+              </a:lnSpc>
+              <a:spcBef>
+                <a:spcPts val="0"/>
+              </a:spcBef>
+              <a:spcAft>
+                <a:spcPts val="0"/>
+              </a:spcAft>
+              <a:buSzPts val="1400"/>
               <a:buNone/>
             </a:pPr>
             <a:fld id="{00000000-1234-1234-1234-123412341234}" type="slidenum">
@@ -2471,12 +2779,16 @@
           <a:lstStyle/>
           <a:p>
             <a:pPr indent="0" lvl="0" marL="0" rtl="0" algn="l">
-              <a:spcBef>
-                <a:spcPts val="0"/>
-              </a:spcBef>
-              <a:spcAft>
-                <a:spcPts val="0"/>
-              </a:spcAft>
+              <a:lnSpc>
+                <a:spcPct val="100000"/>
+              </a:lnSpc>
+              <a:spcBef>
+                <a:spcPts val="0"/>
+              </a:spcBef>
+              <a:spcAft>
+                <a:spcPts val="0"/>
+              </a:spcAft>
+              <a:buSzPts val="1400"/>
               <a:buNone/>
             </a:pPr>
             <a:r>
@@ -2514,12 +2826,16 @@
           <a:lstStyle/>
           <a:p>
             <a:pPr indent="0" lvl="0" marL="0" rtl="0" algn="r">
-              <a:spcBef>
-                <a:spcPts val="0"/>
-              </a:spcBef>
-              <a:spcAft>
-                <a:spcPts val="0"/>
-              </a:spcAft>
+              <a:lnSpc>
+                <a:spcPct val="100000"/>
+              </a:lnSpc>
+              <a:spcBef>
+                <a:spcPts val="0"/>
+              </a:spcBef>
+              <a:spcAft>
+                <a:spcPts val="0"/>
+              </a:spcAft>
+              <a:buSzPts val="1400"/>
               <a:buNone/>
             </a:pPr>
             <a:fld id="{00000000-1234-1234-1234-123412341234}" type="slidenum">
@@ -2628,12 +2944,16 @@
           <a:lstStyle/>
           <a:p>
             <a:pPr indent="0" lvl="0" marL="0" rtl="0" algn="l">
-              <a:spcBef>
-                <a:spcPts val="0"/>
-              </a:spcBef>
-              <a:spcAft>
-                <a:spcPts val="0"/>
-              </a:spcAft>
+              <a:lnSpc>
+                <a:spcPct val="100000"/>
+              </a:lnSpc>
+              <a:spcBef>
+                <a:spcPts val="0"/>
+              </a:spcBef>
+              <a:spcAft>
+                <a:spcPts val="0"/>
+              </a:spcAft>
+              <a:buSzPts val="1400"/>
               <a:buNone/>
             </a:pPr>
             <a:r>
@@ -2671,12 +2991,16 @@
           <a:lstStyle/>
           <a:p>
             <a:pPr indent="0" lvl="0" marL="0" rtl="0" algn="r">
-              <a:spcBef>
-                <a:spcPts val="0"/>
-              </a:spcBef>
-              <a:spcAft>
-                <a:spcPts val="0"/>
-              </a:spcAft>
+              <a:lnSpc>
+                <a:spcPct val="100000"/>
+              </a:lnSpc>
+              <a:spcBef>
+                <a:spcPts val="0"/>
+              </a:spcBef>
+              <a:spcAft>
+                <a:spcPts val="0"/>
+              </a:spcAft>
+              <a:buSzPts val="1400"/>
               <a:buNone/>
             </a:pPr>
             <a:fld id="{00000000-1234-1234-1234-123412341234}" type="slidenum">
@@ -2785,12 +3109,16 @@
           <a:lstStyle/>
           <a:p>
             <a:pPr indent="0" lvl="0" marL="0" rtl="0" algn="l">
-              <a:spcBef>
-                <a:spcPts val="0"/>
-              </a:spcBef>
-              <a:spcAft>
-                <a:spcPts val="0"/>
-              </a:spcAft>
+              <a:lnSpc>
+                <a:spcPct val="100000"/>
+              </a:lnSpc>
+              <a:spcBef>
+                <a:spcPts val="0"/>
+              </a:spcBef>
+              <a:spcAft>
+                <a:spcPts val="0"/>
+              </a:spcAft>
+              <a:buSzPts val="1400"/>
               <a:buNone/>
             </a:pPr>
             <a:r>
@@ -2828,12 +3156,16 @@
           <a:lstStyle/>
           <a:p>
             <a:pPr indent="0" lvl="0" marL="0" rtl="0" algn="r">
-              <a:spcBef>
-                <a:spcPts val="0"/>
-              </a:spcBef>
-              <a:spcAft>
-                <a:spcPts val="0"/>
-              </a:spcAft>
+              <a:lnSpc>
+                <a:spcPct val="100000"/>
+              </a:lnSpc>
+              <a:spcBef>
+                <a:spcPts val="0"/>
+              </a:spcBef>
+              <a:spcAft>
+                <a:spcPts val="0"/>
+              </a:spcAft>
+              <a:buSzPts val="1400"/>
               <a:buNone/>
             </a:pPr>
             <a:fld id="{00000000-1234-1234-1234-123412341234}" type="slidenum">
@@ -2942,12 +3274,16 @@
           <a:lstStyle/>
           <a:p>
             <a:pPr indent="0" lvl="0" marL="0" rtl="0" algn="l">
-              <a:spcBef>
-                <a:spcPts val="0"/>
-              </a:spcBef>
-              <a:spcAft>
-                <a:spcPts val="0"/>
-              </a:spcAft>
+              <a:lnSpc>
+                <a:spcPct val="100000"/>
+              </a:lnSpc>
+              <a:spcBef>
+                <a:spcPts val="0"/>
+              </a:spcBef>
+              <a:spcAft>
+                <a:spcPts val="0"/>
+              </a:spcAft>
+              <a:buSzPts val="1400"/>
               <a:buNone/>
             </a:pPr>
             <a:r>
@@ -2985,12 +3321,16 @@
           <a:lstStyle/>
           <a:p>
             <a:pPr indent="0" lvl="0" marL="0" rtl="0" algn="r">
-              <a:spcBef>
-                <a:spcPts val="0"/>
-              </a:spcBef>
-              <a:spcAft>
-                <a:spcPts val="0"/>
-              </a:spcAft>
+              <a:lnSpc>
+                <a:spcPct val="100000"/>
+              </a:lnSpc>
+              <a:spcBef>
+                <a:spcPts val="0"/>
+              </a:spcBef>
+              <a:spcAft>
+                <a:spcPts val="0"/>
+              </a:spcAft>
+              <a:buSzPts val="1400"/>
               <a:buNone/>
             </a:pPr>
             <a:fld id="{00000000-1234-1234-1234-123412341234}" type="slidenum">
@@ -3099,12 +3439,16 @@
           <a:lstStyle/>
           <a:p>
             <a:pPr indent="0" lvl="0" marL="0" rtl="0" algn="l">
-              <a:spcBef>
-                <a:spcPts val="0"/>
-              </a:spcBef>
-              <a:spcAft>
-                <a:spcPts val="0"/>
-              </a:spcAft>
+              <a:lnSpc>
+                <a:spcPct val="100000"/>
+              </a:lnSpc>
+              <a:spcBef>
+                <a:spcPts val="0"/>
+              </a:spcBef>
+              <a:spcAft>
+                <a:spcPts val="0"/>
+              </a:spcAft>
+              <a:buSzPts val="1400"/>
               <a:buNone/>
             </a:pPr>
             <a:r>
@@ -3142,12 +3486,16 @@
           <a:lstStyle/>
           <a:p>
             <a:pPr indent="0" lvl="0" marL="0" rtl="0" algn="r">
-              <a:spcBef>
-                <a:spcPts val="0"/>
-              </a:spcBef>
-              <a:spcAft>
-                <a:spcPts val="0"/>
-              </a:spcAft>
+              <a:lnSpc>
+                <a:spcPct val="100000"/>
+              </a:lnSpc>
+              <a:spcBef>
+                <a:spcPts val="0"/>
+              </a:spcBef>
+              <a:spcAft>
+                <a:spcPts val="0"/>
+              </a:spcAft>
+              <a:buSzPts val="1400"/>
               <a:buNone/>
             </a:pPr>
             <a:fld id="{00000000-1234-1234-1234-123412341234}" type="slidenum">
@@ -3256,12 +3604,16 @@
           <a:lstStyle/>
           <a:p>
             <a:pPr indent="0" lvl="0" marL="0" rtl="0" algn="l">
-              <a:spcBef>
-                <a:spcPts val="0"/>
-              </a:spcBef>
-              <a:spcAft>
-                <a:spcPts val="0"/>
-              </a:spcAft>
+              <a:lnSpc>
+                <a:spcPct val="100000"/>
+              </a:lnSpc>
+              <a:spcBef>
+                <a:spcPts val="0"/>
+              </a:spcBef>
+              <a:spcAft>
+                <a:spcPts val="0"/>
+              </a:spcAft>
+              <a:buSzPts val="1400"/>
               <a:buNone/>
             </a:pPr>
             <a:r>
@@ -3299,12 +3651,16 @@
           <a:lstStyle/>
           <a:p>
             <a:pPr indent="0" lvl="0" marL="0" rtl="0" algn="r">
-              <a:spcBef>
-                <a:spcPts val="0"/>
-              </a:spcBef>
-              <a:spcAft>
-                <a:spcPts val="0"/>
-              </a:spcAft>
+              <a:lnSpc>
+                <a:spcPct val="100000"/>
+              </a:lnSpc>
+              <a:spcBef>
+                <a:spcPts val="0"/>
+              </a:spcBef>
+              <a:spcAft>
+                <a:spcPts val="0"/>
+              </a:spcAft>
+              <a:buSzPts val="1400"/>
               <a:buNone/>
             </a:pPr>
             <a:fld id="{00000000-1234-1234-1234-123412341234}" type="slidenum">
@@ -3413,12 +3769,16 @@
           <a:lstStyle/>
           <a:p>
             <a:pPr indent="0" lvl="0" marL="0" rtl="0" algn="l">
-              <a:spcBef>
-                <a:spcPts val="0"/>
-              </a:spcBef>
-              <a:spcAft>
-                <a:spcPts val="0"/>
-              </a:spcAft>
+              <a:lnSpc>
+                <a:spcPct val="100000"/>
+              </a:lnSpc>
+              <a:spcBef>
+                <a:spcPts val="0"/>
+              </a:spcBef>
+              <a:spcAft>
+                <a:spcPts val="0"/>
+              </a:spcAft>
+              <a:buSzPts val="1400"/>
               <a:buNone/>
             </a:pPr>
             <a:r>
@@ -3456,12 +3816,16 @@
           <a:lstStyle/>
           <a:p>
             <a:pPr indent="0" lvl="0" marL="0" rtl="0" algn="r">
-              <a:spcBef>
-                <a:spcPts val="0"/>
-              </a:spcBef>
-              <a:spcAft>
-                <a:spcPts val="0"/>
-              </a:spcAft>
+              <a:lnSpc>
+                <a:spcPct val="100000"/>
+              </a:lnSpc>
+              <a:spcBef>
+                <a:spcPts val="0"/>
+              </a:spcBef>
+              <a:spcAft>
+                <a:spcPts val="0"/>
+              </a:spcAft>
+              <a:buSzPts val="1400"/>
               <a:buNone/>
             </a:pPr>
             <a:fld id="{00000000-1234-1234-1234-123412341234}" type="slidenum">
@@ -3570,12 +3934,16 @@
           <a:lstStyle/>
           <a:p>
             <a:pPr indent="0" lvl="0" marL="0" rtl="0" algn="l">
-              <a:spcBef>
-                <a:spcPts val="0"/>
-              </a:spcBef>
-              <a:spcAft>
-                <a:spcPts val="0"/>
-              </a:spcAft>
+              <a:lnSpc>
+                <a:spcPct val="100000"/>
+              </a:lnSpc>
+              <a:spcBef>
+                <a:spcPts val="0"/>
+              </a:spcBef>
+              <a:spcAft>
+                <a:spcPts val="0"/>
+              </a:spcAft>
+              <a:buSzPts val="1400"/>
               <a:buNone/>
             </a:pPr>
             <a:r>
@@ -3613,12 +3981,16 @@
           <a:lstStyle/>
           <a:p>
             <a:pPr indent="0" lvl="0" marL="0" rtl="0" algn="r">
-              <a:spcBef>
-                <a:spcPts val="0"/>
-              </a:spcBef>
-              <a:spcAft>
-                <a:spcPts val="0"/>
-              </a:spcAft>
+              <a:lnSpc>
+                <a:spcPct val="100000"/>
+              </a:lnSpc>
+              <a:spcBef>
+                <a:spcPts val="0"/>
+              </a:spcBef>
+              <a:spcAft>
+                <a:spcPts val="0"/>
+              </a:spcAft>
+              <a:buSzPts val="1400"/>
               <a:buNone/>
             </a:pPr>
             <a:fld id="{00000000-1234-1234-1234-123412341234}" type="slidenum">
@@ -4462,6 +4834,9 @@
           <a:lstStyle/>
           <a:p>
             <a:pPr indent="0" lvl="0" marL="0" marR="0" rtl="0" algn="l">
+              <a:lnSpc>
+                <a:spcPct val="100000"/>
+              </a:lnSpc>
               <a:spcBef>
                 <a:spcPts val="0"/>
               </a:spcBef>
@@ -4525,6 +4900,9 @@
           <a:lstStyle/>
           <a:p>
             <a:pPr indent="0" lvl="0" marL="0" marR="0" rtl="0" algn="l">
+              <a:lnSpc>
+                <a:spcPct val="100000"/>
+              </a:lnSpc>
               <a:spcBef>
                 <a:spcPts val="0"/>
               </a:spcBef>
@@ -4597,19 +4975,35 @@
           </a:bodyPr>
           <a:lstStyle/>
           <a:p>
-            <a:pPr indent="0" lvl="0" marL="0" rtl="0" algn="l">
-              <a:spcBef>
-                <a:spcPts val="0"/>
-              </a:spcBef>
-              <a:spcAft>
-                <a:spcPts val="0"/>
-              </a:spcAft>
+            <a:pPr indent="0" lvl="0" marL="0" marR="0" rtl="0" algn="l">
+              <a:lnSpc>
+                <a:spcPct val="100000"/>
+              </a:lnSpc>
+              <a:spcBef>
+                <a:spcPts val="0"/>
+              </a:spcBef>
+              <a:spcAft>
+                <a:spcPts val="0"/>
+              </a:spcAft>
+              <a:buClr>
+                <a:srgbClr val="000000"/>
+              </a:buClr>
+              <a:buSzPts val="1400"/>
+              <a:buFont typeface="Arial"/>
               <a:buNone/>
             </a:pPr>
             <a:r>
               <a:t/>
             </a:r>
-            <a:endParaRPr/>
+            <a:endParaRPr b="0" i="0" sz="1400" u="none" cap="none" strike="noStrike">
+              <a:solidFill>
+                <a:srgbClr val="000000"/>
+              </a:solidFill>
+              <a:latin typeface="Arial"/>
+              <a:ea typeface="Arial"/>
+              <a:cs typeface="Arial"/>
+              <a:sym typeface="Arial"/>
+            </a:endParaRPr>
           </a:p>
         </p:txBody>
       </p:sp>
@@ -4640,19 +5034,35 @@
           </a:bodyPr>
           <a:lstStyle/>
           <a:p>
-            <a:pPr indent="0" lvl="0" marL="0" rtl="0" algn="l">
-              <a:spcBef>
-                <a:spcPts val="0"/>
-              </a:spcBef>
-              <a:spcAft>
-                <a:spcPts val="0"/>
-              </a:spcAft>
+            <a:pPr indent="0" lvl="0" marL="0" marR="0" rtl="0" algn="l">
+              <a:lnSpc>
+                <a:spcPct val="100000"/>
+              </a:lnSpc>
+              <a:spcBef>
+                <a:spcPts val="0"/>
+              </a:spcBef>
+              <a:spcAft>
+                <a:spcPts val="0"/>
+              </a:spcAft>
+              <a:buClr>
+                <a:srgbClr val="000000"/>
+              </a:buClr>
+              <a:buSzPts val="1400"/>
+              <a:buFont typeface="Arial"/>
               <a:buNone/>
             </a:pPr>
             <a:r>
               <a:t/>
             </a:r>
-            <a:endParaRPr/>
+            <a:endParaRPr b="0" i="0" sz="1400" u="none" cap="none" strike="noStrike">
+              <a:solidFill>
+                <a:srgbClr val="000000"/>
+              </a:solidFill>
+              <a:latin typeface="Arial"/>
+              <a:ea typeface="Arial"/>
+              <a:cs typeface="Arial"/>
+              <a:sym typeface="Arial"/>
+            </a:endParaRPr>
           </a:p>
         </p:txBody>
       </p:sp>
@@ -4682,6 +5092,9 @@
           <a:lstStyle/>
           <a:p>
             <a:pPr indent="0" lvl="0" marL="0" marR="0" rtl="0" algn="l">
+              <a:lnSpc>
+                <a:spcPct val="100000"/>
+              </a:lnSpc>
               <a:spcBef>
                 <a:spcPts val="0"/>
               </a:spcBef>
@@ -4922,19 +5335,35 @@
           </a:bodyPr>
           <a:lstStyle/>
           <a:p>
-            <a:pPr indent="0" lvl="0" marL="0" rtl="0" algn="l">
-              <a:spcBef>
-                <a:spcPts val="0"/>
-              </a:spcBef>
-              <a:spcAft>
-                <a:spcPts val="0"/>
-              </a:spcAft>
+            <a:pPr indent="0" lvl="0" marL="0" marR="0" rtl="0" algn="l">
+              <a:lnSpc>
+                <a:spcPct val="100000"/>
+              </a:lnSpc>
+              <a:spcBef>
+                <a:spcPts val="0"/>
+              </a:spcBef>
+              <a:spcAft>
+                <a:spcPts val="0"/>
+              </a:spcAft>
+              <a:buClr>
+                <a:srgbClr val="000000"/>
+              </a:buClr>
+              <a:buSzPts val="1400"/>
+              <a:buFont typeface="Arial"/>
               <a:buNone/>
             </a:pPr>
             <a:r>
               <a:t/>
             </a:r>
-            <a:endParaRPr/>
+            <a:endParaRPr b="0" i="0" sz="1400" u="none" cap="none" strike="noStrike">
+              <a:solidFill>
+                <a:srgbClr val="000000"/>
+              </a:solidFill>
+              <a:latin typeface="Arial"/>
+              <a:ea typeface="Arial"/>
+              <a:cs typeface="Arial"/>
+              <a:sym typeface="Arial"/>
+            </a:endParaRPr>
           </a:p>
         </p:txBody>
       </p:sp>
@@ -5030,6 +5459,9 @@
           <a:lstStyle/>
           <a:p>
             <a:pPr indent="0" lvl="0" marL="0" marR="0" rtl="0" algn="l">
+              <a:lnSpc>
+                <a:spcPct val="100000"/>
+              </a:lnSpc>
               <a:spcBef>
                 <a:spcPts val="0"/>
               </a:spcBef>
@@ -5093,6 +5525,9 @@
           <a:lstStyle/>
           <a:p>
             <a:pPr indent="0" lvl="0" marL="0" marR="0" rtl="0" algn="l">
+              <a:lnSpc>
+                <a:spcPct val="100000"/>
+              </a:lnSpc>
               <a:spcBef>
                 <a:spcPts val="0"/>
               </a:spcBef>
@@ -5165,19 +5600,35 @@
           </a:bodyPr>
           <a:lstStyle/>
           <a:p>
-            <a:pPr indent="0" lvl="0" marL="0" rtl="0" algn="l">
-              <a:spcBef>
-                <a:spcPts val="0"/>
-              </a:spcBef>
-              <a:spcAft>
-                <a:spcPts val="0"/>
-              </a:spcAft>
+            <a:pPr indent="0" lvl="0" marL="0" marR="0" rtl="0" algn="l">
+              <a:lnSpc>
+                <a:spcPct val="100000"/>
+              </a:lnSpc>
+              <a:spcBef>
+                <a:spcPts val="0"/>
+              </a:spcBef>
+              <a:spcAft>
+                <a:spcPts val="0"/>
+              </a:spcAft>
+              <a:buClr>
+                <a:srgbClr val="000000"/>
+              </a:buClr>
+              <a:buSzPts val="1400"/>
+              <a:buFont typeface="Arial"/>
               <a:buNone/>
             </a:pPr>
             <a:r>
               <a:t/>
             </a:r>
-            <a:endParaRPr/>
+            <a:endParaRPr b="0" i="0" sz="1400" u="none" cap="none" strike="noStrike">
+              <a:solidFill>
+                <a:srgbClr val="000000"/>
+              </a:solidFill>
+              <a:latin typeface="Arial"/>
+              <a:ea typeface="Arial"/>
+              <a:cs typeface="Arial"/>
+              <a:sym typeface="Arial"/>
+            </a:endParaRPr>
           </a:p>
         </p:txBody>
       </p:sp>
@@ -5273,6 +5724,9 @@
           <a:lstStyle/>
           <a:p>
             <a:pPr indent="0" lvl="0" marL="0" marR="0" rtl="0" algn="l">
+              <a:lnSpc>
+                <a:spcPct val="100000"/>
+              </a:lnSpc>
               <a:spcBef>
                 <a:spcPts val="0"/>
               </a:spcBef>
@@ -5336,6 +5790,9 @@
           <a:lstStyle/>
           <a:p>
             <a:pPr indent="0" lvl="0" marL="0" marR="0" rtl="0" algn="l">
+              <a:lnSpc>
+                <a:spcPct val="100000"/>
+              </a:lnSpc>
               <a:spcBef>
                 <a:spcPts val="0"/>
               </a:spcBef>
@@ -5408,19 +5865,35 @@
           </a:bodyPr>
           <a:lstStyle/>
           <a:p>
-            <a:pPr indent="0" lvl="0" marL="0" rtl="0" algn="l">
-              <a:spcBef>
-                <a:spcPts val="0"/>
-              </a:spcBef>
-              <a:spcAft>
-                <a:spcPts val="0"/>
-              </a:spcAft>
+            <a:pPr indent="0" lvl="0" marL="0" marR="0" rtl="0" algn="l">
+              <a:lnSpc>
+                <a:spcPct val="100000"/>
+              </a:lnSpc>
+              <a:spcBef>
+                <a:spcPts val="0"/>
+              </a:spcBef>
+              <a:spcAft>
+                <a:spcPts val="0"/>
+              </a:spcAft>
+              <a:buClr>
+                <a:srgbClr val="000000"/>
+              </a:buClr>
+              <a:buSzPts val="1400"/>
+              <a:buFont typeface="Arial"/>
               <a:buNone/>
             </a:pPr>
             <a:r>
               <a:t/>
             </a:r>
-            <a:endParaRPr/>
+            <a:endParaRPr b="0" i="0" sz="1400" u="none" cap="none" strike="noStrike">
+              <a:solidFill>
+                <a:srgbClr val="000000"/>
+              </a:solidFill>
+              <a:latin typeface="Arial"/>
+              <a:ea typeface="Arial"/>
+              <a:cs typeface="Arial"/>
+              <a:sym typeface="Arial"/>
+            </a:endParaRPr>
           </a:p>
         </p:txBody>
       </p:sp>
@@ -5516,6 +5989,9 @@
           <a:lstStyle/>
           <a:p>
             <a:pPr indent="0" lvl="0" marL="0" marR="0" rtl="0" algn="l">
+              <a:lnSpc>
+                <a:spcPct val="100000"/>
+              </a:lnSpc>
               <a:spcBef>
                 <a:spcPts val="0"/>
               </a:spcBef>
@@ -5579,6 +6055,9 @@
           <a:lstStyle/>
           <a:p>
             <a:pPr indent="0" lvl="0" marL="0" marR="0" rtl="0" algn="l">
+              <a:lnSpc>
+                <a:spcPct val="100000"/>
+              </a:lnSpc>
               <a:spcBef>
                 <a:spcPts val="0"/>
               </a:spcBef>
@@ -5651,19 +6130,35 @@
           </a:bodyPr>
           <a:lstStyle/>
           <a:p>
-            <a:pPr indent="0" lvl="0" marL="0" rtl="0" algn="l">
-              <a:spcBef>
-                <a:spcPts val="0"/>
-              </a:spcBef>
-              <a:spcAft>
-                <a:spcPts val="0"/>
-              </a:spcAft>
+            <a:pPr indent="0" lvl="0" marL="0" marR="0" rtl="0" algn="l">
+              <a:lnSpc>
+                <a:spcPct val="100000"/>
+              </a:lnSpc>
+              <a:spcBef>
+                <a:spcPts val="0"/>
+              </a:spcBef>
+              <a:spcAft>
+                <a:spcPts val="0"/>
+              </a:spcAft>
+              <a:buClr>
+                <a:srgbClr val="000000"/>
+              </a:buClr>
+              <a:buSzPts val="1400"/>
+              <a:buFont typeface="Arial"/>
               <a:buNone/>
             </a:pPr>
             <a:r>
               <a:t/>
             </a:r>
-            <a:endParaRPr/>
+            <a:endParaRPr b="0" i="0" sz="1400" u="none" cap="none" strike="noStrike">
+              <a:solidFill>
+                <a:srgbClr val="000000"/>
+              </a:solidFill>
+              <a:latin typeface="Arial"/>
+              <a:ea typeface="Arial"/>
+              <a:cs typeface="Arial"/>
+              <a:sym typeface="Arial"/>
+            </a:endParaRPr>
           </a:p>
         </p:txBody>
       </p:sp>
@@ -5759,6 +6254,9 @@
           <a:lstStyle/>
           <a:p>
             <a:pPr indent="0" lvl="0" marL="0" marR="0" rtl="0" algn="l">
+              <a:lnSpc>
+                <a:spcPct val="100000"/>
+              </a:lnSpc>
               <a:spcBef>
                 <a:spcPts val="0"/>
               </a:spcBef>
@@ -5822,6 +6320,9 @@
           <a:lstStyle/>
           <a:p>
             <a:pPr indent="0" lvl="0" marL="0" marR="0" rtl="0" algn="l">
+              <a:lnSpc>
+                <a:spcPct val="100000"/>
+              </a:lnSpc>
               <a:spcBef>
                 <a:spcPts val="0"/>
               </a:spcBef>
@@ -5926,8 +6427,8 @@
         </p:nvSpPr>
         <p:spPr>
           <a:xfrm>
-            <a:off x="1047750" y="1004887"/>
-            <a:ext cx="1504950" cy="285750"/>
+            <a:off x="1047750" y="1004875"/>
+            <a:ext cx="2484300" cy="285900"/>
           </a:xfrm>
           <a:prstGeom prst="rect">
             <a:avLst/>
@@ -5944,6 +6445,9 @@
           <a:lstStyle/>
           <a:p>
             <a:pPr indent="0" lvl="0" marL="0" marR="0" rtl="0" algn="l">
+              <a:lnSpc>
+                <a:spcPct val="100000"/>
+              </a:lnSpc>
               <a:spcBef>
                 <a:spcPts val="0"/>
               </a:spcBef>
@@ -6020,19 +6524,35 @@
           </a:bodyPr>
           <a:lstStyle/>
           <a:p>
-            <a:pPr indent="0" lvl="0" marL="0" rtl="0" algn="l">
-              <a:spcBef>
-                <a:spcPts val="0"/>
-              </a:spcBef>
-              <a:spcAft>
-                <a:spcPts val="0"/>
-              </a:spcAft>
+            <a:pPr indent="0" lvl="0" marL="0" marR="0" rtl="0" algn="l">
+              <a:lnSpc>
+                <a:spcPct val="100000"/>
+              </a:lnSpc>
+              <a:spcBef>
+                <a:spcPts val="0"/>
+              </a:spcBef>
+              <a:spcAft>
+                <a:spcPts val="0"/>
+              </a:spcAft>
+              <a:buClr>
+                <a:srgbClr val="000000"/>
+              </a:buClr>
+              <a:buSzPts val="1400"/>
+              <a:buFont typeface="Arial"/>
               <a:buNone/>
             </a:pPr>
             <a:r>
               <a:t/>
             </a:r>
-            <a:endParaRPr/>
+            <a:endParaRPr b="0" i="0" sz="1400" u="none" cap="none" strike="noStrike">
+              <a:solidFill>
+                <a:srgbClr val="000000"/>
+              </a:solidFill>
+              <a:latin typeface="Arial"/>
+              <a:ea typeface="Arial"/>
+              <a:cs typeface="Arial"/>
+              <a:sym typeface="Arial"/>
+            </a:endParaRPr>
           </a:p>
         </p:txBody>
       </p:sp>
@@ -6062,6 +6582,9 @@
           <a:lstStyle/>
           <a:p>
             <a:pPr indent="0" lvl="0" marL="0" marR="0" rtl="0" algn="l">
+              <a:lnSpc>
+                <a:spcPct val="100000"/>
+              </a:lnSpc>
               <a:spcBef>
                 <a:spcPts val="0"/>
               </a:spcBef>
@@ -6266,19 +6789,35 @@
           </a:bodyPr>
           <a:lstStyle/>
           <a:p>
-            <a:pPr indent="0" lvl="0" marL="0" rtl="0" algn="l">
-              <a:spcBef>
-                <a:spcPts val="0"/>
-              </a:spcBef>
-              <a:spcAft>
-                <a:spcPts val="0"/>
-              </a:spcAft>
+            <a:pPr indent="0" lvl="0" marL="0" marR="0" rtl="0" algn="l">
+              <a:lnSpc>
+                <a:spcPct val="100000"/>
+              </a:lnSpc>
+              <a:spcBef>
+                <a:spcPts val="0"/>
+              </a:spcBef>
+              <a:spcAft>
+                <a:spcPts val="0"/>
+              </a:spcAft>
+              <a:buClr>
+                <a:srgbClr val="000000"/>
+              </a:buClr>
+              <a:buSzPts val="1400"/>
+              <a:buFont typeface="Arial"/>
               <a:buNone/>
             </a:pPr>
             <a:r>
               <a:t/>
             </a:r>
-            <a:endParaRPr/>
+            <a:endParaRPr b="0" i="0" sz="1400" u="none" cap="none" strike="noStrike">
+              <a:solidFill>
+                <a:srgbClr val="000000"/>
+              </a:solidFill>
+              <a:latin typeface="Arial"/>
+              <a:ea typeface="Arial"/>
+              <a:cs typeface="Arial"/>
+              <a:sym typeface="Arial"/>
+            </a:endParaRPr>
           </a:p>
         </p:txBody>
       </p:sp>
@@ -6308,6 +6847,9 @@
           <a:lstStyle/>
           <a:p>
             <a:pPr indent="0" lvl="0" marL="0" marR="0" rtl="0" algn="l">
+              <a:lnSpc>
+                <a:spcPct val="100000"/>
+              </a:lnSpc>
               <a:spcBef>
                 <a:spcPts val="0"/>
               </a:spcBef>
@@ -6516,19 +7058,35 @@
           </a:bodyPr>
           <a:lstStyle/>
           <a:p>
-            <a:pPr indent="0" lvl="0" marL="0" rtl="0" algn="l">
-              <a:spcBef>
-                <a:spcPts val="0"/>
-              </a:spcBef>
-              <a:spcAft>
-                <a:spcPts val="0"/>
-              </a:spcAft>
+            <a:pPr indent="0" lvl="0" marL="0" marR="0" rtl="0" algn="l">
+              <a:lnSpc>
+                <a:spcPct val="100000"/>
+              </a:lnSpc>
+              <a:spcBef>
+                <a:spcPts val="0"/>
+              </a:spcBef>
+              <a:spcAft>
+                <a:spcPts val="0"/>
+              </a:spcAft>
+              <a:buClr>
+                <a:srgbClr val="000000"/>
+              </a:buClr>
+              <a:buSzPts val="1400"/>
+              <a:buFont typeface="Arial"/>
               <a:buNone/>
             </a:pPr>
             <a:r>
               <a:t/>
             </a:r>
-            <a:endParaRPr/>
+            <a:endParaRPr b="0" i="0" sz="1400" u="none" cap="none" strike="noStrike">
+              <a:solidFill>
+                <a:srgbClr val="000000"/>
+              </a:solidFill>
+              <a:latin typeface="Arial"/>
+              <a:ea typeface="Arial"/>
+              <a:cs typeface="Arial"/>
+              <a:sym typeface="Arial"/>
+            </a:endParaRPr>
           </a:p>
         </p:txBody>
       </p:sp>
@@ -6558,6 +7116,9 @@
           <a:lstStyle/>
           <a:p>
             <a:pPr indent="0" lvl="0" marL="0" marR="0" rtl="0" algn="l">
+              <a:lnSpc>
+                <a:spcPct val="100000"/>
+              </a:lnSpc>
               <a:spcBef>
                 <a:spcPts val="0"/>
               </a:spcBef>
@@ -6696,19 +7257,35 @@
           </a:bodyPr>
           <a:lstStyle/>
           <a:p>
-            <a:pPr indent="0" lvl="0" marL="0" rtl="0" algn="l">
-              <a:spcBef>
-                <a:spcPts val="0"/>
-              </a:spcBef>
-              <a:spcAft>
-                <a:spcPts val="0"/>
-              </a:spcAft>
+            <a:pPr indent="0" lvl="0" marL="0" marR="0" rtl="0" algn="l">
+              <a:lnSpc>
+                <a:spcPct val="100000"/>
+              </a:lnSpc>
+              <a:spcBef>
+                <a:spcPts val="0"/>
+              </a:spcBef>
+              <a:spcAft>
+                <a:spcPts val="0"/>
+              </a:spcAft>
+              <a:buClr>
+                <a:srgbClr val="000000"/>
+              </a:buClr>
+              <a:buSzPts val="1400"/>
+              <a:buFont typeface="Arial"/>
               <a:buNone/>
             </a:pPr>
             <a:r>
               <a:t/>
             </a:r>
-            <a:endParaRPr/>
+            <a:endParaRPr b="0" i="0" sz="1400" u="none" cap="none" strike="noStrike">
+              <a:solidFill>
+                <a:srgbClr val="000000"/>
+              </a:solidFill>
+              <a:latin typeface="Arial"/>
+              <a:ea typeface="Arial"/>
+              <a:cs typeface="Arial"/>
+              <a:sym typeface="Arial"/>
+            </a:endParaRPr>
           </a:p>
         </p:txBody>
       </p:sp>
@@ -6738,6 +7315,9 @@
           <a:lstStyle/>
           <a:p>
             <a:pPr indent="0" lvl="0" marL="0" marR="0" rtl="0" algn="l">
+              <a:lnSpc>
+                <a:spcPct val="100000"/>
+              </a:lnSpc>
               <a:spcBef>
                 <a:spcPts val="0"/>
               </a:spcBef>
@@ -6946,19 +7526,35 @@
           </a:bodyPr>
           <a:lstStyle/>
           <a:p>
-            <a:pPr indent="0" lvl="0" marL="0" rtl="0" algn="l">
-              <a:spcBef>
-                <a:spcPts val="0"/>
-              </a:spcBef>
-              <a:spcAft>
-                <a:spcPts val="0"/>
-              </a:spcAft>
+            <a:pPr indent="0" lvl="0" marL="0" marR="0" rtl="0" algn="l">
+              <a:lnSpc>
+                <a:spcPct val="100000"/>
+              </a:lnSpc>
+              <a:spcBef>
+                <a:spcPts val="0"/>
+              </a:spcBef>
+              <a:spcAft>
+                <a:spcPts val="0"/>
+              </a:spcAft>
+              <a:buClr>
+                <a:srgbClr val="000000"/>
+              </a:buClr>
+              <a:buSzPts val="1400"/>
+              <a:buFont typeface="Arial"/>
               <a:buNone/>
             </a:pPr>
             <a:r>
               <a:t/>
             </a:r>
-            <a:endParaRPr/>
+            <a:endParaRPr b="0" i="0" sz="1400" u="none" cap="none" strike="noStrike">
+              <a:solidFill>
+                <a:srgbClr val="000000"/>
+              </a:solidFill>
+              <a:latin typeface="Arial"/>
+              <a:ea typeface="Arial"/>
+              <a:cs typeface="Arial"/>
+              <a:sym typeface="Arial"/>
+            </a:endParaRPr>
           </a:p>
         </p:txBody>
       </p:sp>
@@ -6988,6 +7584,9 @@
           <a:lstStyle/>
           <a:p>
             <a:pPr indent="0" lvl="0" marL="0" marR="0" rtl="0" algn="l">
+              <a:lnSpc>
+                <a:spcPct val="100000"/>
+              </a:lnSpc>
               <a:spcBef>
                 <a:spcPts val="0"/>
               </a:spcBef>
@@ -7126,19 +7725,35 @@
           </a:bodyPr>
           <a:lstStyle/>
           <a:p>
-            <a:pPr indent="0" lvl="0" marL="0" rtl="0" algn="l">
-              <a:spcBef>
-                <a:spcPts val="0"/>
-              </a:spcBef>
-              <a:spcAft>
-                <a:spcPts val="0"/>
-              </a:spcAft>
+            <a:pPr indent="0" lvl="0" marL="0" marR="0" rtl="0" algn="l">
+              <a:lnSpc>
+                <a:spcPct val="100000"/>
+              </a:lnSpc>
+              <a:spcBef>
+                <a:spcPts val="0"/>
+              </a:spcBef>
+              <a:spcAft>
+                <a:spcPts val="0"/>
+              </a:spcAft>
+              <a:buClr>
+                <a:srgbClr val="000000"/>
+              </a:buClr>
+              <a:buSzPts val="1400"/>
+              <a:buFont typeface="Arial"/>
               <a:buNone/>
             </a:pPr>
             <a:r>
               <a:t/>
             </a:r>
-            <a:endParaRPr/>
+            <a:endParaRPr b="0" i="0" sz="1400" u="none" cap="none" strike="noStrike">
+              <a:solidFill>
+                <a:srgbClr val="000000"/>
+              </a:solidFill>
+              <a:latin typeface="Arial"/>
+              <a:ea typeface="Arial"/>
+              <a:cs typeface="Arial"/>
+              <a:sym typeface="Arial"/>
+            </a:endParaRPr>
           </a:p>
         </p:txBody>
       </p:sp>
@@ -7168,6 +7783,9 @@
           <a:lstStyle/>
           <a:p>
             <a:pPr indent="0" lvl="0" marL="0" marR="0" rtl="0" algn="l">
+              <a:lnSpc>
+                <a:spcPct val="100000"/>
+              </a:lnSpc>
               <a:spcBef>
                 <a:spcPts val="0"/>
               </a:spcBef>
@@ -7376,19 +7994,35 @@
           </a:bodyPr>
           <a:lstStyle/>
           <a:p>
-            <a:pPr indent="0" lvl="0" marL="0" rtl="0" algn="l">
-              <a:spcBef>
-                <a:spcPts val="0"/>
-              </a:spcBef>
-              <a:spcAft>
-                <a:spcPts val="0"/>
-              </a:spcAft>
+            <a:pPr indent="0" lvl="0" marL="0" marR="0" rtl="0" algn="l">
+              <a:lnSpc>
+                <a:spcPct val="100000"/>
+              </a:lnSpc>
+              <a:spcBef>
+                <a:spcPts val="0"/>
+              </a:spcBef>
+              <a:spcAft>
+                <a:spcPts val="0"/>
+              </a:spcAft>
+              <a:buClr>
+                <a:srgbClr val="000000"/>
+              </a:buClr>
+              <a:buSzPts val="1400"/>
+              <a:buFont typeface="Arial"/>
               <a:buNone/>
             </a:pPr>
             <a:r>
               <a:t/>
             </a:r>
-            <a:endParaRPr/>
+            <a:endParaRPr b="0" i="0" sz="1400" u="none" cap="none" strike="noStrike">
+              <a:solidFill>
+                <a:srgbClr val="000000"/>
+              </a:solidFill>
+              <a:latin typeface="Arial"/>
+              <a:ea typeface="Arial"/>
+              <a:cs typeface="Arial"/>
+              <a:sym typeface="Arial"/>
+            </a:endParaRPr>
           </a:p>
         </p:txBody>
       </p:sp>
@@ -7418,6 +8052,9 @@
           <a:lstStyle/>
           <a:p>
             <a:pPr indent="0" lvl="0" marL="0" marR="0" rtl="0" algn="l">
+              <a:lnSpc>
+                <a:spcPct val="100000"/>
+              </a:lnSpc>
               <a:spcBef>
                 <a:spcPts val="0"/>
               </a:spcBef>
@@ -7606,6 +8243,9 @@
           <a:lstStyle/>
           <a:p>
             <a:pPr indent="0" lvl="0" marL="0" marR="0" rtl="0" algn="l">
+              <a:lnSpc>
+                <a:spcPct val="100000"/>
+              </a:lnSpc>
               <a:spcBef>
                 <a:spcPts val="0"/>
               </a:spcBef>
@@ -7744,19 +8384,35 @@
           </a:bodyPr>
           <a:lstStyle/>
           <a:p>
-            <a:pPr indent="0" lvl="0" marL="0" rtl="0" algn="l">
-              <a:spcBef>
-                <a:spcPts val="0"/>
-              </a:spcBef>
-              <a:spcAft>
-                <a:spcPts val="0"/>
-              </a:spcAft>
+            <a:pPr indent="0" lvl="0" marL="0" marR="0" rtl="0" algn="l">
+              <a:lnSpc>
+                <a:spcPct val="100000"/>
+              </a:lnSpc>
+              <a:spcBef>
+                <a:spcPts val="0"/>
+              </a:spcBef>
+              <a:spcAft>
+                <a:spcPts val="0"/>
+              </a:spcAft>
+              <a:buClr>
+                <a:srgbClr val="000000"/>
+              </a:buClr>
+              <a:buSzPts val="1400"/>
+              <a:buFont typeface="Arial"/>
               <a:buNone/>
             </a:pPr>
             <a:r>
               <a:t/>
             </a:r>
-            <a:endParaRPr/>
+            <a:endParaRPr b="0" i="0" sz="1400" u="none" cap="none" strike="noStrike">
+              <a:solidFill>
+                <a:srgbClr val="000000"/>
+              </a:solidFill>
+              <a:latin typeface="Arial"/>
+              <a:ea typeface="Arial"/>
+              <a:cs typeface="Arial"/>
+              <a:sym typeface="Arial"/>
+            </a:endParaRPr>
           </a:p>
         </p:txBody>
       </p:sp>
@@ -8481,19 +9137,35 @@
           </a:bodyPr>
           <a:lstStyle/>
           <a:p>
-            <a:pPr indent="0" lvl="0" marL="0" rtl="0" algn="l">
-              <a:spcBef>
-                <a:spcPts val="0"/>
-              </a:spcBef>
-              <a:spcAft>
-                <a:spcPts val="0"/>
-              </a:spcAft>
+            <a:pPr indent="0" lvl="0" marL="0" marR="0" rtl="0" algn="l">
+              <a:lnSpc>
+                <a:spcPct val="100000"/>
+              </a:lnSpc>
+              <a:spcBef>
+                <a:spcPts val="0"/>
+              </a:spcBef>
+              <a:spcAft>
+                <a:spcPts val="0"/>
+              </a:spcAft>
+              <a:buClr>
+                <a:srgbClr val="000000"/>
+              </a:buClr>
+              <a:buSzPts val="1400"/>
+              <a:buFont typeface="Arial"/>
               <a:buNone/>
             </a:pPr>
             <a:r>
               <a:t/>
             </a:r>
-            <a:endParaRPr/>
+            <a:endParaRPr b="0" i="0" sz="1400" u="none" cap="none" strike="noStrike">
+              <a:solidFill>
+                <a:srgbClr val="000000"/>
+              </a:solidFill>
+              <a:latin typeface="Arial"/>
+              <a:ea typeface="Arial"/>
+              <a:cs typeface="Arial"/>
+              <a:sym typeface="Arial"/>
+            </a:endParaRPr>
           </a:p>
         </p:txBody>
       </p:sp>
@@ -8664,19 +9336,35 @@
           </a:bodyPr>
           <a:lstStyle/>
           <a:p>
-            <a:pPr indent="0" lvl="0" marL="0" rtl="0" algn="l">
-              <a:spcBef>
-                <a:spcPts val="0"/>
-              </a:spcBef>
-              <a:spcAft>
-                <a:spcPts val="0"/>
-              </a:spcAft>
+            <a:pPr indent="0" lvl="0" marL="0" marR="0" rtl="0" algn="l">
+              <a:lnSpc>
+                <a:spcPct val="100000"/>
+              </a:lnSpc>
+              <a:spcBef>
+                <a:spcPts val="0"/>
+              </a:spcBef>
+              <a:spcAft>
+                <a:spcPts val="0"/>
+              </a:spcAft>
+              <a:buClr>
+                <a:srgbClr val="000000"/>
+              </a:buClr>
+              <a:buSzPts val="1400"/>
+              <a:buFont typeface="Arial"/>
               <a:buNone/>
             </a:pPr>
             <a:r>
               <a:t/>
             </a:r>
-            <a:endParaRPr/>
+            <a:endParaRPr b="0" i="0" sz="1400" u="none" cap="none" strike="noStrike">
+              <a:solidFill>
+                <a:srgbClr val="000000"/>
+              </a:solidFill>
+              <a:latin typeface="Arial"/>
+              <a:ea typeface="Arial"/>
+              <a:cs typeface="Arial"/>
+              <a:sym typeface="Arial"/>
+            </a:endParaRPr>
           </a:p>
         </p:txBody>
       </p:sp>
@@ -8847,19 +9535,35 @@
           </a:bodyPr>
           <a:lstStyle/>
           <a:p>
-            <a:pPr indent="0" lvl="0" marL="0" rtl="0" algn="l">
-              <a:spcBef>
-                <a:spcPts val="0"/>
-              </a:spcBef>
-              <a:spcAft>
-                <a:spcPts val="0"/>
-              </a:spcAft>
+            <a:pPr indent="0" lvl="0" marL="0" marR="0" rtl="0" algn="l">
+              <a:lnSpc>
+                <a:spcPct val="100000"/>
+              </a:lnSpc>
+              <a:spcBef>
+                <a:spcPts val="0"/>
+              </a:spcBef>
+              <a:spcAft>
+                <a:spcPts val="0"/>
+              </a:spcAft>
+              <a:buClr>
+                <a:srgbClr val="000000"/>
+              </a:buClr>
+              <a:buSzPts val="1400"/>
+              <a:buFont typeface="Arial"/>
               <a:buNone/>
             </a:pPr>
             <a:r>
               <a:t/>
             </a:r>
-            <a:endParaRPr/>
+            <a:endParaRPr b="0" i="0" sz="1400" u="none" cap="none" strike="noStrike">
+              <a:solidFill>
+                <a:srgbClr val="000000"/>
+              </a:solidFill>
+              <a:latin typeface="Arial"/>
+              <a:ea typeface="Arial"/>
+              <a:cs typeface="Arial"/>
+              <a:sym typeface="Arial"/>
+            </a:endParaRPr>
           </a:p>
         </p:txBody>
       </p:sp>
@@ -9080,6 +9784,9 @@
           <a:lstStyle/>
           <a:p>
             <a:pPr indent="0" lvl="0" marL="0" marR="0" rtl="0" algn="l">
+              <a:lnSpc>
+                <a:spcPct val="100000"/>
+              </a:lnSpc>
               <a:spcBef>
                 <a:spcPts val="0"/>
               </a:spcBef>
@@ -9210,19 +9917,35 @@
           </a:bodyPr>
           <a:lstStyle/>
           <a:p>
-            <a:pPr indent="0" lvl="0" marL="0" rtl="0" algn="l">
-              <a:spcBef>
-                <a:spcPts val="0"/>
-              </a:spcBef>
-              <a:spcAft>
-                <a:spcPts val="0"/>
-              </a:spcAft>
+            <a:pPr indent="0" lvl="0" marL="0" marR="0" rtl="0" algn="l">
+              <a:lnSpc>
+                <a:spcPct val="100000"/>
+              </a:lnSpc>
+              <a:spcBef>
+                <a:spcPts val="0"/>
+              </a:spcBef>
+              <a:spcAft>
+                <a:spcPts val="0"/>
+              </a:spcAft>
+              <a:buClr>
+                <a:srgbClr val="000000"/>
+              </a:buClr>
+              <a:buSzPts val="1400"/>
+              <a:buFont typeface="Arial"/>
               <a:buNone/>
             </a:pPr>
             <a:r>
               <a:t/>
             </a:r>
-            <a:endParaRPr/>
+            <a:endParaRPr b="0" i="0" sz="1400" u="none" cap="none" strike="noStrike">
+              <a:solidFill>
+                <a:srgbClr val="000000"/>
+              </a:solidFill>
+              <a:latin typeface="Arial"/>
+              <a:ea typeface="Arial"/>
+              <a:cs typeface="Arial"/>
+              <a:sym typeface="Arial"/>
+            </a:endParaRPr>
           </a:p>
         </p:txBody>
       </p:sp>
@@ -9252,6 +9975,9 @@
           <a:lstStyle/>
           <a:p>
             <a:pPr indent="0" lvl="0" marL="0" marR="0" rtl="0" algn="l">
+              <a:lnSpc>
+                <a:spcPct val="100000"/>
+              </a:lnSpc>
               <a:spcBef>
                 <a:spcPts val="0"/>
               </a:spcBef>
@@ -9460,19 +10186,35 @@
           </a:bodyPr>
           <a:lstStyle/>
           <a:p>
-            <a:pPr indent="0" lvl="0" marL="0" rtl="0" algn="l">
-              <a:spcBef>
-                <a:spcPts val="0"/>
-              </a:spcBef>
-              <a:spcAft>
-                <a:spcPts val="0"/>
-              </a:spcAft>
+            <a:pPr indent="0" lvl="0" marL="0" marR="0" rtl="0" algn="l">
+              <a:lnSpc>
+                <a:spcPct val="100000"/>
+              </a:lnSpc>
+              <a:spcBef>
+                <a:spcPts val="0"/>
+              </a:spcBef>
+              <a:spcAft>
+                <a:spcPts val="0"/>
+              </a:spcAft>
+              <a:buClr>
+                <a:srgbClr val="000000"/>
+              </a:buClr>
+              <a:buSzPts val="1400"/>
+              <a:buFont typeface="Arial"/>
               <a:buNone/>
             </a:pPr>
             <a:r>
               <a:t/>
             </a:r>
-            <a:endParaRPr/>
+            <a:endParaRPr b="0" i="0" sz="1400" u="none" cap="none" strike="noStrike">
+              <a:solidFill>
+                <a:srgbClr val="000000"/>
+              </a:solidFill>
+              <a:latin typeface="Arial"/>
+              <a:ea typeface="Arial"/>
+              <a:cs typeface="Arial"/>
+              <a:sym typeface="Arial"/>
+            </a:endParaRPr>
           </a:p>
         </p:txBody>
       </p:sp>
@@ -9502,6 +10244,9 @@
           <a:lstStyle/>
           <a:p>
             <a:pPr indent="0" lvl="0" marL="0" marR="0" rtl="0" algn="l">
+              <a:lnSpc>
+                <a:spcPct val="100000"/>
+              </a:lnSpc>
               <a:spcBef>
                 <a:spcPts val="0"/>
               </a:spcBef>
@@ -9566,19 +10311,35 @@
           </a:bodyPr>
           <a:lstStyle/>
           <a:p>
-            <a:pPr indent="0" lvl="0" marL="0" rtl="0" algn="l">
-              <a:spcBef>
-                <a:spcPts val="0"/>
-              </a:spcBef>
-              <a:spcAft>
-                <a:spcPts val="0"/>
-              </a:spcAft>
+            <a:pPr indent="0" lvl="0" marL="0" marR="0" rtl="0" algn="l">
+              <a:lnSpc>
+                <a:spcPct val="100000"/>
+              </a:lnSpc>
+              <a:spcBef>
+                <a:spcPts val="0"/>
+              </a:spcBef>
+              <a:spcAft>
+                <a:spcPts val="0"/>
+              </a:spcAft>
+              <a:buClr>
+                <a:srgbClr val="000000"/>
+              </a:buClr>
+              <a:buSzPts val="1400"/>
+              <a:buFont typeface="Arial"/>
               <a:buNone/>
             </a:pPr>
             <a:r>
               <a:t/>
             </a:r>
-            <a:endParaRPr/>
+            <a:endParaRPr b="0" i="0" sz="1400" u="none" cap="none" strike="noStrike">
+              <a:solidFill>
+                <a:srgbClr val="000000"/>
+              </a:solidFill>
+              <a:latin typeface="Arial"/>
+              <a:ea typeface="Arial"/>
+              <a:cs typeface="Arial"/>
+              <a:sym typeface="Arial"/>
+            </a:endParaRPr>
           </a:p>
         </p:txBody>
       </p:sp>
@@ -9608,6 +10369,9 @@
           <a:lstStyle/>
           <a:p>
             <a:pPr indent="0" lvl="0" marL="0" marR="0" rtl="0" algn="l">
+              <a:lnSpc>
+                <a:spcPct val="100000"/>
+              </a:lnSpc>
               <a:spcBef>
                 <a:spcPts val="0"/>
               </a:spcBef>
@@ -9816,19 +10580,35 @@
           </a:bodyPr>
           <a:lstStyle/>
           <a:p>
-            <a:pPr indent="0" lvl="0" marL="0" rtl="0" algn="l">
-              <a:spcBef>
-                <a:spcPts val="0"/>
-              </a:spcBef>
-              <a:spcAft>
-                <a:spcPts val="0"/>
-              </a:spcAft>
+            <a:pPr indent="0" lvl="0" marL="0" marR="0" rtl="0" algn="l">
+              <a:lnSpc>
+                <a:spcPct val="100000"/>
+              </a:lnSpc>
+              <a:spcBef>
+                <a:spcPts val="0"/>
+              </a:spcBef>
+              <a:spcAft>
+                <a:spcPts val="0"/>
+              </a:spcAft>
+              <a:buClr>
+                <a:srgbClr val="000000"/>
+              </a:buClr>
+              <a:buSzPts val="1400"/>
+              <a:buFont typeface="Arial"/>
               <a:buNone/>
             </a:pPr>
             <a:r>
               <a:t/>
             </a:r>
-            <a:endParaRPr/>
+            <a:endParaRPr b="0" i="0" sz="1400" u="none" cap="none" strike="noStrike">
+              <a:solidFill>
+                <a:srgbClr val="000000"/>
+              </a:solidFill>
+              <a:latin typeface="Arial"/>
+              <a:ea typeface="Arial"/>
+              <a:cs typeface="Arial"/>
+              <a:sym typeface="Arial"/>
+            </a:endParaRPr>
           </a:p>
         </p:txBody>
       </p:sp>
@@ -9858,6 +10638,9 @@
           <a:lstStyle/>
           <a:p>
             <a:pPr indent="0" lvl="0" marL="0" marR="0" rtl="0" algn="l">
+              <a:lnSpc>
+                <a:spcPct val="100000"/>
+              </a:lnSpc>
               <a:spcBef>
                 <a:spcPts val="0"/>
               </a:spcBef>
@@ -9922,19 +10705,35 @@
           </a:bodyPr>
           <a:lstStyle/>
           <a:p>
-            <a:pPr indent="0" lvl="0" marL="0" rtl="0" algn="l">
-              <a:spcBef>
-                <a:spcPts val="0"/>
-              </a:spcBef>
-              <a:spcAft>
-                <a:spcPts val="0"/>
-              </a:spcAft>
+            <a:pPr indent="0" lvl="0" marL="0" marR="0" rtl="0" algn="l">
+              <a:lnSpc>
+                <a:spcPct val="100000"/>
+              </a:lnSpc>
+              <a:spcBef>
+                <a:spcPts val="0"/>
+              </a:spcBef>
+              <a:spcAft>
+                <a:spcPts val="0"/>
+              </a:spcAft>
+              <a:buClr>
+                <a:srgbClr val="000000"/>
+              </a:buClr>
+              <a:buSzPts val="1400"/>
+              <a:buFont typeface="Arial"/>
               <a:buNone/>
             </a:pPr>
             <a:r>
               <a:t/>
             </a:r>
-            <a:endParaRPr/>
+            <a:endParaRPr b="0" i="0" sz="1400" u="none" cap="none" strike="noStrike">
+              <a:solidFill>
+                <a:srgbClr val="000000"/>
+              </a:solidFill>
+              <a:latin typeface="Arial"/>
+              <a:ea typeface="Arial"/>
+              <a:cs typeface="Arial"/>
+              <a:sym typeface="Arial"/>
+            </a:endParaRPr>
           </a:p>
         </p:txBody>
       </p:sp>
@@ -9964,6 +10763,9 @@
           <a:lstStyle/>
           <a:p>
             <a:pPr indent="0" lvl="0" marL="0" marR="0" rtl="0" algn="l">
+              <a:lnSpc>
+                <a:spcPct val="100000"/>
+              </a:lnSpc>
               <a:spcBef>
                 <a:spcPts val="0"/>
               </a:spcBef>
@@ -10172,19 +10974,35 @@
           </a:bodyPr>
           <a:lstStyle/>
           <a:p>
-            <a:pPr indent="0" lvl="0" marL="0" rtl="0" algn="l">
-              <a:spcBef>
-                <a:spcPts val="0"/>
-              </a:spcBef>
-              <a:spcAft>
-                <a:spcPts val="0"/>
-              </a:spcAft>
+            <a:pPr indent="0" lvl="0" marL="0" marR="0" rtl="0" algn="l">
+              <a:lnSpc>
+                <a:spcPct val="100000"/>
+              </a:lnSpc>
+              <a:spcBef>
+                <a:spcPts val="0"/>
+              </a:spcBef>
+              <a:spcAft>
+                <a:spcPts val="0"/>
+              </a:spcAft>
+              <a:buClr>
+                <a:srgbClr val="000000"/>
+              </a:buClr>
+              <a:buSzPts val="1400"/>
+              <a:buFont typeface="Arial"/>
               <a:buNone/>
             </a:pPr>
             <a:r>
               <a:t/>
             </a:r>
-            <a:endParaRPr/>
+            <a:endParaRPr b="0" i="0" sz="1400" u="none" cap="none" strike="noStrike">
+              <a:solidFill>
+                <a:srgbClr val="000000"/>
+              </a:solidFill>
+              <a:latin typeface="Arial"/>
+              <a:ea typeface="Arial"/>
+              <a:cs typeface="Arial"/>
+              <a:sym typeface="Arial"/>
+            </a:endParaRPr>
           </a:p>
         </p:txBody>
       </p:sp>
@@ -10214,6 +11032,9 @@
           <a:lstStyle/>
           <a:p>
             <a:pPr indent="0" lvl="0" marL="0" marR="0" rtl="0" algn="l">
+              <a:lnSpc>
+                <a:spcPct val="100000"/>
+              </a:lnSpc>
               <a:spcBef>
                 <a:spcPts val="0"/>
               </a:spcBef>
@@ -10278,19 +11099,35 @@
           </a:bodyPr>
           <a:lstStyle/>
           <a:p>
-            <a:pPr indent="0" lvl="0" marL="0" rtl="0" algn="l">
-              <a:spcBef>
-                <a:spcPts val="0"/>
-              </a:spcBef>
-              <a:spcAft>
-                <a:spcPts val="0"/>
-              </a:spcAft>
+            <a:pPr indent="0" lvl="0" marL="0" marR="0" rtl="0" algn="l">
+              <a:lnSpc>
+                <a:spcPct val="100000"/>
+              </a:lnSpc>
+              <a:spcBef>
+                <a:spcPts val="0"/>
+              </a:spcBef>
+              <a:spcAft>
+                <a:spcPts val="0"/>
+              </a:spcAft>
+              <a:buClr>
+                <a:srgbClr val="000000"/>
+              </a:buClr>
+              <a:buSzPts val="1400"/>
+              <a:buFont typeface="Arial"/>
               <a:buNone/>
             </a:pPr>
             <a:r>
               <a:t/>
             </a:r>
-            <a:endParaRPr/>
+            <a:endParaRPr b="0" i="0" sz="1400" u="none" cap="none" strike="noStrike">
+              <a:solidFill>
+                <a:srgbClr val="000000"/>
+              </a:solidFill>
+              <a:latin typeface="Arial"/>
+              <a:ea typeface="Arial"/>
+              <a:cs typeface="Arial"/>
+              <a:sym typeface="Arial"/>
+            </a:endParaRPr>
           </a:p>
         </p:txBody>
       </p:sp>
@@ -10320,6 +11157,9 @@
           <a:lstStyle/>
           <a:p>
             <a:pPr indent="0" lvl="0" marL="0" marR="0" rtl="0" algn="l">
+              <a:lnSpc>
+                <a:spcPct val="100000"/>
+              </a:lnSpc>
               <a:spcBef>
                 <a:spcPts val="0"/>
               </a:spcBef>
@@ -10528,19 +11368,35 @@
           </a:bodyPr>
           <a:lstStyle/>
           <a:p>
-            <a:pPr indent="0" lvl="0" marL="0" rtl="0" algn="l">
-              <a:spcBef>
-                <a:spcPts val="0"/>
-              </a:spcBef>
-              <a:spcAft>
-                <a:spcPts val="0"/>
-              </a:spcAft>
+            <a:pPr indent="0" lvl="0" marL="0" marR="0" rtl="0" algn="l">
+              <a:lnSpc>
+                <a:spcPct val="100000"/>
+              </a:lnSpc>
+              <a:spcBef>
+                <a:spcPts val="0"/>
+              </a:spcBef>
+              <a:spcAft>
+                <a:spcPts val="0"/>
+              </a:spcAft>
+              <a:buClr>
+                <a:srgbClr val="000000"/>
+              </a:buClr>
+              <a:buSzPts val="1400"/>
+              <a:buFont typeface="Arial"/>
               <a:buNone/>
             </a:pPr>
             <a:r>
               <a:t/>
             </a:r>
-            <a:endParaRPr/>
+            <a:endParaRPr b="0" i="0" sz="1400" u="none" cap="none" strike="noStrike">
+              <a:solidFill>
+                <a:srgbClr val="000000"/>
+              </a:solidFill>
+              <a:latin typeface="Arial"/>
+              <a:ea typeface="Arial"/>
+              <a:cs typeface="Arial"/>
+              <a:sym typeface="Arial"/>
+            </a:endParaRPr>
           </a:p>
         </p:txBody>
       </p:sp>
@@ -10570,6 +11426,9 @@
           <a:lstStyle/>
           <a:p>
             <a:pPr indent="0" lvl="0" marL="0" marR="0" rtl="0" algn="l">
+              <a:lnSpc>
+                <a:spcPct val="100000"/>
+              </a:lnSpc>
               <a:spcBef>
                 <a:spcPts val="0"/>
               </a:spcBef>
@@ -10633,6 +11492,9 @@
           <a:lstStyle/>
           <a:p>
             <a:pPr indent="0" lvl="0" marL="0" marR="0" rtl="0" algn="l">
+              <a:lnSpc>
+                <a:spcPct val="100000"/>
+              </a:lnSpc>
               <a:spcBef>
                 <a:spcPts val="0"/>
               </a:spcBef>
@@ -10841,19 +11703,35 @@
           </a:bodyPr>
           <a:lstStyle/>
           <a:p>
-            <a:pPr indent="0" lvl="0" marL="0" rtl="0" algn="l">
-              <a:spcBef>
-                <a:spcPts val="0"/>
-              </a:spcBef>
-              <a:spcAft>
-                <a:spcPts val="0"/>
-              </a:spcAft>
+            <a:pPr indent="0" lvl="0" marL="0" marR="0" rtl="0" algn="l">
+              <a:lnSpc>
+                <a:spcPct val="100000"/>
+              </a:lnSpc>
+              <a:spcBef>
+                <a:spcPts val="0"/>
+              </a:spcBef>
+              <a:spcAft>
+                <a:spcPts val="0"/>
+              </a:spcAft>
+              <a:buClr>
+                <a:srgbClr val="000000"/>
+              </a:buClr>
+              <a:buSzPts val="1400"/>
+              <a:buFont typeface="Arial"/>
               <a:buNone/>
             </a:pPr>
             <a:r>
               <a:t/>
             </a:r>
-            <a:endParaRPr/>
+            <a:endParaRPr b="0" i="0" sz="1400" u="none" cap="none" strike="noStrike">
+              <a:solidFill>
+                <a:srgbClr val="000000"/>
+              </a:solidFill>
+              <a:latin typeface="Arial"/>
+              <a:ea typeface="Arial"/>
+              <a:cs typeface="Arial"/>
+              <a:sym typeface="Arial"/>
+            </a:endParaRPr>
           </a:p>
         </p:txBody>
       </p:sp>
@@ -10883,6 +11761,9 @@
           <a:lstStyle/>
           <a:p>
             <a:pPr indent="0" lvl="0" marL="0" marR="0" rtl="0" algn="l">
+              <a:lnSpc>
+                <a:spcPct val="100000"/>
+              </a:lnSpc>
               <a:spcBef>
                 <a:spcPts val="0"/>
               </a:spcBef>
@@ -11005,6 +11886,9 @@
           <a:lstStyle/>
           <a:p>
             <a:pPr indent="0" lvl="0" marL="0" marR="0" rtl="0" algn="l">
+              <a:lnSpc>
+                <a:spcPct val="100000"/>
+              </a:lnSpc>
               <a:spcBef>
                 <a:spcPts val="0"/>
               </a:spcBef>
@@ -11143,19 +12027,35 @@
           </a:bodyPr>
           <a:lstStyle/>
           <a:p>
-            <a:pPr indent="0" lvl="0" marL="0" rtl="0" algn="l">
-              <a:spcBef>
-                <a:spcPts val="0"/>
-              </a:spcBef>
-              <a:spcAft>
-                <a:spcPts val="0"/>
-              </a:spcAft>
+            <a:pPr indent="0" lvl="0" marL="0" marR="0" rtl="0" algn="l">
+              <a:lnSpc>
+                <a:spcPct val="100000"/>
+              </a:lnSpc>
+              <a:spcBef>
+                <a:spcPts val="0"/>
+              </a:spcBef>
+              <a:spcAft>
+                <a:spcPts val="0"/>
+              </a:spcAft>
+              <a:buClr>
+                <a:srgbClr val="000000"/>
+              </a:buClr>
+              <a:buSzPts val="1400"/>
+              <a:buFont typeface="Arial"/>
               <a:buNone/>
             </a:pPr>
             <a:r>
               <a:t/>
             </a:r>
-            <a:endParaRPr/>
+            <a:endParaRPr b="0" i="0" sz="1400" u="none" cap="none" strike="noStrike">
+              <a:solidFill>
+                <a:srgbClr val="000000"/>
+              </a:solidFill>
+              <a:latin typeface="Arial"/>
+              <a:ea typeface="Arial"/>
+              <a:cs typeface="Arial"/>
+              <a:sym typeface="Arial"/>
+            </a:endParaRPr>
           </a:p>
         </p:txBody>
       </p:sp>
@@ -11185,6 +12085,9 @@
           <a:lstStyle/>
           <a:p>
             <a:pPr indent="0" lvl="0" marL="0" marR="0" rtl="0" algn="l">
+              <a:lnSpc>
+                <a:spcPct val="100000"/>
+              </a:lnSpc>
               <a:spcBef>
                 <a:spcPts val="0"/>
               </a:spcBef>
@@ -11314,6 +12217,9 @@
           <a:lstStyle/>
           <a:p>
             <a:pPr indent="0" lvl="0" marL="0" marR="0" rtl="0" algn="l">
+              <a:lnSpc>
+                <a:spcPct val="100000"/>
+              </a:lnSpc>
               <a:spcBef>
                 <a:spcPts val="0"/>
               </a:spcBef>
@@ -11386,19 +12292,35 @@
           </a:bodyPr>
           <a:lstStyle/>
           <a:p>
-            <a:pPr indent="0" lvl="0" marL="0" rtl="0" algn="l">
-              <a:spcBef>
-                <a:spcPts val="0"/>
-              </a:spcBef>
-              <a:spcAft>
-                <a:spcPts val="0"/>
-              </a:spcAft>
+            <a:pPr indent="0" lvl="0" marL="0" marR="0" rtl="0" algn="l">
+              <a:lnSpc>
+                <a:spcPct val="100000"/>
+              </a:lnSpc>
+              <a:spcBef>
+                <a:spcPts val="0"/>
+              </a:spcBef>
+              <a:spcAft>
+                <a:spcPts val="0"/>
+              </a:spcAft>
+              <a:buClr>
+                <a:srgbClr val="000000"/>
+              </a:buClr>
+              <a:buSzPts val="1400"/>
+              <a:buFont typeface="Arial"/>
               <a:buNone/>
             </a:pPr>
             <a:r>
               <a:t/>
             </a:r>
-            <a:endParaRPr/>
+            <a:endParaRPr b="0" i="0" sz="1400" u="none" cap="none" strike="noStrike">
+              <a:solidFill>
+                <a:srgbClr val="000000"/>
+              </a:solidFill>
+              <a:latin typeface="Arial"/>
+              <a:ea typeface="Arial"/>
+              <a:cs typeface="Arial"/>
+              <a:sym typeface="Arial"/>
+            </a:endParaRPr>
           </a:p>
         </p:txBody>
       </p:sp>
@@ -11428,6 +12350,9 @@
           <a:lstStyle/>
           <a:p>
             <a:pPr indent="0" lvl="0" marL="0" marR="0" rtl="0" algn="l">
+              <a:lnSpc>
+                <a:spcPct val="100000"/>
+              </a:lnSpc>
               <a:spcBef>
                 <a:spcPts val="0"/>
               </a:spcBef>
@@ -11557,6 +12482,9 @@
           <a:lstStyle/>
           <a:p>
             <a:pPr indent="0" lvl="0" marL="0" marR="0" rtl="0" algn="l">
+              <a:lnSpc>
+                <a:spcPct val="100000"/>
+              </a:lnSpc>
               <a:spcBef>
                 <a:spcPts val="0"/>
               </a:spcBef>
@@ -11629,19 +12557,35 @@
           </a:bodyPr>
           <a:lstStyle/>
           <a:p>
-            <a:pPr indent="0" lvl="0" marL="0" rtl="0" algn="l">
-              <a:spcBef>
-                <a:spcPts val="0"/>
-              </a:spcBef>
-              <a:spcAft>
-                <a:spcPts val="0"/>
-              </a:spcAft>
+            <a:pPr indent="0" lvl="0" marL="0" marR="0" rtl="0" algn="l">
+              <a:lnSpc>
+                <a:spcPct val="100000"/>
+              </a:lnSpc>
+              <a:spcBef>
+                <a:spcPts val="0"/>
+              </a:spcBef>
+              <a:spcAft>
+                <a:spcPts val="0"/>
+              </a:spcAft>
+              <a:buClr>
+                <a:srgbClr val="000000"/>
+              </a:buClr>
+              <a:buSzPts val="1400"/>
+              <a:buFont typeface="Arial"/>
               <a:buNone/>
             </a:pPr>
             <a:r>
               <a:t/>
             </a:r>
-            <a:endParaRPr/>
+            <a:endParaRPr b="0" i="0" sz="1400" u="none" cap="none" strike="noStrike">
+              <a:solidFill>
+                <a:srgbClr val="000000"/>
+              </a:solidFill>
+              <a:latin typeface="Arial"/>
+              <a:ea typeface="Arial"/>
+              <a:cs typeface="Arial"/>
+              <a:sym typeface="Arial"/>
+            </a:endParaRPr>
           </a:p>
         </p:txBody>
       </p:sp>
@@ -11671,6 +12615,9 @@
           <a:lstStyle/>
           <a:p>
             <a:pPr indent="0" lvl="0" marL="0" marR="0" rtl="0" algn="l">
+              <a:lnSpc>
+                <a:spcPct val="100000"/>
+              </a:lnSpc>
               <a:spcBef>
                 <a:spcPts val="0"/>
               </a:spcBef>
@@ -11800,6 +12747,9 @@
           <a:lstStyle/>
           <a:p>
             <a:pPr indent="0" lvl="0" marL="0" marR="0" rtl="0" algn="l">
+              <a:lnSpc>
+                <a:spcPct val="100000"/>
+              </a:lnSpc>
               <a:spcBef>
                 <a:spcPts val="0"/>
               </a:spcBef>
@@ -11872,19 +12822,35 @@
           </a:bodyPr>
           <a:lstStyle/>
           <a:p>
-            <a:pPr indent="0" lvl="0" marL="0" rtl="0" algn="l">
-              <a:spcBef>
-                <a:spcPts val="0"/>
-              </a:spcBef>
-              <a:spcAft>
-                <a:spcPts val="0"/>
-              </a:spcAft>
+            <a:pPr indent="0" lvl="0" marL="0" marR="0" rtl="0" algn="l">
+              <a:lnSpc>
+                <a:spcPct val="100000"/>
+              </a:lnSpc>
+              <a:spcBef>
+                <a:spcPts val="0"/>
+              </a:spcBef>
+              <a:spcAft>
+                <a:spcPts val="0"/>
+              </a:spcAft>
+              <a:buClr>
+                <a:srgbClr val="000000"/>
+              </a:buClr>
+              <a:buSzPts val="1400"/>
+              <a:buFont typeface="Arial"/>
               <a:buNone/>
             </a:pPr>
             <a:r>
               <a:t/>
             </a:r>
-            <a:endParaRPr/>
+            <a:endParaRPr b="0" i="0" sz="1400" u="none" cap="none" strike="noStrike">
+              <a:solidFill>
+                <a:srgbClr val="000000"/>
+              </a:solidFill>
+              <a:latin typeface="Arial"/>
+              <a:ea typeface="Arial"/>
+              <a:cs typeface="Arial"/>
+              <a:sym typeface="Arial"/>
+            </a:endParaRPr>
           </a:p>
         </p:txBody>
       </p:sp>
@@ -11914,6 +12880,9 @@
           <a:lstStyle/>
           <a:p>
             <a:pPr indent="0" lvl="0" marL="0" marR="0" rtl="0" algn="l">
+              <a:lnSpc>
+                <a:spcPct val="100000"/>
+              </a:lnSpc>
               <a:spcBef>
                 <a:spcPts val="0"/>
               </a:spcBef>
@@ -11959,8 +12928,8 @@
         </p:nvSpPr>
         <p:spPr>
           <a:xfrm>
-            <a:off x="9968954" y="3893790"/>
-            <a:ext cx="4360418" cy="409575"/>
+            <a:off x="9968948" y="3893800"/>
+            <a:ext cx="6343800" cy="409500"/>
           </a:xfrm>
           <a:prstGeom prst="rect">
             <a:avLst/>
@@ -12043,6 +13012,9 @@
           <a:lstStyle/>
           <a:p>
             <a:pPr indent="0" lvl="0" marL="0" marR="0" rtl="0" algn="l">
+              <a:lnSpc>
+                <a:spcPct val="100000"/>
+              </a:lnSpc>
               <a:spcBef>
                 <a:spcPts val="0"/>
               </a:spcBef>
@@ -12115,19 +13087,35 @@
           </a:bodyPr>
           <a:lstStyle/>
           <a:p>
-            <a:pPr indent="0" lvl="0" marL="0" rtl="0" algn="l">
-              <a:spcBef>
-                <a:spcPts val="0"/>
-              </a:spcBef>
-              <a:spcAft>
-                <a:spcPts val="0"/>
-              </a:spcAft>
+            <a:pPr indent="0" lvl="0" marL="0" marR="0" rtl="0" algn="l">
+              <a:lnSpc>
+                <a:spcPct val="100000"/>
+              </a:lnSpc>
+              <a:spcBef>
+                <a:spcPts val="0"/>
+              </a:spcBef>
+              <a:spcAft>
+                <a:spcPts val="0"/>
+              </a:spcAft>
+              <a:buClr>
+                <a:srgbClr val="000000"/>
+              </a:buClr>
+              <a:buSzPts val="1400"/>
+              <a:buFont typeface="Arial"/>
               <a:buNone/>
             </a:pPr>
             <a:r>
               <a:t/>
             </a:r>
-            <a:endParaRPr/>
+            <a:endParaRPr b="0" i="0" sz="1400" u="none" cap="none" strike="noStrike">
+              <a:solidFill>
+                <a:srgbClr val="000000"/>
+              </a:solidFill>
+              <a:latin typeface="Arial"/>
+              <a:ea typeface="Arial"/>
+              <a:cs typeface="Arial"/>
+              <a:sym typeface="Arial"/>
+            </a:endParaRPr>
           </a:p>
         </p:txBody>
       </p:sp>
@@ -12157,6 +13145,9 @@
           <a:lstStyle/>
           <a:p>
             <a:pPr indent="0" lvl="0" marL="0" marR="0" rtl="0" algn="l">
+              <a:lnSpc>
+                <a:spcPct val="100000"/>
+              </a:lnSpc>
               <a:spcBef>
                 <a:spcPts val="0"/>
               </a:spcBef>
@@ -12286,6 +13277,9 @@
           <a:lstStyle/>
           <a:p>
             <a:pPr indent="0" lvl="0" marL="0" marR="0" rtl="0" algn="l">
+              <a:lnSpc>
+                <a:spcPct val="100000"/>
+              </a:lnSpc>
               <a:spcBef>
                 <a:spcPts val="0"/>
               </a:spcBef>
@@ -12358,19 +13352,35 @@
           </a:bodyPr>
           <a:lstStyle/>
           <a:p>
-            <a:pPr indent="0" lvl="0" marL="0" rtl="0" algn="l">
-              <a:spcBef>
-                <a:spcPts val="0"/>
-              </a:spcBef>
-              <a:spcAft>
-                <a:spcPts val="0"/>
-              </a:spcAft>
+            <a:pPr indent="0" lvl="0" marL="0" marR="0" rtl="0" algn="l">
+              <a:lnSpc>
+                <a:spcPct val="100000"/>
+              </a:lnSpc>
+              <a:spcBef>
+                <a:spcPts val="0"/>
+              </a:spcBef>
+              <a:spcAft>
+                <a:spcPts val="0"/>
+              </a:spcAft>
+              <a:buClr>
+                <a:srgbClr val="000000"/>
+              </a:buClr>
+              <a:buSzPts val="1400"/>
+              <a:buFont typeface="Arial"/>
               <a:buNone/>
             </a:pPr>
             <a:r>
               <a:t/>
             </a:r>
-            <a:endParaRPr/>
+            <a:endParaRPr b="0" i="0" sz="1400" u="none" cap="none" strike="noStrike">
+              <a:solidFill>
+                <a:srgbClr val="000000"/>
+              </a:solidFill>
+              <a:latin typeface="Arial"/>
+              <a:ea typeface="Arial"/>
+              <a:cs typeface="Arial"/>
+              <a:sym typeface="Arial"/>
+            </a:endParaRPr>
           </a:p>
         </p:txBody>
       </p:sp>
@@ -12400,6 +13410,9 @@
           <a:lstStyle/>
           <a:p>
             <a:pPr indent="0" lvl="0" marL="0" marR="0" rtl="0" algn="l">
+              <a:lnSpc>
+                <a:spcPct val="100000"/>
+              </a:lnSpc>
               <a:spcBef>
                 <a:spcPts val="0"/>
               </a:spcBef>
@@ -12529,6 +13542,9 @@
           <a:lstStyle/>
           <a:p>
             <a:pPr indent="0" lvl="0" marL="0" marR="0" rtl="0" algn="l">
+              <a:lnSpc>
+                <a:spcPct val="100000"/>
+              </a:lnSpc>
               <a:spcBef>
                 <a:spcPts val="0"/>
               </a:spcBef>
@@ -12601,19 +13617,35 @@
           </a:bodyPr>
           <a:lstStyle/>
           <a:p>
-            <a:pPr indent="0" lvl="0" marL="0" rtl="0" algn="l">
-              <a:spcBef>
-                <a:spcPts val="0"/>
-              </a:spcBef>
-              <a:spcAft>
-                <a:spcPts val="0"/>
-              </a:spcAft>
+            <a:pPr indent="0" lvl="0" marL="0" marR="0" rtl="0" algn="l">
+              <a:lnSpc>
+                <a:spcPct val="100000"/>
+              </a:lnSpc>
+              <a:spcBef>
+                <a:spcPts val="0"/>
+              </a:spcBef>
+              <a:spcAft>
+                <a:spcPts val="0"/>
+              </a:spcAft>
+              <a:buClr>
+                <a:srgbClr val="000000"/>
+              </a:buClr>
+              <a:buSzPts val="1400"/>
+              <a:buFont typeface="Arial"/>
               <a:buNone/>
             </a:pPr>
             <a:r>
               <a:t/>
             </a:r>
-            <a:endParaRPr/>
+            <a:endParaRPr b="0" i="0" sz="1400" u="none" cap="none" strike="noStrike">
+              <a:solidFill>
+                <a:srgbClr val="000000"/>
+              </a:solidFill>
+              <a:latin typeface="Arial"/>
+              <a:ea typeface="Arial"/>
+              <a:cs typeface="Arial"/>
+              <a:sym typeface="Arial"/>
+            </a:endParaRPr>
           </a:p>
         </p:txBody>
       </p:sp>
@@ -12643,6 +13675,9 @@
           <a:lstStyle/>
           <a:p>
             <a:pPr indent="0" lvl="0" marL="0" marR="0" rtl="0" algn="l">
+              <a:lnSpc>
+                <a:spcPct val="100000"/>
+              </a:lnSpc>
               <a:spcBef>
                 <a:spcPts val="0"/>
               </a:spcBef>
@@ -12772,6 +13807,9 @@
           <a:lstStyle/>
           <a:p>
             <a:pPr indent="0" lvl="0" marL="0" marR="0" rtl="0" algn="l">
+              <a:lnSpc>
+                <a:spcPct val="100000"/>
+              </a:lnSpc>
               <a:spcBef>
                 <a:spcPts val="0"/>
               </a:spcBef>
@@ -12844,19 +13882,35 @@
           </a:bodyPr>
           <a:lstStyle/>
           <a:p>
-            <a:pPr indent="0" lvl="0" marL="0" rtl="0" algn="l">
-              <a:spcBef>
-                <a:spcPts val="0"/>
-              </a:spcBef>
-              <a:spcAft>
-                <a:spcPts val="0"/>
-              </a:spcAft>
+            <a:pPr indent="0" lvl="0" marL="0" marR="0" rtl="0" algn="l">
+              <a:lnSpc>
+                <a:spcPct val="100000"/>
+              </a:lnSpc>
+              <a:spcBef>
+                <a:spcPts val="0"/>
+              </a:spcBef>
+              <a:spcAft>
+                <a:spcPts val="0"/>
+              </a:spcAft>
+              <a:buClr>
+                <a:srgbClr val="000000"/>
+              </a:buClr>
+              <a:buSzPts val="1400"/>
+              <a:buFont typeface="Arial"/>
               <a:buNone/>
             </a:pPr>
             <a:r>
               <a:t/>
             </a:r>
-            <a:endParaRPr/>
+            <a:endParaRPr b="0" i="0" sz="1400" u="none" cap="none" strike="noStrike">
+              <a:solidFill>
+                <a:srgbClr val="000000"/>
+              </a:solidFill>
+              <a:latin typeface="Arial"/>
+              <a:ea typeface="Arial"/>
+              <a:cs typeface="Arial"/>
+              <a:sym typeface="Arial"/>
+            </a:endParaRPr>
           </a:p>
         </p:txBody>
       </p:sp>
@@ -12886,6 +13940,9 @@
           <a:lstStyle/>
           <a:p>
             <a:pPr indent="0" lvl="0" marL="0" marR="0" rtl="0" algn="l">
+              <a:lnSpc>
+                <a:spcPct val="100000"/>
+              </a:lnSpc>
               <a:spcBef>
                 <a:spcPts val="0"/>
               </a:spcBef>
@@ -13015,6 +14072,9 @@
           <a:lstStyle/>
           <a:p>
             <a:pPr indent="0" lvl="0" marL="0" marR="0" rtl="0" algn="l">
+              <a:lnSpc>
+                <a:spcPct val="100000"/>
+              </a:lnSpc>
               <a:spcBef>
                 <a:spcPts val="0"/>
               </a:spcBef>
@@ -13087,19 +14147,35 @@
           </a:bodyPr>
           <a:lstStyle/>
           <a:p>
-            <a:pPr indent="0" lvl="0" marL="0" rtl="0" algn="l">
-              <a:spcBef>
-                <a:spcPts val="0"/>
-              </a:spcBef>
-              <a:spcAft>
-                <a:spcPts val="0"/>
-              </a:spcAft>
+            <a:pPr indent="0" lvl="0" marL="0" marR="0" rtl="0" algn="l">
+              <a:lnSpc>
+                <a:spcPct val="100000"/>
+              </a:lnSpc>
+              <a:spcBef>
+                <a:spcPts val="0"/>
+              </a:spcBef>
+              <a:spcAft>
+                <a:spcPts val="0"/>
+              </a:spcAft>
+              <a:buClr>
+                <a:srgbClr val="000000"/>
+              </a:buClr>
+              <a:buSzPts val="1400"/>
+              <a:buFont typeface="Arial"/>
               <a:buNone/>
             </a:pPr>
             <a:r>
               <a:t/>
             </a:r>
-            <a:endParaRPr/>
+            <a:endParaRPr b="0" i="0" sz="1400" u="none" cap="none" strike="noStrike">
+              <a:solidFill>
+                <a:srgbClr val="000000"/>
+              </a:solidFill>
+              <a:latin typeface="Arial"/>
+              <a:ea typeface="Arial"/>
+              <a:cs typeface="Arial"/>
+              <a:sym typeface="Arial"/>
+            </a:endParaRPr>
           </a:p>
         </p:txBody>
       </p:sp>
@@ -13129,6 +14205,9 @@
           <a:lstStyle/>
           <a:p>
             <a:pPr indent="0" lvl="0" marL="0" marR="0" rtl="0" algn="l">
+              <a:lnSpc>
+                <a:spcPct val="100000"/>
+              </a:lnSpc>
               <a:spcBef>
                 <a:spcPts val="0"/>
               </a:spcBef>
@@ -13174,8 +14253,8 @@
         </p:nvSpPr>
         <p:spPr>
           <a:xfrm>
-            <a:off x="1796504" y="7494240"/>
-            <a:ext cx="4770477" cy="409575"/>
+            <a:off x="1796498" y="7494250"/>
+            <a:ext cx="7271400" cy="409500"/>
           </a:xfrm>
           <a:prstGeom prst="rect">
             <a:avLst/>
@@ -13258,6 +14337,9 @@
           <a:lstStyle/>
           <a:p>
             <a:pPr indent="0" lvl="0" marL="0" marR="0" rtl="0" algn="l">
+              <a:lnSpc>
+                <a:spcPct val="100000"/>
+              </a:lnSpc>
               <a:spcBef>
                 <a:spcPts val="0"/>
               </a:spcBef>
@@ -13330,19 +14412,35 @@
           </a:bodyPr>
           <a:lstStyle/>
           <a:p>
-            <a:pPr indent="0" lvl="0" marL="0" rtl="0" algn="l">
-              <a:spcBef>
-                <a:spcPts val="0"/>
-              </a:spcBef>
-              <a:spcAft>
-                <a:spcPts val="0"/>
-              </a:spcAft>
+            <a:pPr indent="0" lvl="0" marL="0" marR="0" rtl="0" algn="l">
+              <a:lnSpc>
+                <a:spcPct val="100000"/>
+              </a:lnSpc>
+              <a:spcBef>
+                <a:spcPts val="0"/>
+              </a:spcBef>
+              <a:spcAft>
+                <a:spcPts val="0"/>
+              </a:spcAft>
+              <a:buClr>
+                <a:srgbClr val="000000"/>
+              </a:buClr>
+              <a:buSzPts val="1400"/>
+              <a:buFont typeface="Arial"/>
               <a:buNone/>
             </a:pPr>
             <a:r>
               <a:t/>
             </a:r>
-            <a:endParaRPr/>
+            <a:endParaRPr b="0" i="0" sz="1400" u="none" cap="none" strike="noStrike">
+              <a:solidFill>
+                <a:srgbClr val="000000"/>
+              </a:solidFill>
+              <a:latin typeface="Arial"/>
+              <a:ea typeface="Arial"/>
+              <a:cs typeface="Arial"/>
+              <a:sym typeface="Arial"/>
+            </a:endParaRPr>
           </a:p>
         </p:txBody>
       </p:sp>
@@ -13372,6 +14470,9 @@
           <a:lstStyle/>
           <a:p>
             <a:pPr indent="0" lvl="0" marL="0" marR="0" rtl="0" algn="l">
+              <a:lnSpc>
+                <a:spcPct val="100000"/>
+              </a:lnSpc>
               <a:spcBef>
                 <a:spcPts val="0"/>
               </a:spcBef>
@@ -13501,6 +14602,9 @@
           <a:lstStyle/>
           <a:p>
             <a:pPr indent="0" lvl="0" marL="0" marR="0" rtl="0" algn="l">
+              <a:lnSpc>
+                <a:spcPct val="100000"/>
+              </a:lnSpc>
               <a:spcBef>
                 <a:spcPts val="0"/>
               </a:spcBef>
@@ -13590,19 +14694,35 @@
           </a:bodyPr>
           <a:lstStyle/>
           <a:p>
-            <a:pPr indent="0" lvl="0" marL="0" rtl="0" algn="l">
-              <a:spcBef>
-                <a:spcPts val="0"/>
-              </a:spcBef>
-              <a:spcAft>
-                <a:spcPts val="0"/>
-              </a:spcAft>
+            <a:pPr indent="0" lvl="0" marL="0" marR="0" rtl="0" algn="l">
+              <a:lnSpc>
+                <a:spcPct val="100000"/>
+              </a:lnSpc>
+              <a:spcBef>
+                <a:spcPts val="0"/>
+              </a:spcBef>
+              <a:spcAft>
+                <a:spcPts val="0"/>
+              </a:spcAft>
+              <a:buClr>
+                <a:srgbClr val="000000"/>
+              </a:buClr>
+              <a:buSzPts val="1400"/>
+              <a:buFont typeface="Arial"/>
               <a:buNone/>
             </a:pPr>
             <a:r>
               <a:t/>
             </a:r>
-            <a:endParaRPr/>
+            <a:endParaRPr b="0" i="0" sz="1400" u="none" cap="none" strike="noStrike">
+              <a:solidFill>
+                <a:srgbClr val="000000"/>
+              </a:solidFill>
+              <a:latin typeface="Arial"/>
+              <a:ea typeface="Arial"/>
+              <a:cs typeface="Arial"/>
+              <a:sym typeface="Arial"/>
+            </a:endParaRPr>
           </a:p>
         </p:txBody>
       </p:sp>
@@ -13635,19 +14755,35 @@
           </a:bodyPr>
           <a:lstStyle/>
           <a:p>
-            <a:pPr indent="0" lvl="0" marL="0" rtl="0" algn="l">
-              <a:spcBef>
-                <a:spcPts val="0"/>
-              </a:spcBef>
-              <a:spcAft>
-                <a:spcPts val="0"/>
-              </a:spcAft>
+            <a:pPr indent="0" lvl="0" marL="0" marR="0" rtl="0" algn="l">
+              <a:lnSpc>
+                <a:spcPct val="100000"/>
+              </a:lnSpc>
+              <a:spcBef>
+                <a:spcPts val="0"/>
+              </a:spcBef>
+              <a:spcAft>
+                <a:spcPts val="0"/>
+              </a:spcAft>
+              <a:buClr>
+                <a:srgbClr val="000000"/>
+              </a:buClr>
+              <a:buSzPts val="1400"/>
+              <a:buFont typeface="Arial"/>
               <a:buNone/>
             </a:pPr>
             <a:r>
               <a:t/>
             </a:r>
-            <a:endParaRPr/>
+            <a:endParaRPr b="0" i="0" sz="1400" u="none" cap="none" strike="noStrike">
+              <a:solidFill>
+                <a:srgbClr val="000000"/>
+              </a:solidFill>
+              <a:latin typeface="Arial"/>
+              <a:ea typeface="Arial"/>
+              <a:cs typeface="Arial"/>
+              <a:sym typeface="Arial"/>
+            </a:endParaRPr>
           </a:p>
         </p:txBody>
       </p:sp>
@@ -13680,19 +14816,35 @@
           </a:bodyPr>
           <a:lstStyle/>
           <a:p>
-            <a:pPr indent="0" lvl="0" marL="0" rtl="0" algn="l">
-              <a:spcBef>
-                <a:spcPts val="0"/>
-              </a:spcBef>
-              <a:spcAft>
-                <a:spcPts val="0"/>
-              </a:spcAft>
+            <a:pPr indent="0" lvl="0" marL="0" marR="0" rtl="0" algn="l">
+              <a:lnSpc>
+                <a:spcPct val="100000"/>
+              </a:lnSpc>
+              <a:spcBef>
+                <a:spcPts val="0"/>
+              </a:spcBef>
+              <a:spcAft>
+                <a:spcPts val="0"/>
+              </a:spcAft>
+              <a:buClr>
+                <a:srgbClr val="000000"/>
+              </a:buClr>
+              <a:buSzPts val="1400"/>
+              <a:buFont typeface="Arial"/>
               <a:buNone/>
             </a:pPr>
             <a:r>
               <a:t/>
             </a:r>
-            <a:endParaRPr/>
+            <a:endParaRPr b="0" i="0" sz="1400" u="none" cap="none" strike="noStrike">
+              <a:solidFill>
+                <a:srgbClr val="000000"/>
+              </a:solidFill>
+              <a:latin typeface="Arial"/>
+              <a:ea typeface="Arial"/>
+              <a:cs typeface="Arial"/>
+              <a:sym typeface="Arial"/>
+            </a:endParaRPr>
           </a:p>
         </p:txBody>
       </p:sp>
@@ -13725,19 +14877,35 @@
           </a:bodyPr>
           <a:lstStyle/>
           <a:p>
-            <a:pPr indent="0" lvl="0" marL="0" rtl="0" algn="l">
-              <a:spcBef>
-                <a:spcPts val="0"/>
-              </a:spcBef>
-              <a:spcAft>
-                <a:spcPts val="0"/>
-              </a:spcAft>
+            <a:pPr indent="0" lvl="0" marL="0" marR="0" rtl="0" algn="l">
+              <a:lnSpc>
+                <a:spcPct val="100000"/>
+              </a:lnSpc>
+              <a:spcBef>
+                <a:spcPts val="0"/>
+              </a:spcBef>
+              <a:spcAft>
+                <a:spcPts val="0"/>
+              </a:spcAft>
+              <a:buClr>
+                <a:srgbClr val="000000"/>
+              </a:buClr>
+              <a:buSzPts val="1400"/>
+              <a:buFont typeface="Arial"/>
               <a:buNone/>
             </a:pPr>
             <a:r>
               <a:t/>
             </a:r>
-            <a:endParaRPr/>
+            <a:endParaRPr b="0" i="0" sz="1400" u="none" cap="none" strike="noStrike">
+              <a:solidFill>
+                <a:srgbClr val="000000"/>
+              </a:solidFill>
+              <a:latin typeface="Arial"/>
+              <a:ea typeface="Arial"/>
+              <a:cs typeface="Arial"/>
+              <a:sym typeface="Arial"/>
+            </a:endParaRPr>
           </a:p>
         </p:txBody>
       </p:sp>
@@ -13770,19 +14938,35 @@
           </a:bodyPr>
           <a:lstStyle/>
           <a:p>
-            <a:pPr indent="0" lvl="0" marL="0" rtl="0" algn="l">
-              <a:spcBef>
-                <a:spcPts val="0"/>
-              </a:spcBef>
-              <a:spcAft>
-                <a:spcPts val="0"/>
-              </a:spcAft>
+            <a:pPr indent="0" lvl="0" marL="0" marR="0" rtl="0" algn="l">
+              <a:lnSpc>
+                <a:spcPct val="100000"/>
+              </a:lnSpc>
+              <a:spcBef>
+                <a:spcPts val="0"/>
+              </a:spcBef>
+              <a:spcAft>
+                <a:spcPts val="0"/>
+              </a:spcAft>
+              <a:buClr>
+                <a:srgbClr val="000000"/>
+              </a:buClr>
+              <a:buSzPts val="1400"/>
+              <a:buFont typeface="Arial"/>
               <a:buNone/>
             </a:pPr>
             <a:r>
               <a:t/>
             </a:r>
-            <a:endParaRPr/>
+            <a:endParaRPr b="0" i="0" sz="1400" u="none" cap="none" strike="noStrike">
+              <a:solidFill>
+                <a:srgbClr val="000000"/>
+              </a:solidFill>
+              <a:latin typeface="Arial"/>
+              <a:ea typeface="Arial"/>
+              <a:cs typeface="Arial"/>
+              <a:sym typeface="Arial"/>
+            </a:endParaRPr>
           </a:p>
         </p:txBody>
       </p:sp>
@@ -13815,19 +14999,35 @@
           </a:bodyPr>
           <a:lstStyle/>
           <a:p>
-            <a:pPr indent="0" lvl="0" marL="0" rtl="0" algn="l">
-              <a:spcBef>
-                <a:spcPts val="0"/>
-              </a:spcBef>
-              <a:spcAft>
-                <a:spcPts val="0"/>
-              </a:spcAft>
+            <a:pPr indent="0" lvl="0" marL="0" marR="0" rtl="0" algn="l">
+              <a:lnSpc>
+                <a:spcPct val="100000"/>
+              </a:lnSpc>
+              <a:spcBef>
+                <a:spcPts val="0"/>
+              </a:spcBef>
+              <a:spcAft>
+                <a:spcPts val="0"/>
+              </a:spcAft>
+              <a:buClr>
+                <a:srgbClr val="000000"/>
+              </a:buClr>
+              <a:buSzPts val="1400"/>
+              <a:buFont typeface="Arial"/>
               <a:buNone/>
             </a:pPr>
             <a:r>
               <a:t/>
             </a:r>
-            <a:endParaRPr/>
+            <a:endParaRPr b="0" i="0" sz="1400" u="none" cap="none" strike="noStrike">
+              <a:solidFill>
+                <a:srgbClr val="000000"/>
+              </a:solidFill>
+              <a:latin typeface="Arial"/>
+              <a:ea typeface="Arial"/>
+              <a:cs typeface="Arial"/>
+              <a:sym typeface="Arial"/>
+            </a:endParaRPr>
           </a:p>
         </p:txBody>
       </p:sp>
@@ -13857,6 +15057,9 @@
           <a:lstStyle/>
           <a:p>
             <a:pPr indent="0" lvl="0" marL="0" marR="0" rtl="0" algn="ctr">
+              <a:lnSpc>
+                <a:spcPct val="100000"/>
+              </a:lnSpc>
               <a:spcBef>
                 <a:spcPts val="0"/>
               </a:spcBef>
@@ -13920,6 +15123,9 @@
           <a:lstStyle/>
           <a:p>
             <a:pPr indent="0" lvl="0" marL="0" marR="0" rtl="0" algn="ctr">
+              <a:lnSpc>
+                <a:spcPct val="100000"/>
+              </a:lnSpc>
               <a:spcBef>
                 <a:spcPts val="0"/>
               </a:spcBef>
@@ -14011,10 +15217,14 @@
               </a:rPr>
               <a:t>Ready strategy</a:t>
             </a:r>
-            <a:endParaRPr b="1" sz="5100">
+            <a:endParaRPr b="1" i="0" sz="5100" u="none" cap="none" strike="noStrike">
               <a:solidFill>
                 <a:srgbClr val="F0F4F8"/>
               </a:solidFill>
+              <a:latin typeface="Arial"/>
+              <a:ea typeface="Arial"/>
+              <a:cs typeface="Arial"/>
+              <a:sym typeface="Arial"/>
             </a:endParaRPr>
           </a:p>
           <a:p>
@@ -14088,19 +15298,35 @@
           </a:bodyPr>
           <a:lstStyle/>
           <a:p>
-            <a:pPr indent="0" lvl="0" marL="0" rtl="0" algn="l">
-              <a:spcBef>
-                <a:spcPts val="0"/>
-              </a:spcBef>
-              <a:spcAft>
-                <a:spcPts val="0"/>
-              </a:spcAft>
+            <a:pPr indent="0" lvl="0" marL="0" marR="0" rtl="0" algn="l">
+              <a:lnSpc>
+                <a:spcPct val="100000"/>
+              </a:lnSpc>
+              <a:spcBef>
+                <a:spcPts val="0"/>
+              </a:spcBef>
+              <a:spcAft>
+                <a:spcPts val="0"/>
+              </a:spcAft>
+              <a:buClr>
+                <a:srgbClr val="000000"/>
+              </a:buClr>
+              <a:buSzPts val="1400"/>
+              <a:buFont typeface="Arial"/>
               <a:buNone/>
             </a:pPr>
             <a:r>
               <a:t/>
             </a:r>
-            <a:endParaRPr/>
+            <a:endParaRPr b="0" i="0" sz="1400" u="none" cap="none" strike="noStrike">
+              <a:solidFill>
+                <a:srgbClr val="000000"/>
+              </a:solidFill>
+              <a:latin typeface="Arial"/>
+              <a:ea typeface="Arial"/>
+              <a:cs typeface="Arial"/>
+              <a:sym typeface="Arial"/>
+            </a:endParaRPr>
           </a:p>
         </p:txBody>
       </p:sp>
@@ -14139,19 +15365,35 @@
           </a:bodyPr>
           <a:lstStyle/>
           <a:p>
-            <a:pPr indent="0" lvl="0" marL="0" rtl="0" algn="l">
-              <a:spcBef>
-                <a:spcPts val="0"/>
-              </a:spcBef>
-              <a:spcAft>
-                <a:spcPts val="0"/>
-              </a:spcAft>
+            <a:pPr indent="0" lvl="0" marL="0" marR="0" rtl="0" algn="l">
+              <a:lnSpc>
+                <a:spcPct val="100000"/>
+              </a:lnSpc>
+              <a:spcBef>
+                <a:spcPts val="0"/>
+              </a:spcBef>
+              <a:spcAft>
+                <a:spcPts val="0"/>
+              </a:spcAft>
+              <a:buClr>
+                <a:srgbClr val="000000"/>
+              </a:buClr>
+              <a:buSzPts val="1400"/>
+              <a:buFont typeface="Arial"/>
               <a:buNone/>
             </a:pPr>
             <a:r>
               <a:t/>
             </a:r>
-            <a:endParaRPr/>
+            <a:endParaRPr b="0" i="0" sz="1400" u="none" cap="none" strike="noStrike">
+              <a:solidFill>
+                <a:srgbClr val="000000"/>
+              </a:solidFill>
+              <a:latin typeface="Arial"/>
+              <a:ea typeface="Arial"/>
+              <a:cs typeface="Arial"/>
+              <a:sym typeface="Arial"/>
+            </a:endParaRPr>
           </a:p>
         </p:txBody>
       </p:sp>
@@ -14262,6 +15504,9 @@
           <a:lstStyle/>
           <a:p>
             <a:pPr indent="0" lvl="0" marL="0" marR="0" rtl="0" algn="ctr">
+              <a:lnSpc>
+                <a:spcPct val="100000"/>
+              </a:lnSpc>
               <a:spcBef>
                 <a:spcPts val="0"/>
               </a:spcBef>
@@ -14391,6 +15636,9 @@
           <a:lstStyle/>
           <a:p>
             <a:pPr indent="0" lvl="0" marL="0" marR="0" rtl="0" algn="ctr">
+              <a:lnSpc>
+                <a:spcPct val="100000"/>
+              </a:lnSpc>
               <a:spcBef>
                 <a:spcPts val="0"/>
               </a:spcBef>
@@ -14520,6 +15768,9 @@
           <a:lstStyle/>
           <a:p>
             <a:pPr indent="0" lvl="0" marL="0" marR="0" rtl="0" algn="ctr">
+              <a:lnSpc>
+                <a:spcPct val="100000"/>
+              </a:lnSpc>
               <a:spcBef>
                 <a:spcPts val="0"/>
               </a:spcBef>
@@ -14649,6 +15900,9 @@
           <a:lstStyle/>
           <a:p>
             <a:pPr indent="0" lvl="0" marL="0" marR="0" rtl="0" algn="ctr">
+              <a:lnSpc>
+                <a:spcPct val="100000"/>
+              </a:lnSpc>
               <a:spcBef>
                 <a:spcPts val="0"/>
               </a:spcBef>
@@ -14771,6 +16025,9 @@
           <a:lstStyle/>
           <a:p>
             <a:pPr indent="0" lvl="0" marL="0" marR="0" rtl="0" algn="l">
+              <a:lnSpc>
+                <a:spcPct val="100000"/>
+              </a:lnSpc>
               <a:spcBef>
                 <a:spcPts val="0"/>
               </a:spcBef>
@@ -14903,19 +16160,35 @@
           </a:bodyPr>
           <a:lstStyle/>
           <a:p>
-            <a:pPr indent="0" lvl="0" marL="0" rtl="0" algn="l">
-              <a:spcBef>
-                <a:spcPts val="0"/>
-              </a:spcBef>
-              <a:spcAft>
-                <a:spcPts val="0"/>
-              </a:spcAft>
+            <a:pPr indent="0" lvl="0" marL="0" marR="0" rtl="0" algn="l">
+              <a:lnSpc>
+                <a:spcPct val="100000"/>
+              </a:lnSpc>
+              <a:spcBef>
+                <a:spcPts val="0"/>
+              </a:spcBef>
+              <a:spcAft>
+                <a:spcPts val="0"/>
+              </a:spcAft>
+              <a:buClr>
+                <a:srgbClr val="000000"/>
+              </a:buClr>
+              <a:buSzPts val="1400"/>
+              <a:buFont typeface="Arial"/>
               <a:buNone/>
             </a:pPr>
             <a:r>
               <a:t/>
             </a:r>
-            <a:endParaRPr/>
+            <a:endParaRPr b="0" i="0" sz="1400" u="none" cap="none" strike="noStrike">
+              <a:solidFill>
+                <a:srgbClr val="000000"/>
+              </a:solidFill>
+              <a:latin typeface="Arial"/>
+              <a:ea typeface="Arial"/>
+              <a:cs typeface="Arial"/>
+              <a:sym typeface="Arial"/>
+            </a:endParaRPr>
           </a:p>
         </p:txBody>
       </p:sp>
@@ -14993,8 +16266,8 @@
         </p:nvSpPr>
         <p:spPr>
           <a:xfrm>
-            <a:off x="1047750" y="6489799"/>
-            <a:ext cx="8044815" cy="510480"/>
+            <a:off x="1047750" y="7096373"/>
+            <a:ext cx="8044800" cy="510600"/>
           </a:xfrm>
           <a:prstGeom prst="rect">
             <a:avLst/>
@@ -15090,19 +16363,35 @@
           </a:bodyPr>
           <a:lstStyle/>
           <a:p>
-            <a:pPr indent="0" lvl="0" marL="0" rtl="0" algn="l">
-              <a:spcBef>
-                <a:spcPts val="0"/>
-              </a:spcBef>
-              <a:spcAft>
-                <a:spcPts val="0"/>
-              </a:spcAft>
+            <a:pPr indent="0" lvl="0" marL="0" marR="0" rtl="0" algn="l">
+              <a:lnSpc>
+                <a:spcPct val="100000"/>
+              </a:lnSpc>
+              <a:spcBef>
+                <a:spcPts val="0"/>
+              </a:spcBef>
+              <a:spcAft>
+                <a:spcPts val="0"/>
+              </a:spcAft>
+              <a:buClr>
+                <a:srgbClr val="000000"/>
+              </a:buClr>
+              <a:buSzPts val="1400"/>
+              <a:buFont typeface="Arial"/>
               <a:buNone/>
             </a:pPr>
             <a:r>
               <a:t/>
             </a:r>
-            <a:endParaRPr/>
+            <a:endParaRPr b="0" i="0" sz="1400" u="none" cap="none" strike="noStrike">
+              <a:solidFill>
+                <a:srgbClr val="000000"/>
+              </a:solidFill>
+              <a:latin typeface="Arial"/>
+              <a:ea typeface="Arial"/>
+              <a:cs typeface="Arial"/>
+              <a:sym typeface="Arial"/>
+            </a:endParaRPr>
           </a:p>
         </p:txBody>
       </p:sp>
@@ -15132,6 +16421,9 @@
           <a:lstStyle/>
           <a:p>
             <a:pPr indent="0" lvl="0" marL="0" marR="0" rtl="0" algn="l">
+              <a:lnSpc>
+                <a:spcPct val="100000"/>
+              </a:lnSpc>
               <a:spcBef>
                 <a:spcPts val="0"/>
               </a:spcBef>
@@ -15208,19 +16500,35 @@
           </a:bodyPr>
           <a:lstStyle/>
           <a:p>
-            <a:pPr indent="0" lvl="0" marL="0" rtl="0" algn="l">
-              <a:spcBef>
-                <a:spcPts val="0"/>
-              </a:spcBef>
-              <a:spcAft>
-                <a:spcPts val="0"/>
-              </a:spcAft>
+            <a:pPr indent="0" lvl="0" marL="0" marR="0" rtl="0" algn="l">
+              <a:lnSpc>
+                <a:spcPct val="100000"/>
+              </a:lnSpc>
+              <a:spcBef>
+                <a:spcPts val="0"/>
+              </a:spcBef>
+              <a:spcAft>
+                <a:spcPts val="0"/>
+              </a:spcAft>
+              <a:buClr>
+                <a:srgbClr val="000000"/>
+              </a:buClr>
+              <a:buSzPts val="1400"/>
+              <a:buFont typeface="Arial"/>
               <a:buNone/>
             </a:pPr>
             <a:r>
               <a:t/>
             </a:r>
-            <a:endParaRPr/>
+            <a:endParaRPr b="0" i="0" sz="1400" u="none" cap="none" strike="noStrike">
+              <a:solidFill>
+                <a:srgbClr val="000000"/>
+              </a:solidFill>
+              <a:latin typeface="Arial"/>
+              <a:ea typeface="Arial"/>
+              <a:cs typeface="Arial"/>
+              <a:sym typeface="Arial"/>
+            </a:endParaRPr>
           </a:p>
         </p:txBody>
       </p:sp>
@@ -15250,6 +16558,9 @@
           <a:lstStyle/>
           <a:p>
             <a:pPr indent="0" lvl="0" marL="0" marR="0" rtl="0" algn="l">
+              <a:lnSpc>
+                <a:spcPct val="100000"/>
+              </a:lnSpc>
               <a:spcBef>
                 <a:spcPts val="0"/>
               </a:spcBef>
@@ -15326,19 +16637,35 @@
           </a:bodyPr>
           <a:lstStyle/>
           <a:p>
-            <a:pPr indent="0" lvl="0" marL="0" rtl="0" algn="l">
-              <a:spcBef>
-                <a:spcPts val="0"/>
-              </a:spcBef>
-              <a:spcAft>
-                <a:spcPts val="0"/>
-              </a:spcAft>
+            <a:pPr indent="0" lvl="0" marL="0" marR="0" rtl="0" algn="l">
+              <a:lnSpc>
+                <a:spcPct val="100000"/>
+              </a:lnSpc>
+              <a:spcBef>
+                <a:spcPts val="0"/>
+              </a:spcBef>
+              <a:spcAft>
+                <a:spcPts val="0"/>
+              </a:spcAft>
+              <a:buClr>
+                <a:srgbClr val="000000"/>
+              </a:buClr>
+              <a:buSzPts val="1400"/>
+              <a:buFont typeface="Arial"/>
               <a:buNone/>
             </a:pPr>
             <a:r>
               <a:t/>
             </a:r>
-            <a:endParaRPr/>
+            <a:endParaRPr b="0" i="0" sz="1400" u="none" cap="none" strike="noStrike">
+              <a:solidFill>
+                <a:srgbClr val="000000"/>
+              </a:solidFill>
+              <a:latin typeface="Arial"/>
+              <a:ea typeface="Arial"/>
+              <a:cs typeface="Arial"/>
+              <a:sym typeface="Arial"/>
+            </a:endParaRPr>
           </a:p>
         </p:txBody>
       </p:sp>
@@ -15368,6 +16695,9 @@
           <a:lstStyle/>
           <a:p>
             <a:pPr indent="0" lvl="0" marL="0" marR="0" rtl="0" algn="l">
+              <a:lnSpc>
+                <a:spcPct val="100000"/>
+              </a:lnSpc>
               <a:spcBef>
                 <a:spcPts val="0"/>
               </a:spcBef>
@@ -15444,19 +16774,35 @@
           </a:bodyPr>
           <a:lstStyle/>
           <a:p>
-            <a:pPr indent="0" lvl="0" marL="0" rtl="0" algn="l">
-              <a:spcBef>
-                <a:spcPts val="0"/>
-              </a:spcBef>
-              <a:spcAft>
-                <a:spcPts val="0"/>
-              </a:spcAft>
+            <a:pPr indent="0" lvl="0" marL="0" marR="0" rtl="0" algn="l">
+              <a:lnSpc>
+                <a:spcPct val="100000"/>
+              </a:lnSpc>
+              <a:spcBef>
+                <a:spcPts val="0"/>
+              </a:spcBef>
+              <a:spcAft>
+                <a:spcPts val="0"/>
+              </a:spcAft>
+              <a:buClr>
+                <a:srgbClr val="000000"/>
+              </a:buClr>
+              <a:buSzPts val="1400"/>
+              <a:buFont typeface="Arial"/>
               <a:buNone/>
             </a:pPr>
             <a:r>
               <a:t/>
             </a:r>
-            <a:endParaRPr/>
+            <a:endParaRPr b="0" i="0" sz="1400" u="none" cap="none" strike="noStrike">
+              <a:solidFill>
+                <a:srgbClr val="000000"/>
+              </a:solidFill>
+              <a:latin typeface="Arial"/>
+              <a:ea typeface="Arial"/>
+              <a:cs typeface="Arial"/>
+              <a:sym typeface="Arial"/>
+            </a:endParaRPr>
           </a:p>
         </p:txBody>
       </p:sp>
@@ -15486,6 +16832,9 @@
           <a:lstStyle/>
           <a:p>
             <a:pPr indent="0" lvl="0" marL="0" marR="0" rtl="0" algn="l">
+              <a:lnSpc>
+                <a:spcPct val="100000"/>
+              </a:lnSpc>
               <a:spcBef>
                 <a:spcPts val="0"/>
               </a:spcBef>
@@ -15624,19 +16973,35 @@
           </a:bodyPr>
           <a:lstStyle/>
           <a:p>
-            <a:pPr indent="0" lvl="0" marL="0" rtl="0" algn="l">
-              <a:spcBef>
-                <a:spcPts val="0"/>
-              </a:spcBef>
-              <a:spcAft>
-                <a:spcPts val="0"/>
-              </a:spcAft>
+            <a:pPr indent="0" lvl="0" marL="0" marR="0" rtl="0" algn="l">
+              <a:lnSpc>
+                <a:spcPct val="100000"/>
+              </a:lnSpc>
+              <a:spcBef>
+                <a:spcPts val="0"/>
+              </a:spcBef>
+              <a:spcAft>
+                <a:spcPts val="0"/>
+              </a:spcAft>
+              <a:buClr>
+                <a:srgbClr val="000000"/>
+              </a:buClr>
+              <a:buSzPts val="1400"/>
+              <a:buFont typeface="Arial"/>
               <a:buNone/>
             </a:pPr>
             <a:r>
               <a:t/>
             </a:r>
-            <a:endParaRPr/>
+            <a:endParaRPr b="0" i="0" sz="1400" u="none" cap="none" strike="noStrike">
+              <a:solidFill>
+                <a:srgbClr val="000000"/>
+              </a:solidFill>
+              <a:latin typeface="Arial"/>
+              <a:ea typeface="Arial"/>
+              <a:cs typeface="Arial"/>
+              <a:sym typeface="Arial"/>
+            </a:endParaRPr>
           </a:p>
         </p:txBody>
       </p:sp>
@@ -15732,6 +17097,9 @@
           <a:lstStyle/>
           <a:p>
             <a:pPr indent="0" lvl="0" marL="0" marR="0" rtl="0" algn="l">
+              <a:lnSpc>
+                <a:spcPct val="100000"/>
+              </a:lnSpc>
               <a:spcBef>
                 <a:spcPts val="0"/>
               </a:spcBef>
@@ -15777,8 +17145,8 @@
         </p:nvSpPr>
         <p:spPr>
           <a:xfrm>
-            <a:off x="9820275" y="6356747"/>
-            <a:ext cx="7240334" cy="781050"/>
+            <a:off x="9820275" y="6455780"/>
+            <a:ext cx="7240200" cy="781200"/>
           </a:xfrm>
           <a:prstGeom prst="rect">
             <a:avLst/>
@@ -15920,6 +17288,9 @@
           <a:lstStyle/>
           <a:p>
             <a:pPr indent="0" lvl="0" marL="0" marR="0" rtl="0" algn="l">
+              <a:lnSpc>
+                <a:spcPct val="100000"/>
+              </a:lnSpc>
               <a:spcBef>
                 <a:spcPts val="0"/>
               </a:spcBef>
@@ -16058,19 +17429,35 @@
           </a:bodyPr>
           <a:lstStyle/>
           <a:p>
-            <a:pPr indent="0" lvl="0" marL="0" rtl="0" algn="l">
-              <a:spcBef>
-                <a:spcPts val="0"/>
-              </a:spcBef>
-              <a:spcAft>
-                <a:spcPts val="0"/>
-              </a:spcAft>
+            <a:pPr indent="0" lvl="0" marL="0" marR="0" rtl="0" algn="l">
+              <a:lnSpc>
+                <a:spcPct val="100000"/>
+              </a:lnSpc>
+              <a:spcBef>
+                <a:spcPts val="0"/>
+              </a:spcBef>
+              <a:spcAft>
+                <a:spcPts val="0"/>
+              </a:spcAft>
+              <a:buClr>
+                <a:srgbClr val="000000"/>
+              </a:buClr>
+              <a:buSzPts val="1400"/>
+              <a:buFont typeface="Arial"/>
               <a:buNone/>
             </a:pPr>
             <a:r>
               <a:t/>
             </a:r>
-            <a:endParaRPr/>
+            <a:endParaRPr b="0" i="0" sz="1400" u="none" cap="none" strike="noStrike">
+              <a:solidFill>
+                <a:srgbClr val="000000"/>
+              </a:solidFill>
+              <a:latin typeface="Arial"/>
+              <a:ea typeface="Arial"/>
+              <a:cs typeface="Arial"/>
+              <a:sym typeface="Arial"/>
+            </a:endParaRPr>
           </a:p>
         </p:txBody>
       </p:sp>
@@ -16879,19 +18266,35 @@
           </a:bodyPr>
           <a:lstStyle/>
           <a:p>
-            <a:pPr indent="0" lvl="0" marL="0" rtl="0" algn="l">
-              <a:spcBef>
-                <a:spcPts val="0"/>
-              </a:spcBef>
-              <a:spcAft>
-                <a:spcPts val="0"/>
-              </a:spcAft>
+            <a:pPr indent="0" lvl="0" marL="0" marR="0" rtl="0" algn="l">
+              <a:lnSpc>
+                <a:spcPct val="100000"/>
+              </a:lnSpc>
+              <a:spcBef>
+                <a:spcPts val="0"/>
+              </a:spcBef>
+              <a:spcAft>
+                <a:spcPts val="0"/>
+              </a:spcAft>
+              <a:buClr>
+                <a:srgbClr val="000000"/>
+              </a:buClr>
+              <a:buSzPts val="1400"/>
+              <a:buFont typeface="Arial"/>
               <a:buNone/>
             </a:pPr>
             <a:r>
               <a:t/>
             </a:r>
-            <a:endParaRPr/>
+            <a:endParaRPr b="0" i="0" sz="1400" u="none" cap="none" strike="noStrike">
+              <a:solidFill>
+                <a:srgbClr val="000000"/>
+              </a:solidFill>
+              <a:latin typeface="Arial"/>
+              <a:ea typeface="Arial"/>
+              <a:cs typeface="Arial"/>
+              <a:sym typeface="Arial"/>
+            </a:endParaRPr>
           </a:p>
         </p:txBody>
       </p:sp>
@@ -16921,6 +18324,9 @@
           <a:lstStyle/>
           <a:p>
             <a:pPr indent="0" lvl="0" marL="0" marR="0" rtl="0" algn="l">
+              <a:lnSpc>
+                <a:spcPct val="100000"/>
+              </a:lnSpc>
               <a:spcBef>
                 <a:spcPts val="0"/>
               </a:spcBef>
@@ -17125,19 +18531,35 @@
           </a:bodyPr>
           <a:lstStyle/>
           <a:p>
-            <a:pPr indent="0" lvl="0" marL="0" rtl="0" algn="l">
-              <a:spcBef>
-                <a:spcPts val="0"/>
-              </a:spcBef>
-              <a:spcAft>
-                <a:spcPts val="0"/>
-              </a:spcAft>
+            <a:pPr indent="0" lvl="0" marL="0" marR="0" rtl="0" algn="l">
+              <a:lnSpc>
+                <a:spcPct val="100000"/>
+              </a:lnSpc>
+              <a:spcBef>
+                <a:spcPts val="0"/>
+              </a:spcBef>
+              <a:spcAft>
+                <a:spcPts val="0"/>
+              </a:spcAft>
+              <a:buClr>
+                <a:srgbClr val="000000"/>
+              </a:buClr>
+              <a:buSzPts val="1400"/>
+              <a:buFont typeface="Arial"/>
               <a:buNone/>
             </a:pPr>
             <a:r>
               <a:t/>
             </a:r>
-            <a:endParaRPr/>
+            <a:endParaRPr b="0" i="0" sz="1400" u="none" cap="none" strike="noStrike">
+              <a:solidFill>
+                <a:srgbClr val="000000"/>
+              </a:solidFill>
+              <a:latin typeface="Arial"/>
+              <a:ea typeface="Arial"/>
+              <a:cs typeface="Arial"/>
+              <a:sym typeface="Arial"/>
+            </a:endParaRPr>
           </a:p>
         </p:txBody>
       </p:sp>
@@ -17167,6 +18589,9 @@
           <a:lstStyle/>
           <a:p>
             <a:pPr indent="0" lvl="0" marL="0" marR="0" rtl="0" algn="l">
+              <a:lnSpc>
+                <a:spcPct val="100000"/>
+              </a:lnSpc>
               <a:spcBef>
                 <a:spcPts val="0"/>
               </a:spcBef>
@@ -17371,19 +18796,35 @@
           </a:bodyPr>
           <a:lstStyle/>
           <a:p>
-            <a:pPr indent="0" lvl="0" marL="0" rtl="0" algn="l">
-              <a:spcBef>
-                <a:spcPts val="0"/>
-              </a:spcBef>
-              <a:spcAft>
-                <a:spcPts val="0"/>
-              </a:spcAft>
+            <a:pPr indent="0" lvl="0" marL="0" marR="0" rtl="0" algn="l">
+              <a:lnSpc>
+                <a:spcPct val="100000"/>
+              </a:lnSpc>
+              <a:spcBef>
+                <a:spcPts val="0"/>
+              </a:spcBef>
+              <a:spcAft>
+                <a:spcPts val="0"/>
+              </a:spcAft>
+              <a:buClr>
+                <a:srgbClr val="000000"/>
+              </a:buClr>
+              <a:buSzPts val="1400"/>
+              <a:buFont typeface="Arial"/>
               <a:buNone/>
             </a:pPr>
             <a:r>
               <a:t/>
             </a:r>
-            <a:endParaRPr/>
+            <a:endParaRPr b="0" i="0" sz="1400" u="none" cap="none" strike="noStrike">
+              <a:solidFill>
+                <a:srgbClr val="000000"/>
+              </a:solidFill>
+              <a:latin typeface="Arial"/>
+              <a:ea typeface="Arial"/>
+              <a:cs typeface="Arial"/>
+              <a:sym typeface="Arial"/>
+            </a:endParaRPr>
           </a:p>
         </p:txBody>
       </p:sp>
@@ -17413,6 +18854,9 @@
           <a:lstStyle/>
           <a:p>
             <a:pPr indent="0" lvl="0" marL="0" marR="0" rtl="0" algn="l">
+              <a:lnSpc>
+                <a:spcPct val="100000"/>
+              </a:lnSpc>
               <a:spcBef>
                 <a:spcPts val="0"/>
               </a:spcBef>
@@ -17568,19 +19012,35 @@
           </a:bodyPr>
           <a:lstStyle/>
           <a:p>
-            <a:pPr indent="0" lvl="0" marL="0" rtl="0" algn="l">
-              <a:spcBef>
-                <a:spcPts val="0"/>
-              </a:spcBef>
-              <a:spcAft>
-                <a:spcPts val="0"/>
-              </a:spcAft>
+            <a:pPr indent="0" lvl="0" marL="0" marR="0" rtl="0" algn="l">
+              <a:lnSpc>
+                <a:spcPct val="100000"/>
+              </a:lnSpc>
+              <a:spcBef>
+                <a:spcPts val="0"/>
+              </a:spcBef>
+              <a:spcAft>
+                <a:spcPts val="0"/>
+              </a:spcAft>
+              <a:buClr>
+                <a:srgbClr val="000000"/>
+              </a:buClr>
+              <a:buSzPts val="1400"/>
+              <a:buFont typeface="Arial"/>
               <a:buNone/>
             </a:pPr>
             <a:r>
               <a:t/>
             </a:r>
-            <a:endParaRPr/>
+            <a:endParaRPr b="0" i="0" sz="1400" u="none" cap="none" strike="noStrike">
+              <a:solidFill>
+                <a:srgbClr val="000000"/>
+              </a:solidFill>
+              <a:latin typeface="Arial"/>
+              <a:ea typeface="Arial"/>
+              <a:cs typeface="Arial"/>
+              <a:sym typeface="Arial"/>
+            </a:endParaRPr>
           </a:p>
         </p:txBody>
       </p:sp>
@@ -17637,6 +19097,9 @@
           <a:lstStyle/>
           <a:p>
             <a:pPr indent="0" lvl="0" marL="0" marR="0" rtl="0" algn="l">
+              <a:lnSpc>
+                <a:spcPct val="100000"/>
+              </a:lnSpc>
               <a:spcBef>
                 <a:spcPts val="0"/>
               </a:spcBef>
@@ -17903,6 +19366,9 @@
           <a:lstStyle/>
           <a:p>
             <a:pPr indent="0" lvl="0" marL="0" marR="0" rtl="0" algn="l">
+              <a:lnSpc>
+                <a:spcPct val="100000"/>
+              </a:lnSpc>
               <a:spcBef>
                 <a:spcPts val="0"/>
               </a:spcBef>
@@ -17979,19 +19445,35 @@
           </a:bodyPr>
           <a:lstStyle/>
           <a:p>
-            <a:pPr indent="0" lvl="0" marL="0" rtl="0" algn="l">
-              <a:spcBef>
-                <a:spcPts val="0"/>
-              </a:spcBef>
-              <a:spcAft>
-                <a:spcPts val="0"/>
-              </a:spcAft>
+            <a:pPr indent="0" lvl="0" marL="0" marR="0" rtl="0" algn="l">
+              <a:lnSpc>
+                <a:spcPct val="100000"/>
+              </a:lnSpc>
+              <a:spcBef>
+                <a:spcPts val="0"/>
+              </a:spcBef>
+              <a:spcAft>
+                <a:spcPts val="0"/>
+              </a:spcAft>
+              <a:buClr>
+                <a:srgbClr val="000000"/>
+              </a:buClr>
+              <a:buSzPts val="1400"/>
+              <a:buFont typeface="Arial"/>
               <a:buNone/>
             </a:pPr>
             <a:r>
               <a:t/>
             </a:r>
-            <a:endParaRPr/>
+            <a:endParaRPr b="0" i="0" sz="1400" u="none" cap="none" strike="noStrike">
+              <a:solidFill>
+                <a:srgbClr val="000000"/>
+              </a:solidFill>
+              <a:latin typeface="Arial"/>
+              <a:ea typeface="Arial"/>
+              <a:cs typeface="Arial"/>
+              <a:sym typeface="Arial"/>
+            </a:endParaRPr>
           </a:p>
         </p:txBody>
       </p:sp>
@@ -18003,8 +19485,8 @@
         </p:nvSpPr>
         <p:spPr>
           <a:xfrm>
-            <a:off x="16152465" y="1019175"/>
-            <a:ext cx="1002060" cy="257175"/>
+            <a:off x="16094303" y="994417"/>
+            <a:ext cx="1146900" cy="300900"/>
           </a:xfrm>
           <a:prstGeom prst="rect">
             <a:avLst/>
@@ -18021,6 +19503,9 @@
           <a:lstStyle/>
           <a:p>
             <a:pPr indent="0" lvl="0" marL="0" marR="0" rtl="0" algn="l">
+              <a:lnSpc>
+                <a:spcPct val="100000"/>
+              </a:lnSpc>
               <a:spcBef>
                 <a:spcPts val="0"/>
               </a:spcBef>
@@ -18249,19 +19734,35 @@
           </a:bodyPr>
           <a:lstStyle/>
           <a:p>
-            <a:pPr indent="0" lvl="0" marL="0" rtl="0" algn="l">
-              <a:spcBef>
-                <a:spcPts val="0"/>
-              </a:spcBef>
-              <a:spcAft>
-                <a:spcPts val="0"/>
-              </a:spcAft>
+            <a:pPr indent="0" lvl="0" marL="0" marR="0" rtl="0" algn="l">
+              <a:lnSpc>
+                <a:spcPct val="100000"/>
+              </a:lnSpc>
+              <a:spcBef>
+                <a:spcPts val="0"/>
+              </a:spcBef>
+              <a:spcAft>
+                <a:spcPts val="0"/>
+              </a:spcAft>
+              <a:buClr>
+                <a:srgbClr val="000000"/>
+              </a:buClr>
+              <a:buSzPts val="1400"/>
+              <a:buFont typeface="Arial"/>
               <a:buNone/>
             </a:pPr>
             <a:r>
               <a:t/>
             </a:r>
-            <a:endParaRPr/>
+            <a:endParaRPr b="0" i="0" sz="1400" u="none" cap="none" strike="noStrike">
+              <a:solidFill>
+                <a:srgbClr val="000000"/>
+              </a:solidFill>
+              <a:latin typeface="Arial"/>
+              <a:ea typeface="Arial"/>
+              <a:cs typeface="Arial"/>
+              <a:sym typeface="Arial"/>
+            </a:endParaRPr>
           </a:p>
         </p:txBody>
       </p:sp>
@@ -18903,19 +20404,35 @@
           </a:bodyPr>
           <a:lstStyle/>
           <a:p>
-            <a:pPr indent="0" lvl="0" marL="0" rtl="0" algn="l">
-              <a:spcBef>
-                <a:spcPts val="0"/>
-              </a:spcBef>
-              <a:spcAft>
-                <a:spcPts val="0"/>
-              </a:spcAft>
+            <a:pPr indent="0" lvl="0" marL="0" marR="0" rtl="0" algn="l">
+              <a:lnSpc>
+                <a:spcPct val="100000"/>
+              </a:lnSpc>
+              <a:spcBef>
+                <a:spcPts val="0"/>
+              </a:spcBef>
+              <a:spcAft>
+                <a:spcPts val="0"/>
+              </a:spcAft>
+              <a:buClr>
+                <a:srgbClr val="000000"/>
+              </a:buClr>
+              <a:buSzPts val="1400"/>
+              <a:buFont typeface="Arial"/>
               <a:buNone/>
             </a:pPr>
             <a:r>
               <a:t/>
             </a:r>
-            <a:endParaRPr/>
+            <a:endParaRPr b="0" i="0" sz="1400" u="none" cap="none" strike="noStrike">
+              <a:solidFill>
+                <a:srgbClr val="000000"/>
+              </a:solidFill>
+              <a:latin typeface="Arial"/>
+              <a:ea typeface="Arial"/>
+              <a:cs typeface="Arial"/>
+              <a:sym typeface="Arial"/>
+            </a:endParaRPr>
           </a:p>
         </p:txBody>
       </p:sp>
@@ -18958,19 +20475,35 @@
           </a:bodyPr>
           <a:lstStyle/>
           <a:p>
-            <a:pPr indent="0" lvl="0" marL="0" rtl="0" algn="l">
-              <a:spcBef>
-                <a:spcPts val="0"/>
-              </a:spcBef>
-              <a:spcAft>
-                <a:spcPts val="0"/>
-              </a:spcAft>
+            <a:pPr indent="0" lvl="0" marL="0" marR="0" rtl="0" algn="l">
+              <a:lnSpc>
+                <a:spcPct val="100000"/>
+              </a:lnSpc>
+              <a:spcBef>
+                <a:spcPts val="0"/>
+              </a:spcBef>
+              <a:spcAft>
+                <a:spcPts val="0"/>
+              </a:spcAft>
+              <a:buClr>
+                <a:srgbClr val="000000"/>
+              </a:buClr>
+              <a:buSzPts val="1400"/>
+              <a:buFont typeface="Arial"/>
               <a:buNone/>
             </a:pPr>
             <a:r>
               <a:t/>
             </a:r>
-            <a:endParaRPr/>
+            <a:endParaRPr b="0" i="0" sz="1400" u="none" cap="none" strike="noStrike">
+              <a:solidFill>
+                <a:srgbClr val="000000"/>
+              </a:solidFill>
+              <a:latin typeface="Arial"/>
+              <a:ea typeface="Arial"/>
+              <a:cs typeface="Arial"/>
+              <a:sym typeface="Arial"/>
+            </a:endParaRPr>
           </a:p>
         </p:txBody>
       </p:sp>
@@ -19000,6 +20533,9 @@
           <a:lstStyle/>
           <a:p>
             <a:pPr indent="0" lvl="0" marL="0" marR="0" rtl="0" algn="l">
+              <a:lnSpc>
+                <a:spcPct val="100000"/>
+              </a:lnSpc>
               <a:spcBef>
                 <a:spcPts val="0"/>
               </a:spcBef>
@@ -19076,19 +20612,35 @@
           </a:bodyPr>
           <a:lstStyle/>
           <a:p>
-            <a:pPr indent="0" lvl="0" marL="0" rtl="0" algn="l">
-              <a:spcBef>
-                <a:spcPts val="0"/>
-              </a:spcBef>
-              <a:spcAft>
-                <a:spcPts val="0"/>
-              </a:spcAft>
+            <a:pPr indent="0" lvl="0" marL="0" marR="0" rtl="0" algn="l">
+              <a:lnSpc>
+                <a:spcPct val="100000"/>
+              </a:lnSpc>
+              <a:spcBef>
+                <a:spcPts val="0"/>
+              </a:spcBef>
+              <a:spcAft>
+                <a:spcPts val="0"/>
+              </a:spcAft>
+              <a:buClr>
+                <a:srgbClr val="000000"/>
+              </a:buClr>
+              <a:buSzPts val="1400"/>
+              <a:buFont typeface="Arial"/>
               <a:buNone/>
             </a:pPr>
             <a:r>
               <a:t/>
             </a:r>
-            <a:endParaRPr/>
+            <a:endParaRPr b="0" i="0" sz="1400" u="none" cap="none" strike="noStrike">
+              <a:solidFill>
+                <a:srgbClr val="000000"/>
+              </a:solidFill>
+              <a:latin typeface="Arial"/>
+              <a:ea typeface="Arial"/>
+              <a:cs typeface="Arial"/>
+              <a:sym typeface="Arial"/>
+            </a:endParaRPr>
           </a:p>
         </p:txBody>
       </p:sp>
@@ -19118,6 +20670,9 @@
           <a:lstStyle/>
           <a:p>
             <a:pPr indent="0" lvl="0" marL="0" marR="0" rtl="0" algn="l">
+              <a:lnSpc>
+                <a:spcPct val="100000"/>
+              </a:lnSpc>
               <a:spcBef>
                 <a:spcPts val="0"/>
               </a:spcBef>
@@ -19256,19 +20811,35 @@
           </a:bodyPr>
           <a:lstStyle/>
           <a:p>
-            <a:pPr indent="0" lvl="0" marL="0" rtl="0" algn="l">
-              <a:spcBef>
-                <a:spcPts val="0"/>
-              </a:spcBef>
-              <a:spcAft>
-                <a:spcPts val="0"/>
-              </a:spcAft>
+            <a:pPr indent="0" lvl="0" marL="0" marR="0" rtl="0" algn="l">
+              <a:lnSpc>
+                <a:spcPct val="100000"/>
+              </a:lnSpc>
+              <a:spcBef>
+                <a:spcPts val="0"/>
+              </a:spcBef>
+              <a:spcAft>
+                <a:spcPts val="0"/>
+              </a:spcAft>
+              <a:buClr>
+                <a:srgbClr val="000000"/>
+              </a:buClr>
+              <a:buSzPts val="1400"/>
+              <a:buFont typeface="Arial"/>
               <a:buNone/>
             </a:pPr>
             <a:r>
               <a:t/>
             </a:r>
-            <a:endParaRPr/>
+            <a:endParaRPr b="0" i="0" sz="1400" u="none" cap="none" strike="noStrike">
+              <a:solidFill>
+                <a:srgbClr val="000000"/>
+              </a:solidFill>
+              <a:latin typeface="Arial"/>
+              <a:ea typeface="Arial"/>
+              <a:cs typeface="Arial"/>
+              <a:sym typeface="Arial"/>
+            </a:endParaRPr>
           </a:p>
         </p:txBody>
       </p:sp>
@@ -19311,19 +20882,35 @@
           </a:bodyPr>
           <a:lstStyle/>
           <a:p>
-            <a:pPr indent="0" lvl="0" marL="0" rtl="0" algn="l">
-              <a:spcBef>
-                <a:spcPts val="0"/>
-              </a:spcBef>
-              <a:spcAft>
-                <a:spcPts val="0"/>
-              </a:spcAft>
+            <a:pPr indent="0" lvl="0" marL="0" marR="0" rtl="0" algn="l">
+              <a:lnSpc>
+                <a:spcPct val="100000"/>
+              </a:lnSpc>
+              <a:spcBef>
+                <a:spcPts val="0"/>
+              </a:spcBef>
+              <a:spcAft>
+                <a:spcPts val="0"/>
+              </a:spcAft>
+              <a:buClr>
+                <a:srgbClr val="000000"/>
+              </a:buClr>
+              <a:buSzPts val="1400"/>
+              <a:buFont typeface="Arial"/>
               <a:buNone/>
             </a:pPr>
             <a:r>
               <a:t/>
             </a:r>
-            <a:endParaRPr/>
+            <a:endParaRPr b="0" i="0" sz="1400" u="none" cap="none" strike="noStrike">
+              <a:solidFill>
+                <a:srgbClr val="000000"/>
+              </a:solidFill>
+              <a:latin typeface="Arial"/>
+              <a:ea typeface="Arial"/>
+              <a:cs typeface="Arial"/>
+              <a:sym typeface="Arial"/>
+            </a:endParaRPr>
           </a:p>
         </p:txBody>
       </p:sp>
@@ -19353,6 +20940,9 @@
           <a:lstStyle/>
           <a:p>
             <a:pPr indent="0" lvl="0" marL="0" marR="0" rtl="0" algn="l">
+              <a:lnSpc>
+                <a:spcPct val="100000"/>
+              </a:lnSpc>
               <a:spcBef>
                 <a:spcPts val="0"/>
               </a:spcBef>
@@ -19429,19 +21019,35 @@
           </a:bodyPr>
           <a:lstStyle/>
           <a:p>
-            <a:pPr indent="0" lvl="0" marL="0" rtl="0" algn="l">
-              <a:spcBef>
-                <a:spcPts val="0"/>
-              </a:spcBef>
-              <a:spcAft>
-                <a:spcPts val="0"/>
-              </a:spcAft>
+            <a:pPr indent="0" lvl="0" marL="0" marR="0" rtl="0" algn="l">
+              <a:lnSpc>
+                <a:spcPct val="100000"/>
+              </a:lnSpc>
+              <a:spcBef>
+                <a:spcPts val="0"/>
+              </a:spcBef>
+              <a:spcAft>
+                <a:spcPts val="0"/>
+              </a:spcAft>
+              <a:buClr>
+                <a:srgbClr val="000000"/>
+              </a:buClr>
+              <a:buSzPts val="1400"/>
+              <a:buFont typeface="Arial"/>
               <a:buNone/>
             </a:pPr>
             <a:r>
               <a:t/>
             </a:r>
-            <a:endParaRPr/>
+            <a:endParaRPr b="0" i="0" sz="1400" u="none" cap="none" strike="noStrike">
+              <a:solidFill>
+                <a:srgbClr val="000000"/>
+              </a:solidFill>
+              <a:latin typeface="Arial"/>
+              <a:ea typeface="Arial"/>
+              <a:cs typeface="Arial"/>
+              <a:sym typeface="Arial"/>
+            </a:endParaRPr>
           </a:p>
         </p:txBody>
       </p:sp>
@@ -19471,6 +21077,9 @@
           <a:lstStyle/>
           <a:p>
             <a:pPr indent="0" lvl="0" marL="0" marR="0" rtl="0" algn="l">
+              <a:lnSpc>
+                <a:spcPct val="100000"/>
+              </a:lnSpc>
               <a:spcBef>
                 <a:spcPts val="0"/>
               </a:spcBef>
@@ -19547,19 +21156,35 @@
           </a:bodyPr>
           <a:lstStyle/>
           <a:p>
-            <a:pPr indent="0" lvl="0" marL="0" rtl="0" algn="l">
-              <a:spcBef>
-                <a:spcPts val="0"/>
-              </a:spcBef>
-              <a:spcAft>
-                <a:spcPts val="0"/>
-              </a:spcAft>
+            <a:pPr indent="0" lvl="0" marL="0" marR="0" rtl="0" algn="l">
+              <a:lnSpc>
+                <a:spcPct val="100000"/>
+              </a:lnSpc>
+              <a:spcBef>
+                <a:spcPts val="0"/>
+              </a:spcBef>
+              <a:spcAft>
+                <a:spcPts val="0"/>
+              </a:spcAft>
+              <a:buClr>
+                <a:srgbClr val="000000"/>
+              </a:buClr>
+              <a:buSzPts val="1400"/>
+              <a:buFont typeface="Arial"/>
               <a:buNone/>
             </a:pPr>
             <a:r>
               <a:t/>
             </a:r>
-            <a:endParaRPr/>
+            <a:endParaRPr b="0" i="0" sz="1400" u="none" cap="none" strike="noStrike">
+              <a:solidFill>
+                <a:srgbClr val="000000"/>
+              </a:solidFill>
+              <a:latin typeface="Arial"/>
+              <a:ea typeface="Arial"/>
+              <a:cs typeface="Arial"/>
+              <a:sym typeface="Arial"/>
+            </a:endParaRPr>
           </a:p>
         </p:txBody>
       </p:sp>
@@ -19589,6 +21214,9 @@
           <a:lstStyle/>
           <a:p>
             <a:pPr indent="0" lvl="0" marL="0" marR="0" rtl="0" algn="l">
+              <a:lnSpc>
+                <a:spcPct val="100000"/>
+              </a:lnSpc>
               <a:spcBef>
                 <a:spcPts val="0"/>
               </a:spcBef>
@@ -19739,19 +21367,35 @@
           </a:bodyPr>
           <a:lstStyle/>
           <a:p>
-            <a:pPr indent="0" lvl="0" marL="0" rtl="0" algn="l">
-              <a:spcBef>
-                <a:spcPts val="0"/>
-              </a:spcBef>
-              <a:spcAft>
-                <a:spcPts val="0"/>
-              </a:spcAft>
+            <a:pPr indent="0" lvl="0" marL="0" marR="0" rtl="0" algn="l">
+              <a:lnSpc>
+                <a:spcPct val="100000"/>
+              </a:lnSpc>
+              <a:spcBef>
+                <a:spcPts val="0"/>
+              </a:spcBef>
+              <a:spcAft>
+                <a:spcPts val="0"/>
+              </a:spcAft>
+              <a:buClr>
+                <a:srgbClr val="000000"/>
+              </a:buClr>
+              <a:buSzPts val="1400"/>
+              <a:buFont typeface="Arial"/>
               <a:buNone/>
             </a:pPr>
             <a:r>
               <a:t/>
             </a:r>
-            <a:endParaRPr/>
+            <a:endParaRPr b="0" i="0" sz="1400" u="none" cap="none" strike="noStrike">
+              <a:solidFill>
+                <a:srgbClr val="000000"/>
+              </a:solidFill>
+              <a:latin typeface="Arial"/>
+              <a:ea typeface="Arial"/>
+              <a:cs typeface="Arial"/>
+              <a:sym typeface="Arial"/>
+            </a:endParaRPr>
           </a:p>
         </p:txBody>
       </p:sp>
@@ -19972,6 +21616,9 @@
           <a:lstStyle/>
           <a:p>
             <a:pPr indent="0" lvl="0" marL="0" marR="0" rtl="0" algn="l">
+              <a:lnSpc>
+                <a:spcPct val="100000"/>
+              </a:lnSpc>
               <a:spcBef>
                 <a:spcPts val="0"/>
               </a:spcBef>
@@ -20048,19 +21695,35 @@
           </a:bodyPr>
           <a:lstStyle/>
           <a:p>
-            <a:pPr indent="0" lvl="0" marL="0" rtl="0" algn="l">
-              <a:spcBef>
-                <a:spcPts val="0"/>
-              </a:spcBef>
-              <a:spcAft>
-                <a:spcPts val="0"/>
-              </a:spcAft>
+            <a:pPr indent="0" lvl="0" marL="0" marR="0" rtl="0" algn="l">
+              <a:lnSpc>
+                <a:spcPct val="100000"/>
+              </a:lnSpc>
+              <a:spcBef>
+                <a:spcPts val="0"/>
+              </a:spcBef>
+              <a:spcAft>
+                <a:spcPts val="0"/>
+              </a:spcAft>
+              <a:buClr>
+                <a:srgbClr val="000000"/>
+              </a:buClr>
+              <a:buSzPts val="1400"/>
+              <a:buFont typeface="Arial"/>
               <a:buNone/>
             </a:pPr>
             <a:r>
               <a:t/>
             </a:r>
-            <a:endParaRPr/>
+            <a:endParaRPr b="0" i="0" sz="1400" u="none" cap="none" strike="noStrike">
+              <a:solidFill>
+                <a:srgbClr val="000000"/>
+              </a:solidFill>
+              <a:latin typeface="Arial"/>
+              <a:ea typeface="Arial"/>
+              <a:cs typeface="Arial"/>
+              <a:sym typeface="Arial"/>
+            </a:endParaRPr>
           </a:p>
         </p:txBody>
       </p:sp>
@@ -20072,8 +21735,8 @@
         </p:nvSpPr>
         <p:spPr>
           <a:xfrm>
-            <a:off x="16152465" y="1019175"/>
-            <a:ext cx="1002060" cy="257175"/>
+            <a:off x="16074383" y="994417"/>
+            <a:ext cx="1104900" cy="257100"/>
           </a:xfrm>
           <a:prstGeom prst="rect">
             <a:avLst/>
@@ -20090,6 +21753,9 @@
           <a:lstStyle/>
           <a:p>
             <a:pPr indent="0" lvl="0" marL="0" marR="0" rtl="0" algn="l">
+              <a:lnSpc>
+                <a:spcPct val="100000"/>
+              </a:lnSpc>
               <a:spcBef>
                 <a:spcPts val="0"/>
               </a:spcBef>
@@ -20376,19 +22042,35 @@
           </a:bodyPr>
           <a:lstStyle/>
           <a:p>
-            <a:pPr indent="0" lvl="0" marL="0" rtl="0" algn="l">
-              <a:spcBef>
-                <a:spcPts val="0"/>
-              </a:spcBef>
-              <a:spcAft>
-                <a:spcPts val="0"/>
-              </a:spcAft>
+            <a:pPr indent="0" lvl="0" marL="0" marR="0" rtl="0" algn="l">
+              <a:lnSpc>
+                <a:spcPct val="100000"/>
+              </a:lnSpc>
+              <a:spcBef>
+                <a:spcPts val="0"/>
+              </a:spcBef>
+              <a:spcAft>
+                <a:spcPts val="0"/>
+              </a:spcAft>
+              <a:buClr>
+                <a:srgbClr val="000000"/>
+              </a:buClr>
+              <a:buSzPts val="1400"/>
+              <a:buFont typeface="Arial"/>
               <a:buNone/>
             </a:pPr>
             <a:r>
               <a:t/>
             </a:r>
-            <a:endParaRPr/>
+            <a:endParaRPr b="0" i="0" sz="1400" u="none" cap="none" strike="noStrike">
+              <a:solidFill>
+                <a:srgbClr val="000000"/>
+              </a:solidFill>
+              <a:latin typeface="Arial"/>
+              <a:ea typeface="Arial"/>
+              <a:cs typeface="Arial"/>
+              <a:sym typeface="Arial"/>
+            </a:endParaRPr>
           </a:p>
         </p:txBody>
       </p:sp>
@@ -20418,6 +22100,9 @@
           <a:lstStyle/>
           <a:p>
             <a:pPr indent="0" lvl="0" marL="0" marR="0" rtl="0" algn="l">
+              <a:lnSpc>
+                <a:spcPct val="100000"/>
+              </a:lnSpc>
               <a:spcBef>
                 <a:spcPts val="0"/>
               </a:spcBef>
@@ -20494,19 +22179,35 @@
           </a:bodyPr>
           <a:lstStyle/>
           <a:p>
-            <a:pPr indent="0" lvl="0" marL="0" rtl="0" algn="l">
-              <a:spcBef>
-                <a:spcPts val="0"/>
-              </a:spcBef>
-              <a:spcAft>
-                <a:spcPts val="0"/>
-              </a:spcAft>
+            <a:pPr indent="0" lvl="0" marL="0" marR="0" rtl="0" algn="l">
+              <a:lnSpc>
+                <a:spcPct val="100000"/>
+              </a:lnSpc>
+              <a:spcBef>
+                <a:spcPts val="0"/>
+              </a:spcBef>
+              <a:spcAft>
+                <a:spcPts val="0"/>
+              </a:spcAft>
+              <a:buClr>
+                <a:srgbClr val="000000"/>
+              </a:buClr>
+              <a:buSzPts val="1400"/>
+              <a:buFont typeface="Arial"/>
               <a:buNone/>
             </a:pPr>
             <a:r>
               <a:t/>
             </a:r>
-            <a:endParaRPr/>
+            <a:endParaRPr b="0" i="0" sz="1400" u="none" cap="none" strike="noStrike">
+              <a:solidFill>
+                <a:srgbClr val="000000"/>
+              </a:solidFill>
+              <a:latin typeface="Arial"/>
+              <a:ea typeface="Arial"/>
+              <a:cs typeface="Arial"/>
+              <a:sym typeface="Arial"/>
+            </a:endParaRPr>
           </a:p>
         </p:txBody>
       </p:sp>
@@ -20536,6 +22237,9 @@
           <a:lstStyle/>
           <a:p>
             <a:pPr indent="0" lvl="0" marL="0" marR="0" rtl="0" algn="l">
+              <a:lnSpc>
+                <a:spcPct val="100000"/>
+              </a:lnSpc>
               <a:spcBef>
                 <a:spcPts val="0"/>
               </a:spcBef>
@@ -20612,19 +22316,35 @@
           </a:bodyPr>
           <a:lstStyle/>
           <a:p>
-            <a:pPr indent="0" lvl="0" marL="0" rtl="0" algn="l">
-              <a:spcBef>
-                <a:spcPts val="0"/>
-              </a:spcBef>
-              <a:spcAft>
-                <a:spcPts val="0"/>
-              </a:spcAft>
+            <a:pPr indent="0" lvl="0" marL="0" marR="0" rtl="0" algn="l">
+              <a:lnSpc>
+                <a:spcPct val="100000"/>
+              </a:lnSpc>
+              <a:spcBef>
+                <a:spcPts val="0"/>
+              </a:spcBef>
+              <a:spcAft>
+                <a:spcPts val="0"/>
+              </a:spcAft>
+              <a:buClr>
+                <a:srgbClr val="000000"/>
+              </a:buClr>
+              <a:buSzPts val="1400"/>
+              <a:buFont typeface="Arial"/>
               <a:buNone/>
             </a:pPr>
             <a:r>
               <a:t/>
             </a:r>
-            <a:endParaRPr/>
+            <a:endParaRPr b="0" i="0" sz="1400" u="none" cap="none" strike="noStrike">
+              <a:solidFill>
+                <a:srgbClr val="000000"/>
+              </a:solidFill>
+              <a:latin typeface="Arial"/>
+              <a:ea typeface="Arial"/>
+              <a:cs typeface="Arial"/>
+              <a:sym typeface="Arial"/>
+            </a:endParaRPr>
           </a:p>
         </p:txBody>
       </p:sp>
@@ -20636,8 +22356,8 @@
         </p:nvSpPr>
         <p:spPr>
           <a:xfrm>
-            <a:off x="4219575" y="7512993"/>
-            <a:ext cx="1413570" cy="257175"/>
+            <a:off x="4157680" y="7513000"/>
+            <a:ext cx="1868100" cy="257100"/>
           </a:xfrm>
           <a:prstGeom prst="rect">
             <a:avLst/>
@@ -20654,6 +22374,9 @@
           <a:lstStyle/>
           <a:p>
             <a:pPr indent="0" lvl="0" marL="0" marR="0" rtl="0" algn="l">
+              <a:lnSpc>
+                <a:spcPct val="100000"/>
+              </a:lnSpc>
               <a:spcBef>
                 <a:spcPts val="0"/>
               </a:spcBef>
@@ -20726,19 +22449,35 @@
           </a:bodyPr>
           <a:lstStyle/>
           <a:p>
-            <a:pPr indent="0" lvl="0" marL="0" rtl="0" algn="l">
-              <a:spcBef>
-                <a:spcPts val="0"/>
-              </a:spcBef>
-              <a:spcAft>
-                <a:spcPts val="0"/>
-              </a:spcAft>
+            <a:pPr indent="0" lvl="0" marL="0" marR="0" rtl="0" algn="l">
+              <a:lnSpc>
+                <a:spcPct val="100000"/>
+              </a:lnSpc>
+              <a:spcBef>
+                <a:spcPts val="0"/>
+              </a:spcBef>
+              <a:spcAft>
+                <a:spcPts val="0"/>
+              </a:spcAft>
+              <a:buClr>
+                <a:srgbClr val="000000"/>
+              </a:buClr>
+              <a:buSzPts val="1400"/>
+              <a:buFont typeface="Arial"/>
               <a:buNone/>
             </a:pPr>
             <a:r>
               <a:t/>
             </a:r>
-            <a:endParaRPr/>
+            <a:endParaRPr b="0" i="0" sz="1400" u="none" cap="none" strike="noStrike">
+              <a:solidFill>
+                <a:srgbClr val="000000"/>
+              </a:solidFill>
+              <a:latin typeface="Arial"/>
+              <a:ea typeface="Arial"/>
+              <a:cs typeface="Arial"/>
+              <a:sym typeface="Arial"/>
+            </a:endParaRPr>
           </a:p>
         </p:txBody>
       </p:sp>
@@ -21163,7 +22902,7 @@
             <a:r>
               <a:t/>
             </a:r>
-            <a:endParaRPr sz="1350">
+            <a:endParaRPr b="0" i="0" sz="1350" u="none" cap="none" strike="noStrike">
               <a:solidFill>
                 <a:srgbClr val="8B9DB5"/>
               </a:solidFill>
@@ -21349,7 +23088,7 @@
             <a:r>
               <a:t/>
             </a:r>
-            <a:endParaRPr sz="1350">
+            <a:endParaRPr b="0" i="0" sz="1350" u="none" cap="none" strike="noStrike">
               <a:solidFill>
                 <a:srgbClr val="8B9DB5"/>
               </a:solidFill>
@@ -21598,6 +23337,9 @@
           <a:lstStyle/>
           <a:p>
             <a:pPr indent="0" lvl="0" marL="0" marR="0" rtl="0" algn="l">
+              <a:lnSpc>
+                <a:spcPct val="100000"/>
+              </a:lnSpc>
               <a:spcBef>
                 <a:spcPts val="0"/>
               </a:spcBef>
@@ -21674,19 +23416,35 @@
           </a:bodyPr>
           <a:lstStyle/>
           <a:p>
-            <a:pPr indent="0" lvl="0" marL="0" rtl="0" algn="l">
-              <a:spcBef>
-                <a:spcPts val="0"/>
-              </a:spcBef>
-              <a:spcAft>
-                <a:spcPts val="0"/>
-              </a:spcAft>
+            <a:pPr indent="0" lvl="0" marL="0" marR="0" rtl="0" algn="l">
+              <a:lnSpc>
+                <a:spcPct val="100000"/>
+              </a:lnSpc>
+              <a:spcBef>
+                <a:spcPts val="0"/>
+              </a:spcBef>
+              <a:spcAft>
+                <a:spcPts val="0"/>
+              </a:spcAft>
+              <a:buClr>
+                <a:srgbClr val="000000"/>
+              </a:buClr>
+              <a:buSzPts val="1400"/>
+              <a:buFont typeface="Arial"/>
               <a:buNone/>
             </a:pPr>
             <a:r>
               <a:t/>
             </a:r>
-            <a:endParaRPr/>
+            <a:endParaRPr b="0" i="0" sz="1400" u="none" cap="none" strike="noStrike">
+              <a:solidFill>
+                <a:srgbClr val="000000"/>
+              </a:solidFill>
+              <a:latin typeface="Arial"/>
+              <a:ea typeface="Arial"/>
+              <a:cs typeface="Arial"/>
+              <a:sym typeface="Arial"/>
+            </a:endParaRPr>
           </a:p>
         </p:txBody>
       </p:sp>
@@ -21698,8 +23456,8 @@
         </p:nvSpPr>
         <p:spPr>
           <a:xfrm>
-            <a:off x="16152465" y="1019175"/>
-            <a:ext cx="1002060" cy="257175"/>
+            <a:off x="16077487" y="994417"/>
+            <a:ext cx="1114200" cy="257100"/>
           </a:xfrm>
           <a:prstGeom prst="rect">
             <a:avLst/>
@@ -21716,6 +23474,9 @@
           <a:lstStyle/>
           <a:p>
             <a:pPr indent="0" lvl="0" marL="0" marR="0" rtl="0" algn="l">
+              <a:lnSpc>
+                <a:spcPct val="100000"/>
+              </a:lnSpc>
               <a:spcBef>
                 <a:spcPts val="0"/>
               </a:spcBef>
@@ -21920,19 +23681,35 @@
           </a:bodyPr>
           <a:lstStyle/>
           <a:p>
-            <a:pPr indent="0" lvl="0" marL="0" rtl="0" algn="l">
-              <a:spcBef>
-                <a:spcPts val="0"/>
-              </a:spcBef>
-              <a:spcAft>
-                <a:spcPts val="0"/>
-              </a:spcAft>
+            <a:pPr indent="0" lvl="0" marL="0" marR="0" rtl="0" algn="l">
+              <a:lnSpc>
+                <a:spcPct val="100000"/>
+              </a:lnSpc>
+              <a:spcBef>
+                <a:spcPts val="0"/>
+              </a:spcBef>
+              <a:spcAft>
+                <a:spcPts val="0"/>
+              </a:spcAft>
+              <a:buClr>
+                <a:srgbClr val="000000"/>
+              </a:buClr>
+              <a:buSzPts val="1400"/>
+              <a:buFont typeface="Arial"/>
               <a:buNone/>
             </a:pPr>
             <a:r>
               <a:t/>
             </a:r>
-            <a:endParaRPr/>
+            <a:endParaRPr b="0" i="0" sz="1400" u="none" cap="none" strike="noStrike">
+              <a:solidFill>
+                <a:srgbClr val="000000"/>
+              </a:solidFill>
+              <a:latin typeface="Arial"/>
+              <a:ea typeface="Arial"/>
+              <a:cs typeface="Arial"/>
+              <a:sym typeface="Arial"/>
+            </a:endParaRPr>
           </a:p>
         </p:txBody>
       </p:sp>
@@ -21988,8 +23765,36 @@
                 <a:cs typeface="JetBrains Mono"/>
                 <a:sym typeface="JetBrains Mono"/>
               </a:rPr>
-              <a:t>npm start -</a:t>
-            </a:r>
+              <a:t>npm start -- </a:t>
+            </a:r>
+            <a:endParaRPr b="0" i="0" sz="1500" u="none" cap="none" strike="noStrike">
+              <a:solidFill>
+                <a:srgbClr val="8B9DB5"/>
+              </a:solidFill>
+              <a:latin typeface="JetBrains Mono"/>
+              <a:ea typeface="JetBrains Mono"/>
+              <a:cs typeface="JetBrains Mono"/>
+              <a:sym typeface="JetBrains Mono"/>
+            </a:endParaRPr>
+          </a:p>
+          <a:p>
+            <a:pPr indent="0" lvl="0" marL="0" marR="0" rtl="0" algn="l">
+              <a:lnSpc>
+                <a:spcPct val="170000"/>
+              </a:lnSpc>
+              <a:spcBef>
+                <a:spcPts val="0"/>
+              </a:spcBef>
+              <a:spcAft>
+                <a:spcPts val="0"/>
+              </a:spcAft>
+              <a:buClr>
+                <a:srgbClr val="8B9DB5"/>
+              </a:buClr>
+              <a:buSzPts val="1500"/>
+              <a:buFont typeface="JetBrains Mono"/>
+              <a:buNone/>
+            </a:pPr>
             <a:r>
               <a:rPr b="0" i="0" lang="en-US" sz="1500" u="none" cap="none" strike="noStrike">
                 <a:solidFill>
@@ -22000,11 +23805,23 @@
                 <a:cs typeface="JetBrains Mono"/>
                 <a:sym typeface="JetBrains Mono"/>
               </a:rPr>
-              <a:t>- </a:t>
+              <a:t>--pine </a:t>
+            </a:r>
+            <a:r>
+              <a:rPr b="0" i="0" lang="en-US" sz="1500" u="none" cap="none" strike="noStrike">
+                <a:solidFill>
+                  <a:srgbClr val="EAB308"/>
+                </a:solidFill>
+                <a:latin typeface="JetBrains Mono"/>
+                <a:ea typeface="JetBrains Mono"/>
+                <a:cs typeface="JetBrains Mono"/>
+                <a:sym typeface="JetBrains Mono"/>
+              </a:rPr>
+              <a:t>./math/feb_2026.pine </a:t>
             </a:r>
             <a:endParaRPr b="0" i="0" sz="1500" u="none" cap="none" strike="noStrike">
               <a:solidFill>
-                <a:srgbClr val="8B9DB5"/>
+                <a:srgbClr val="EAB308"/>
               </a:solidFill>
               <a:latin typeface="JetBrains Mono"/>
               <a:ea typeface="JetBrains Mono"/>
@@ -22040,7 +23857,7 @@
                 <a:cs typeface="JetBrains Mono"/>
                 <a:sym typeface="JetBrains Mono"/>
               </a:rPr>
-              <a:t>--pine </a:t>
+              <a:t>--timeframe </a:t>
             </a:r>
             <a:r>
               <a:rPr b="0" i="0" lang="en-US" sz="1500" u="none" cap="none" strike="noStrike">
@@ -22052,11 +23869,23 @@
                 <a:cs typeface="JetBrains Mono"/>
                 <a:sym typeface="JetBrains Mono"/>
               </a:rPr>
-              <a:t>./math/feb_2026.pine </a:t>
+              <a:t>15m</a:t>
+            </a:r>
+            <a:r>
+              <a:rPr b="0" i="0" lang="en-US" sz="1500" u="none" cap="none" strike="noStrike">
+                <a:solidFill>
+                  <a:srgbClr val="8B9DB5"/>
+                </a:solidFill>
+                <a:latin typeface="JetBrains Mono"/>
+                <a:ea typeface="JetBrains Mono"/>
+                <a:cs typeface="JetBrains Mono"/>
+                <a:sym typeface="JetBrains Mono"/>
+              </a:rPr>
+              <a:t> </a:t>
             </a:r>
             <a:endParaRPr b="0" i="0" sz="1500" u="none" cap="none" strike="noStrike">
               <a:solidFill>
-                <a:srgbClr val="EAB308"/>
+                <a:srgbClr val="8B9DB5"/>
               </a:solidFill>
               <a:latin typeface="JetBrains Mono"/>
               <a:ea typeface="JetBrains Mono"/>
@@ -22092,7 +23921,7 @@
                 <a:cs typeface="JetBrains Mono"/>
                 <a:sym typeface="JetBrains Mono"/>
               </a:rPr>
-              <a:t>--timeframe </a:t>
+              <a:t>--limit </a:t>
             </a:r>
             <a:r>
               <a:rPr b="0" i="0" lang="en-US" sz="1500" u="none" cap="none" strike="noStrike">
@@ -22104,8 +23933,36 @@
                 <a:cs typeface="JetBrains Mono"/>
                 <a:sym typeface="JetBrains Mono"/>
               </a:rPr>
-              <a:t>15m</a:t>
-            </a:r>
+              <a:t>500</a:t>
+            </a:r>
+            <a:endParaRPr b="0" i="0" sz="1500" u="none" cap="none" strike="noStrike">
+              <a:solidFill>
+                <a:srgbClr val="EAB308"/>
+              </a:solidFill>
+              <a:latin typeface="JetBrains Mono"/>
+              <a:ea typeface="JetBrains Mono"/>
+              <a:cs typeface="JetBrains Mono"/>
+              <a:sym typeface="JetBrains Mono"/>
+            </a:endParaRPr>
+          </a:p>
+          <a:p>
+            <a:pPr indent="0" lvl="0" marL="0" marR="0" rtl="0" algn="l">
+              <a:lnSpc>
+                <a:spcPct val="170000"/>
+              </a:lnSpc>
+              <a:spcBef>
+                <a:spcPts val="0"/>
+              </a:spcBef>
+              <a:spcAft>
+                <a:spcPts val="0"/>
+              </a:spcAft>
+              <a:buClr>
+                <a:srgbClr val="8B9DB5"/>
+              </a:buClr>
+              <a:buSzPts val="1500"/>
+              <a:buFont typeface="JetBrains Mono"/>
+              <a:buNone/>
+            </a:pPr>
             <a:r>
               <a:rPr b="0" i="0" lang="en-US" sz="1500" u="none" cap="none" strike="noStrike">
                 <a:solidFill>
@@ -22116,113 +23973,21 @@
                 <a:cs typeface="JetBrains Mono"/>
                 <a:sym typeface="JetBrains Mono"/>
               </a:rPr>
-              <a:t> </a:t>
-            </a:r>
-            <a:endParaRPr b="0" i="0" sz="1500" u="none" cap="none" strike="noStrike">
-              <a:solidFill>
-                <a:srgbClr val="8B9DB5"/>
-              </a:solidFill>
-              <a:latin typeface="JetBrains Mono"/>
-              <a:ea typeface="JetBrains Mono"/>
-              <a:cs typeface="JetBrains Mono"/>
-              <a:sym typeface="JetBrains Mono"/>
-            </a:endParaRPr>
-          </a:p>
-          <a:p>
-            <a:pPr indent="0" lvl="0" marL="0" marR="0" rtl="0" algn="l">
-              <a:lnSpc>
-                <a:spcPct val="170000"/>
-              </a:lnSpc>
-              <a:spcBef>
-                <a:spcPts val="0"/>
-              </a:spcBef>
-              <a:spcAft>
-                <a:spcPts val="0"/>
-              </a:spcAft>
-              <a:buClr>
-                <a:srgbClr val="8B9DB5"/>
-              </a:buClr>
-              <a:buSzPts val="1500"/>
-              <a:buFont typeface="JetBrains Mono"/>
-              <a:buNone/>
-            </a:pPr>
+              <a:t>--when </a:t>
+            </a:r>
             <a:r>
               <a:rPr b="0" i="0" lang="en-US" sz="1500" u="none" cap="none" strike="noStrike">
                 <a:solidFill>
-                  <a:srgbClr val="8B9DB5"/>
+                  <a:srgbClr val="EAB308"/>
                 </a:solidFill>
                 <a:latin typeface="JetBrains Mono"/>
                 <a:ea typeface="JetBrains Mono"/>
                 <a:cs typeface="JetBrains Mono"/>
                 <a:sym typeface="JetBrains Mono"/>
               </a:rPr>
-              <a:t>--limit </a:t>
-            </a:r>
-            <a:r>
-              <a:rPr b="0" i="0" lang="en-US" sz="1500" u="none" cap="none" strike="noStrike">
-                <a:solidFill>
-                  <a:srgbClr val="EAB308"/>
-                </a:solidFill>
-                <a:latin typeface="JetBrains Mono"/>
-                <a:ea typeface="JetBrains Mono"/>
-                <a:cs typeface="JetBrains Mono"/>
-                <a:sym typeface="JetBrains Mono"/>
-              </a:rPr>
-              <a:t>500</a:t>
-            </a:r>
-            <a:endParaRPr sz="1500">
-              <a:solidFill>
-                <a:srgbClr val="EAB308"/>
-              </a:solidFill>
-              <a:latin typeface="JetBrains Mono"/>
-              <a:ea typeface="JetBrains Mono"/>
-              <a:cs typeface="JetBrains Mono"/>
-              <a:sym typeface="JetBrains Mono"/>
-            </a:endParaRPr>
-          </a:p>
-          <a:p>
-            <a:pPr indent="0" lvl="0" marL="0" marR="0" rtl="0" algn="l">
-              <a:lnSpc>
-                <a:spcPct val="170000"/>
-              </a:lnSpc>
-              <a:spcBef>
-                <a:spcPts val="0"/>
-              </a:spcBef>
-              <a:spcAft>
-                <a:spcPts val="0"/>
-              </a:spcAft>
-              <a:buClr>
-                <a:srgbClr val="8B9DB5"/>
-              </a:buClr>
-              <a:buSzPts val="1500"/>
-              <a:buFont typeface="JetBrains Mono"/>
-              <a:buNone/>
-            </a:pPr>
-            <a:r>
-              <a:rPr b="0" i="0" lang="en-US" sz="1500" u="none" cap="none" strike="noStrike">
-                <a:solidFill>
-                  <a:srgbClr val="8B9DB5"/>
-                </a:solidFill>
-                <a:latin typeface="JetBrains Mono"/>
-                <a:ea typeface="JetBrains Mono"/>
-                <a:cs typeface="JetBrains Mono"/>
-                <a:sym typeface="JetBrains Mono"/>
-              </a:rPr>
-              <a:t>--when </a:t>
-            </a:r>
-            <a:r>
-              <a:rPr b="0" i="0" lang="en-US" sz="1500" u="none" cap="none" strike="noStrike">
-                <a:solidFill>
-                  <a:srgbClr val="EAB308"/>
-                </a:solidFill>
-                <a:latin typeface="JetBrains Mono"/>
-                <a:ea typeface="JetBrains Mono"/>
-                <a:cs typeface="JetBrains Mono"/>
-                <a:sym typeface="JetBrains Mono"/>
-              </a:rPr>
               <a:t>"2026-02-28T00:00:00Z"</a:t>
             </a:r>
-            <a:endParaRPr sz="1500">
+            <a:endParaRPr b="0" i="0" sz="1500" u="none" cap="none" strike="noStrike">
               <a:solidFill>
                 <a:srgbClr val="EAB308"/>
               </a:solidFill>
@@ -22321,19 +24086,35 @@
           </a:bodyPr>
           <a:lstStyle/>
           <a:p>
-            <a:pPr indent="0" lvl="0" marL="0" rtl="0" algn="l">
-              <a:spcBef>
-                <a:spcPts val="0"/>
-              </a:spcBef>
-              <a:spcAft>
-                <a:spcPts val="0"/>
-              </a:spcAft>
+            <a:pPr indent="0" lvl="0" marL="0" marR="0" rtl="0" algn="l">
+              <a:lnSpc>
+                <a:spcPct val="100000"/>
+              </a:lnSpc>
+              <a:spcBef>
+                <a:spcPts val="0"/>
+              </a:spcBef>
+              <a:spcAft>
+                <a:spcPts val="0"/>
+              </a:spcAft>
+              <a:buClr>
+                <a:srgbClr val="000000"/>
+              </a:buClr>
+              <a:buSzPts val="1400"/>
+              <a:buFont typeface="Arial"/>
               <a:buNone/>
             </a:pPr>
             <a:r>
               <a:t/>
             </a:r>
-            <a:endParaRPr/>
+            <a:endParaRPr b="0" i="0" sz="1400" u="none" cap="none" strike="noStrike">
+              <a:solidFill>
+                <a:srgbClr val="000000"/>
+              </a:solidFill>
+              <a:latin typeface="Arial"/>
+              <a:ea typeface="Arial"/>
+              <a:cs typeface="Arial"/>
+              <a:sym typeface="Arial"/>
+            </a:endParaRPr>
           </a:p>
         </p:txBody>
       </p:sp>
@@ -22363,6 +24144,9 @@
           <a:lstStyle/>
           <a:p>
             <a:pPr indent="0" lvl="0" marL="0" marR="0" rtl="0" algn="l">
+              <a:lnSpc>
+                <a:spcPct val="100000"/>
+              </a:lnSpc>
               <a:spcBef>
                 <a:spcPts val="0"/>
               </a:spcBef>
@@ -22505,19 +24289,35 @@
           </a:bodyPr>
           <a:lstStyle/>
           <a:p>
-            <a:pPr indent="0" lvl="0" marL="0" rtl="0" algn="l">
-              <a:spcBef>
-                <a:spcPts val="0"/>
-              </a:spcBef>
-              <a:spcAft>
-                <a:spcPts val="0"/>
-              </a:spcAft>
+            <a:pPr indent="0" lvl="0" marL="0" marR="0" rtl="0" algn="l">
+              <a:lnSpc>
+                <a:spcPct val="100000"/>
+              </a:lnSpc>
+              <a:spcBef>
+                <a:spcPts val="0"/>
+              </a:spcBef>
+              <a:spcAft>
+                <a:spcPts val="0"/>
+              </a:spcAft>
+              <a:buClr>
+                <a:srgbClr val="000000"/>
+              </a:buClr>
+              <a:buSzPts val="1400"/>
+              <a:buFont typeface="Arial"/>
               <a:buNone/>
             </a:pPr>
             <a:r>
               <a:t/>
             </a:r>
-            <a:endParaRPr/>
+            <a:endParaRPr b="0" i="0" sz="1400" u="none" cap="none" strike="noStrike">
+              <a:solidFill>
+                <a:srgbClr val="000000"/>
+              </a:solidFill>
+              <a:latin typeface="Arial"/>
+              <a:ea typeface="Arial"/>
+              <a:cs typeface="Arial"/>
+              <a:sym typeface="Arial"/>
+            </a:endParaRPr>
           </a:p>
         </p:txBody>
       </p:sp>
@@ -22547,6 +24347,9 @@
           <a:lstStyle/>
           <a:p>
             <a:pPr indent="0" lvl="0" marL="0" marR="0" rtl="0" algn="l">
+              <a:lnSpc>
+                <a:spcPct val="100000"/>
+              </a:lnSpc>
               <a:spcBef>
                 <a:spcPts val="0"/>
               </a:spcBef>
@@ -22619,19 +24422,35 @@
           </a:bodyPr>
           <a:lstStyle/>
           <a:p>
-            <a:pPr indent="0" lvl="0" marL="0" rtl="0" algn="l">
-              <a:spcBef>
-                <a:spcPts val="0"/>
-              </a:spcBef>
-              <a:spcAft>
-                <a:spcPts val="0"/>
-              </a:spcAft>
+            <a:pPr indent="0" lvl="0" marL="0" marR="0" rtl="0" algn="l">
+              <a:lnSpc>
+                <a:spcPct val="100000"/>
+              </a:lnSpc>
+              <a:spcBef>
+                <a:spcPts val="0"/>
+              </a:spcBef>
+              <a:spcAft>
+                <a:spcPts val="0"/>
+              </a:spcAft>
+              <a:buClr>
+                <a:srgbClr val="000000"/>
+              </a:buClr>
+              <a:buSzPts val="1400"/>
+              <a:buFont typeface="Arial"/>
               <a:buNone/>
             </a:pPr>
             <a:r>
               <a:t/>
             </a:r>
-            <a:endParaRPr/>
+            <a:endParaRPr b="0" i="0" sz="1400" u="none" cap="none" strike="noStrike">
+              <a:solidFill>
+                <a:srgbClr val="000000"/>
+              </a:solidFill>
+              <a:latin typeface="Arial"/>
+              <a:ea typeface="Arial"/>
+              <a:cs typeface="Arial"/>
+              <a:sym typeface="Arial"/>
+            </a:endParaRPr>
           </a:p>
         </p:txBody>
       </p:sp>
@@ -22661,6 +24480,9 @@
           <a:lstStyle/>
           <a:p>
             <a:pPr indent="0" lvl="0" marL="0" marR="0" rtl="0" algn="l">
+              <a:lnSpc>
+                <a:spcPct val="100000"/>
+              </a:lnSpc>
               <a:spcBef>
                 <a:spcPts val="0"/>
               </a:spcBef>
@@ -22803,19 +24625,35 @@
           </a:bodyPr>
           <a:lstStyle/>
           <a:p>
-            <a:pPr indent="0" lvl="0" marL="0" rtl="0" algn="l">
-              <a:spcBef>
-                <a:spcPts val="0"/>
-              </a:spcBef>
-              <a:spcAft>
-                <a:spcPts val="0"/>
-              </a:spcAft>
+            <a:pPr indent="0" lvl="0" marL="0" marR="0" rtl="0" algn="l">
+              <a:lnSpc>
+                <a:spcPct val="100000"/>
+              </a:lnSpc>
+              <a:spcBef>
+                <a:spcPts val="0"/>
+              </a:spcBef>
+              <a:spcAft>
+                <a:spcPts val="0"/>
+              </a:spcAft>
+              <a:buClr>
+                <a:srgbClr val="000000"/>
+              </a:buClr>
+              <a:buSzPts val="1400"/>
+              <a:buFont typeface="Arial"/>
               <a:buNone/>
             </a:pPr>
             <a:r>
               <a:t/>
             </a:r>
-            <a:endParaRPr/>
+            <a:endParaRPr b="0" i="0" sz="1400" u="none" cap="none" strike="noStrike">
+              <a:solidFill>
+                <a:srgbClr val="000000"/>
+              </a:solidFill>
+              <a:latin typeface="Arial"/>
+              <a:ea typeface="Arial"/>
+              <a:cs typeface="Arial"/>
+              <a:sym typeface="Arial"/>
+            </a:endParaRPr>
           </a:p>
         </p:txBody>
       </p:sp>
@@ -22845,6 +24683,9 @@
           <a:lstStyle/>
           <a:p>
             <a:pPr indent="0" lvl="0" marL="0" marR="0" rtl="0" algn="l">
+              <a:lnSpc>
+                <a:spcPct val="100000"/>
+              </a:lnSpc>
               <a:spcBef>
                 <a:spcPts val="0"/>
               </a:spcBef>
@@ -22917,19 +24758,35 @@
           </a:bodyPr>
           <a:lstStyle/>
           <a:p>
-            <a:pPr indent="0" lvl="0" marL="0" rtl="0" algn="l">
-              <a:spcBef>
-                <a:spcPts val="0"/>
-              </a:spcBef>
-              <a:spcAft>
-                <a:spcPts val="0"/>
-              </a:spcAft>
+            <a:pPr indent="0" lvl="0" marL="0" marR="0" rtl="0" algn="l">
+              <a:lnSpc>
+                <a:spcPct val="100000"/>
+              </a:lnSpc>
+              <a:spcBef>
+                <a:spcPts val="0"/>
+              </a:spcBef>
+              <a:spcAft>
+                <a:spcPts val="0"/>
+              </a:spcAft>
+              <a:buClr>
+                <a:srgbClr val="000000"/>
+              </a:buClr>
+              <a:buSzPts val="1400"/>
+              <a:buFont typeface="Arial"/>
               <a:buNone/>
             </a:pPr>
             <a:r>
               <a:t/>
             </a:r>
-            <a:endParaRPr/>
+            <a:endParaRPr b="0" i="0" sz="1400" u="none" cap="none" strike="noStrike">
+              <a:solidFill>
+                <a:srgbClr val="000000"/>
+              </a:solidFill>
+              <a:latin typeface="Arial"/>
+              <a:ea typeface="Arial"/>
+              <a:cs typeface="Arial"/>
+              <a:sym typeface="Arial"/>
+            </a:endParaRPr>
           </a:p>
         </p:txBody>
       </p:sp>
@@ -22959,6 +24816,9 @@
           <a:lstStyle/>
           <a:p>
             <a:pPr indent="0" lvl="0" marL="0" marR="0" rtl="0" algn="l">
+              <a:lnSpc>
+                <a:spcPct val="100000"/>
+              </a:lnSpc>
               <a:spcBef>
                 <a:spcPts val="0"/>
               </a:spcBef>
@@ -23101,19 +24961,35 @@
           </a:bodyPr>
           <a:lstStyle/>
           <a:p>
-            <a:pPr indent="0" lvl="0" marL="0" rtl="0" algn="l">
-              <a:spcBef>
-                <a:spcPts val="0"/>
-              </a:spcBef>
-              <a:spcAft>
-                <a:spcPts val="0"/>
-              </a:spcAft>
+            <a:pPr indent="0" lvl="0" marL="0" marR="0" rtl="0" algn="l">
+              <a:lnSpc>
+                <a:spcPct val="100000"/>
+              </a:lnSpc>
+              <a:spcBef>
+                <a:spcPts val="0"/>
+              </a:spcBef>
+              <a:spcAft>
+                <a:spcPts val="0"/>
+              </a:spcAft>
+              <a:buClr>
+                <a:srgbClr val="000000"/>
+              </a:buClr>
+              <a:buSzPts val="1400"/>
+              <a:buFont typeface="Arial"/>
               <a:buNone/>
             </a:pPr>
             <a:r>
               <a:t/>
             </a:r>
-            <a:endParaRPr/>
+            <a:endParaRPr b="0" i="0" sz="1400" u="none" cap="none" strike="noStrike">
+              <a:solidFill>
+                <a:srgbClr val="000000"/>
+              </a:solidFill>
+              <a:latin typeface="Arial"/>
+              <a:ea typeface="Arial"/>
+              <a:cs typeface="Arial"/>
+              <a:sym typeface="Arial"/>
+            </a:endParaRPr>
           </a:p>
         </p:txBody>
       </p:sp>
@@ -23143,6 +25019,9 @@
           <a:lstStyle/>
           <a:p>
             <a:pPr indent="0" lvl="0" marL="0" marR="0" rtl="0" algn="l">
+              <a:lnSpc>
+                <a:spcPct val="100000"/>
+              </a:lnSpc>
               <a:spcBef>
                 <a:spcPts val="0"/>
               </a:spcBef>
@@ -23215,19 +25094,35 @@
           </a:bodyPr>
           <a:lstStyle/>
           <a:p>
-            <a:pPr indent="0" lvl="0" marL="0" rtl="0" algn="l">
-              <a:spcBef>
-                <a:spcPts val="0"/>
-              </a:spcBef>
-              <a:spcAft>
-                <a:spcPts val="0"/>
-              </a:spcAft>
+            <a:pPr indent="0" lvl="0" marL="0" marR="0" rtl="0" algn="l">
+              <a:lnSpc>
+                <a:spcPct val="100000"/>
+              </a:lnSpc>
+              <a:spcBef>
+                <a:spcPts val="0"/>
+              </a:spcBef>
+              <a:spcAft>
+                <a:spcPts val="0"/>
+              </a:spcAft>
+              <a:buClr>
+                <a:srgbClr val="000000"/>
+              </a:buClr>
+              <a:buSzPts val="1400"/>
+              <a:buFont typeface="Arial"/>
               <a:buNone/>
             </a:pPr>
             <a:r>
               <a:t/>
             </a:r>
-            <a:endParaRPr/>
+            <a:endParaRPr b="0" i="0" sz="1400" u="none" cap="none" strike="noStrike">
+              <a:solidFill>
+                <a:srgbClr val="000000"/>
+              </a:solidFill>
+              <a:latin typeface="Arial"/>
+              <a:ea typeface="Arial"/>
+              <a:cs typeface="Arial"/>
+              <a:sym typeface="Arial"/>
+            </a:endParaRPr>
           </a:p>
         </p:txBody>
       </p:sp>
@@ -23257,6 +25152,9 @@
           <a:lstStyle/>
           <a:p>
             <a:pPr indent="0" lvl="0" marL="0" marR="0" rtl="0" algn="l">
+              <a:lnSpc>
+                <a:spcPct val="100000"/>
+              </a:lnSpc>
               <a:spcBef>
                 <a:spcPts val="0"/>
               </a:spcBef>
@@ -23399,19 +25297,35 @@
           </a:bodyPr>
           <a:lstStyle/>
           <a:p>
-            <a:pPr indent="0" lvl="0" marL="0" rtl="0" algn="l">
-              <a:spcBef>
-                <a:spcPts val="0"/>
-              </a:spcBef>
-              <a:spcAft>
-                <a:spcPts val="0"/>
-              </a:spcAft>
+            <a:pPr indent="0" lvl="0" marL="0" marR="0" rtl="0" algn="l">
+              <a:lnSpc>
+                <a:spcPct val="100000"/>
+              </a:lnSpc>
+              <a:spcBef>
+                <a:spcPts val="0"/>
+              </a:spcBef>
+              <a:spcAft>
+                <a:spcPts val="0"/>
+              </a:spcAft>
+              <a:buClr>
+                <a:srgbClr val="000000"/>
+              </a:buClr>
+              <a:buSzPts val="1400"/>
+              <a:buFont typeface="Arial"/>
               <a:buNone/>
             </a:pPr>
             <a:r>
               <a:t/>
             </a:r>
-            <a:endParaRPr/>
+            <a:endParaRPr b="0" i="0" sz="1400" u="none" cap="none" strike="noStrike">
+              <a:solidFill>
+                <a:srgbClr val="000000"/>
+              </a:solidFill>
+              <a:latin typeface="Arial"/>
+              <a:ea typeface="Arial"/>
+              <a:cs typeface="Arial"/>
+              <a:sym typeface="Arial"/>
+            </a:endParaRPr>
           </a:p>
         </p:txBody>
       </p:sp>
@@ -23441,6 +25355,9 @@
           <a:lstStyle/>
           <a:p>
             <a:pPr indent="0" lvl="0" marL="0" marR="0" rtl="0" algn="l">
+              <a:lnSpc>
+                <a:spcPct val="100000"/>
+              </a:lnSpc>
               <a:spcBef>
                 <a:spcPts val="0"/>
               </a:spcBef>
@@ -23513,19 +25430,35 @@
           </a:bodyPr>
           <a:lstStyle/>
           <a:p>
-            <a:pPr indent="0" lvl="0" marL="0" rtl="0" algn="l">
-              <a:spcBef>
-                <a:spcPts val="0"/>
-              </a:spcBef>
-              <a:spcAft>
-                <a:spcPts val="0"/>
-              </a:spcAft>
+            <a:pPr indent="0" lvl="0" marL="0" marR="0" rtl="0" algn="l">
+              <a:lnSpc>
+                <a:spcPct val="100000"/>
+              </a:lnSpc>
+              <a:spcBef>
+                <a:spcPts val="0"/>
+              </a:spcBef>
+              <a:spcAft>
+                <a:spcPts val="0"/>
+              </a:spcAft>
+              <a:buClr>
+                <a:srgbClr val="000000"/>
+              </a:buClr>
+              <a:buSzPts val="1400"/>
+              <a:buFont typeface="Arial"/>
               <a:buNone/>
             </a:pPr>
             <a:r>
               <a:t/>
             </a:r>
-            <a:endParaRPr/>
+            <a:endParaRPr b="0" i="0" sz="1400" u="none" cap="none" strike="noStrike">
+              <a:solidFill>
+                <a:srgbClr val="000000"/>
+              </a:solidFill>
+              <a:latin typeface="Arial"/>
+              <a:ea typeface="Arial"/>
+              <a:cs typeface="Arial"/>
+              <a:sym typeface="Arial"/>
+            </a:endParaRPr>
           </a:p>
         </p:txBody>
       </p:sp>
@@ -23555,6 +25488,9 @@
           <a:lstStyle/>
           <a:p>
             <a:pPr indent="0" lvl="0" marL="0" marR="0" rtl="0" algn="l">
+              <a:lnSpc>
+                <a:spcPct val="100000"/>
+              </a:lnSpc>
               <a:spcBef>
                 <a:spcPts val="0"/>
               </a:spcBef>
@@ -23697,19 +25633,35 @@
           </a:bodyPr>
           <a:lstStyle/>
           <a:p>
-            <a:pPr indent="0" lvl="0" marL="0" rtl="0" algn="l">
-              <a:spcBef>
-                <a:spcPts val="0"/>
-              </a:spcBef>
-              <a:spcAft>
-                <a:spcPts val="0"/>
-              </a:spcAft>
+            <a:pPr indent="0" lvl="0" marL="0" marR="0" rtl="0" algn="l">
+              <a:lnSpc>
+                <a:spcPct val="100000"/>
+              </a:lnSpc>
+              <a:spcBef>
+                <a:spcPts val="0"/>
+              </a:spcBef>
+              <a:spcAft>
+                <a:spcPts val="0"/>
+              </a:spcAft>
+              <a:buClr>
+                <a:srgbClr val="000000"/>
+              </a:buClr>
+              <a:buSzPts val="1400"/>
+              <a:buFont typeface="Arial"/>
               <a:buNone/>
             </a:pPr>
             <a:r>
               <a:t/>
             </a:r>
-            <a:endParaRPr/>
+            <a:endParaRPr b="0" i="0" sz="1400" u="none" cap="none" strike="noStrike">
+              <a:solidFill>
+                <a:srgbClr val="000000"/>
+              </a:solidFill>
+              <a:latin typeface="Arial"/>
+              <a:ea typeface="Arial"/>
+              <a:cs typeface="Arial"/>
+              <a:sym typeface="Arial"/>
+            </a:endParaRPr>
           </a:p>
         </p:txBody>
       </p:sp>
@@ -23739,6 +25691,9 @@
           <a:lstStyle/>
           <a:p>
             <a:pPr indent="0" lvl="0" marL="0" marR="0" rtl="0" algn="l">
+              <a:lnSpc>
+                <a:spcPct val="100000"/>
+              </a:lnSpc>
               <a:spcBef>
                 <a:spcPts val="0"/>
               </a:spcBef>
@@ -23811,19 +25766,35 @@
           </a:bodyPr>
           <a:lstStyle/>
           <a:p>
-            <a:pPr indent="0" lvl="0" marL="0" rtl="0" algn="l">
-              <a:spcBef>
-                <a:spcPts val="0"/>
-              </a:spcBef>
-              <a:spcAft>
-                <a:spcPts val="0"/>
-              </a:spcAft>
+            <a:pPr indent="0" lvl="0" marL="0" marR="0" rtl="0" algn="l">
+              <a:lnSpc>
+                <a:spcPct val="100000"/>
+              </a:lnSpc>
+              <a:spcBef>
+                <a:spcPts val="0"/>
+              </a:spcBef>
+              <a:spcAft>
+                <a:spcPts val="0"/>
+              </a:spcAft>
+              <a:buClr>
+                <a:srgbClr val="000000"/>
+              </a:buClr>
+              <a:buSzPts val="1400"/>
+              <a:buFont typeface="Arial"/>
               <a:buNone/>
             </a:pPr>
             <a:r>
               <a:t/>
             </a:r>
-            <a:endParaRPr/>
+            <a:endParaRPr b="0" i="0" sz="1400" u="none" cap="none" strike="noStrike">
+              <a:solidFill>
+                <a:srgbClr val="000000"/>
+              </a:solidFill>
+              <a:latin typeface="Arial"/>
+              <a:ea typeface="Arial"/>
+              <a:cs typeface="Arial"/>
+              <a:sym typeface="Arial"/>
+            </a:endParaRPr>
           </a:p>
         </p:txBody>
       </p:sp>
@@ -23853,6 +25824,9 @@
           <a:lstStyle/>
           <a:p>
             <a:pPr indent="0" lvl="0" marL="0" marR="0" rtl="0" algn="l">
+              <a:lnSpc>
+                <a:spcPct val="100000"/>
+              </a:lnSpc>
               <a:spcBef>
                 <a:spcPts val="0"/>
               </a:spcBef>
@@ -23995,19 +25969,35 @@
           </a:bodyPr>
           <a:lstStyle/>
           <a:p>
-            <a:pPr indent="0" lvl="0" marL="0" rtl="0" algn="l">
-              <a:spcBef>
-                <a:spcPts val="0"/>
-              </a:spcBef>
-              <a:spcAft>
-                <a:spcPts val="0"/>
-              </a:spcAft>
+            <a:pPr indent="0" lvl="0" marL="0" marR="0" rtl="0" algn="l">
+              <a:lnSpc>
+                <a:spcPct val="100000"/>
+              </a:lnSpc>
+              <a:spcBef>
+                <a:spcPts val="0"/>
+              </a:spcBef>
+              <a:spcAft>
+                <a:spcPts val="0"/>
+              </a:spcAft>
+              <a:buClr>
+                <a:srgbClr val="000000"/>
+              </a:buClr>
+              <a:buSzPts val="1400"/>
+              <a:buFont typeface="Arial"/>
               <a:buNone/>
             </a:pPr>
             <a:r>
               <a:t/>
             </a:r>
-            <a:endParaRPr/>
+            <a:endParaRPr b="0" i="0" sz="1400" u="none" cap="none" strike="noStrike">
+              <a:solidFill>
+                <a:srgbClr val="000000"/>
+              </a:solidFill>
+              <a:latin typeface="Arial"/>
+              <a:ea typeface="Arial"/>
+              <a:cs typeface="Arial"/>
+              <a:sym typeface="Arial"/>
+            </a:endParaRPr>
           </a:p>
         </p:txBody>
       </p:sp>
@@ -24037,6 +26027,9 @@
           <a:lstStyle/>
           <a:p>
             <a:pPr indent="0" lvl="0" marL="0" marR="0" rtl="0" algn="l">
+              <a:lnSpc>
+                <a:spcPct val="100000"/>
+              </a:lnSpc>
               <a:spcBef>
                 <a:spcPts val="0"/>
               </a:spcBef>
@@ -24192,19 +26185,35 @@
           </a:bodyPr>
           <a:lstStyle/>
           <a:p>
-            <a:pPr indent="0" lvl="0" marL="0" rtl="0" algn="l">
-              <a:spcBef>
-                <a:spcPts val="0"/>
-              </a:spcBef>
-              <a:spcAft>
-                <a:spcPts val="0"/>
-              </a:spcAft>
+            <a:pPr indent="0" lvl="0" marL="0" marR="0" rtl="0" algn="l">
+              <a:lnSpc>
+                <a:spcPct val="100000"/>
+              </a:lnSpc>
+              <a:spcBef>
+                <a:spcPts val="0"/>
+              </a:spcBef>
+              <a:spcAft>
+                <a:spcPts val="0"/>
+              </a:spcAft>
+              <a:buClr>
+                <a:srgbClr val="000000"/>
+              </a:buClr>
+              <a:buSzPts val="1400"/>
+              <a:buFont typeface="Arial"/>
               <a:buNone/>
             </a:pPr>
             <a:r>
               <a:t/>
             </a:r>
-            <a:endParaRPr/>
+            <a:endParaRPr b="0" i="0" sz="1400" u="none" cap="none" strike="noStrike">
+              <a:solidFill>
+                <a:srgbClr val="000000"/>
+              </a:solidFill>
+              <a:latin typeface="Arial"/>
+              <a:ea typeface="Arial"/>
+              <a:cs typeface="Arial"/>
+              <a:sym typeface="Arial"/>
+            </a:endParaRPr>
           </a:p>
         </p:txBody>
       </p:sp>
@@ -24243,8 +26252,8 @@
         </p:nvSpPr>
         <p:spPr>
           <a:xfrm>
-            <a:off x="1047750" y="1004887"/>
-            <a:ext cx="1504950" cy="285750"/>
+            <a:off x="1047750" y="1004875"/>
+            <a:ext cx="2415600" cy="285900"/>
           </a:xfrm>
           <a:prstGeom prst="rect">
             <a:avLst/>
@@ -24261,6 +26270,9 @@
           <a:lstStyle/>
           <a:p>
             <a:pPr indent="0" lvl="0" marL="0" marR="0" rtl="0" algn="l">
+              <a:lnSpc>
+                <a:spcPct val="100000"/>
+              </a:lnSpc>
               <a:spcBef>
                 <a:spcPts val="0"/>
               </a:spcBef>
@@ -24337,19 +26349,35 @@
           </a:bodyPr>
           <a:lstStyle/>
           <a:p>
-            <a:pPr indent="0" lvl="0" marL="0" rtl="0" algn="l">
-              <a:spcBef>
-                <a:spcPts val="0"/>
-              </a:spcBef>
-              <a:spcAft>
-                <a:spcPts val="0"/>
-              </a:spcAft>
+            <a:pPr indent="0" lvl="0" marL="0" marR="0" rtl="0" algn="l">
+              <a:lnSpc>
+                <a:spcPct val="100000"/>
+              </a:lnSpc>
+              <a:spcBef>
+                <a:spcPts val="0"/>
+              </a:spcBef>
+              <a:spcAft>
+                <a:spcPts val="0"/>
+              </a:spcAft>
+              <a:buClr>
+                <a:srgbClr val="000000"/>
+              </a:buClr>
+              <a:buSzPts val="1400"/>
+              <a:buFont typeface="Arial"/>
               <a:buNone/>
             </a:pPr>
             <a:r>
               <a:t/>
             </a:r>
-            <a:endParaRPr/>
+            <a:endParaRPr b="0" i="0" sz="1400" u="none" cap="none" strike="noStrike">
+              <a:solidFill>
+                <a:srgbClr val="000000"/>
+              </a:solidFill>
+              <a:latin typeface="Arial"/>
+              <a:ea typeface="Arial"/>
+              <a:cs typeface="Arial"/>
+              <a:sym typeface="Arial"/>
+            </a:endParaRPr>
           </a:p>
         </p:txBody>
       </p:sp>
@@ -24361,8 +26389,8 @@
         </p:nvSpPr>
         <p:spPr>
           <a:xfrm>
-            <a:off x="14815096" y="1019175"/>
-            <a:ext cx="2340842" cy="257175"/>
+            <a:off x="14753205" y="994417"/>
+            <a:ext cx="2760300" cy="257100"/>
           </a:xfrm>
           <a:prstGeom prst="rect">
             <a:avLst/>
@@ -24379,6 +26407,9 @@
           <a:lstStyle/>
           <a:p>
             <a:pPr indent="0" lvl="0" marL="0" marR="0" rtl="0" algn="l">
+              <a:lnSpc>
+                <a:spcPct val="100000"/>
+              </a:lnSpc>
               <a:spcBef>
                 <a:spcPts val="0"/>
               </a:spcBef>
@@ -24575,19 +26606,35 @@
           </a:bodyPr>
           <a:lstStyle/>
           <a:p>
-            <a:pPr indent="0" lvl="0" marL="0" rtl="0" algn="l">
-              <a:spcBef>
-                <a:spcPts val="0"/>
-              </a:spcBef>
-              <a:spcAft>
-                <a:spcPts val="0"/>
-              </a:spcAft>
+            <a:pPr indent="0" lvl="0" marL="0" marR="0" rtl="0" algn="l">
+              <a:lnSpc>
+                <a:spcPct val="100000"/>
+              </a:lnSpc>
+              <a:spcBef>
+                <a:spcPts val="0"/>
+              </a:spcBef>
+              <a:spcAft>
+                <a:spcPts val="0"/>
+              </a:spcAft>
+              <a:buClr>
+                <a:srgbClr val="000000"/>
+              </a:buClr>
+              <a:buSzPts val="1400"/>
+              <a:buFont typeface="Arial"/>
               <a:buNone/>
             </a:pPr>
             <a:r>
               <a:t/>
             </a:r>
-            <a:endParaRPr/>
+            <a:endParaRPr b="0" i="0" sz="1400" u="none" cap="none" strike="noStrike">
+              <a:solidFill>
+                <a:srgbClr val="000000"/>
+              </a:solidFill>
+              <a:latin typeface="Arial"/>
+              <a:ea typeface="Arial"/>
+              <a:cs typeface="Arial"/>
+              <a:sym typeface="Arial"/>
+            </a:endParaRPr>
           </a:p>
         </p:txBody>
       </p:sp>
@@ -24665,8 +26712,8 @@
         </p:nvSpPr>
         <p:spPr>
           <a:xfrm>
-            <a:off x="1409700" y="4699248"/>
-            <a:ext cx="4203600" cy="409575"/>
+            <a:off x="1409700" y="4699250"/>
+            <a:ext cx="6670800" cy="409500"/>
           </a:xfrm>
           <a:prstGeom prst="rect">
             <a:avLst/>
@@ -24750,19 +26797,35 @@
           </a:bodyPr>
           <a:lstStyle/>
           <a:p>
-            <a:pPr indent="0" lvl="0" marL="0" rtl="0" algn="l">
-              <a:spcBef>
-                <a:spcPts val="0"/>
-              </a:spcBef>
-              <a:spcAft>
-                <a:spcPts val="0"/>
-              </a:spcAft>
+            <a:pPr indent="0" lvl="0" marL="0" marR="0" rtl="0" algn="l">
+              <a:lnSpc>
+                <a:spcPct val="100000"/>
+              </a:lnSpc>
+              <a:spcBef>
+                <a:spcPts val="0"/>
+              </a:spcBef>
+              <a:spcAft>
+                <a:spcPts val="0"/>
+              </a:spcAft>
+              <a:buClr>
+                <a:srgbClr val="000000"/>
+              </a:buClr>
+              <a:buSzPts val="1400"/>
+              <a:buFont typeface="Arial"/>
               <a:buNone/>
             </a:pPr>
             <a:r>
               <a:t/>
             </a:r>
-            <a:endParaRPr/>
+            <a:endParaRPr b="0" i="0" sz="1400" u="none" cap="none" strike="noStrike">
+              <a:solidFill>
+                <a:srgbClr val="000000"/>
+              </a:solidFill>
+              <a:latin typeface="Arial"/>
+              <a:ea typeface="Arial"/>
+              <a:cs typeface="Arial"/>
+              <a:sym typeface="Arial"/>
+            </a:endParaRPr>
           </a:p>
         </p:txBody>
       </p:sp>
@@ -24925,19 +26988,35 @@
           </a:bodyPr>
           <a:lstStyle/>
           <a:p>
-            <a:pPr indent="0" lvl="0" marL="0" rtl="0" algn="l">
-              <a:spcBef>
-                <a:spcPts val="0"/>
-              </a:spcBef>
-              <a:spcAft>
-                <a:spcPts val="0"/>
-              </a:spcAft>
+            <a:pPr indent="0" lvl="0" marL="0" marR="0" rtl="0" algn="l">
+              <a:lnSpc>
+                <a:spcPct val="100000"/>
+              </a:lnSpc>
+              <a:spcBef>
+                <a:spcPts val="0"/>
+              </a:spcBef>
+              <a:spcAft>
+                <a:spcPts val="0"/>
+              </a:spcAft>
+              <a:buClr>
+                <a:srgbClr val="000000"/>
+              </a:buClr>
+              <a:buSzPts val="1400"/>
+              <a:buFont typeface="Arial"/>
               <a:buNone/>
             </a:pPr>
             <a:r>
               <a:t/>
             </a:r>
-            <a:endParaRPr/>
+            <a:endParaRPr b="0" i="0" sz="1400" u="none" cap="none" strike="noStrike">
+              <a:solidFill>
+                <a:srgbClr val="000000"/>
+              </a:solidFill>
+              <a:latin typeface="Arial"/>
+              <a:ea typeface="Arial"/>
+              <a:cs typeface="Arial"/>
+              <a:sym typeface="Arial"/>
+            </a:endParaRPr>
           </a:p>
         </p:txBody>
       </p:sp>
@@ -25174,19 +27253,35 @@
           </a:bodyPr>
           <a:lstStyle/>
           <a:p>
-            <a:pPr indent="0" lvl="0" marL="0" rtl="0" algn="l">
-              <a:spcBef>
-                <a:spcPts val="0"/>
-              </a:spcBef>
-              <a:spcAft>
-                <a:spcPts val="0"/>
-              </a:spcAft>
+            <a:pPr indent="0" lvl="0" marL="0" marR="0" rtl="0" algn="l">
+              <a:lnSpc>
+                <a:spcPct val="100000"/>
+              </a:lnSpc>
+              <a:spcBef>
+                <a:spcPts val="0"/>
+              </a:spcBef>
+              <a:spcAft>
+                <a:spcPts val="0"/>
+              </a:spcAft>
+              <a:buClr>
+                <a:srgbClr val="000000"/>
+              </a:buClr>
+              <a:buSzPts val="1400"/>
+              <a:buFont typeface="Arial"/>
               <a:buNone/>
             </a:pPr>
             <a:r>
               <a:t/>
             </a:r>
-            <a:endParaRPr/>
+            <a:endParaRPr b="0" i="0" sz="1400" u="none" cap="none" strike="noStrike">
+              <a:solidFill>
+                <a:srgbClr val="000000"/>
+              </a:solidFill>
+              <a:latin typeface="Arial"/>
+              <a:ea typeface="Arial"/>
+              <a:cs typeface="Arial"/>
+              <a:sym typeface="Arial"/>
+            </a:endParaRPr>
           </a:p>
         </p:txBody>
       </p:sp>
@@ -25282,6 +27377,9 @@
           <a:lstStyle/>
           <a:p>
             <a:pPr indent="0" lvl="0" marL="0" marR="0" rtl="0" algn="l">
+              <a:lnSpc>
+                <a:spcPct val="100000"/>
+              </a:lnSpc>
               <a:spcBef>
                 <a:spcPts val="0"/>
               </a:spcBef>
@@ -25354,19 +27452,35 @@
           </a:bodyPr>
           <a:lstStyle/>
           <a:p>
-            <a:pPr indent="0" lvl="0" marL="0" rtl="0" algn="l">
-              <a:spcBef>
-                <a:spcPts val="0"/>
-              </a:spcBef>
-              <a:spcAft>
-                <a:spcPts val="0"/>
-              </a:spcAft>
+            <a:pPr indent="0" lvl="0" marL="0" marR="0" rtl="0" algn="l">
+              <a:lnSpc>
+                <a:spcPct val="100000"/>
+              </a:lnSpc>
+              <a:spcBef>
+                <a:spcPts val="0"/>
+              </a:spcBef>
+              <a:spcAft>
+                <a:spcPts val="0"/>
+              </a:spcAft>
+              <a:buClr>
+                <a:srgbClr val="000000"/>
+              </a:buClr>
+              <a:buSzPts val="1400"/>
+              <a:buFont typeface="Arial"/>
               <a:buNone/>
             </a:pPr>
             <a:r>
               <a:t/>
             </a:r>
-            <a:endParaRPr/>
+            <a:endParaRPr b="0" i="0" sz="1400" u="none" cap="none" strike="noStrike">
+              <a:solidFill>
+                <a:srgbClr val="000000"/>
+              </a:solidFill>
+              <a:latin typeface="Arial"/>
+              <a:ea typeface="Arial"/>
+              <a:cs typeface="Arial"/>
+              <a:sym typeface="Arial"/>
+            </a:endParaRPr>
           </a:p>
         </p:txBody>
       </p:sp>
@@ -25462,6 +27576,9 @@
           <a:lstStyle/>
           <a:p>
             <a:pPr indent="0" lvl="0" marL="0" marR="0" rtl="0" algn="l">
+              <a:lnSpc>
+                <a:spcPct val="100000"/>
+              </a:lnSpc>
               <a:spcBef>
                 <a:spcPts val="0"/>
               </a:spcBef>
@@ -25534,19 +27651,35 @@
           </a:bodyPr>
           <a:lstStyle/>
           <a:p>
-            <a:pPr indent="0" lvl="0" marL="0" rtl="0" algn="l">
-              <a:spcBef>
-                <a:spcPts val="0"/>
-              </a:spcBef>
-              <a:spcAft>
-                <a:spcPts val="0"/>
-              </a:spcAft>
+            <a:pPr indent="0" lvl="0" marL="0" marR="0" rtl="0" algn="l">
+              <a:lnSpc>
+                <a:spcPct val="100000"/>
+              </a:lnSpc>
+              <a:spcBef>
+                <a:spcPts val="0"/>
+              </a:spcBef>
+              <a:spcAft>
+                <a:spcPts val="0"/>
+              </a:spcAft>
+              <a:buClr>
+                <a:srgbClr val="000000"/>
+              </a:buClr>
+              <a:buSzPts val="1400"/>
+              <a:buFont typeface="Arial"/>
               <a:buNone/>
             </a:pPr>
             <a:r>
               <a:t/>
             </a:r>
-            <a:endParaRPr/>
+            <a:endParaRPr b="0" i="0" sz="1400" u="none" cap="none" strike="noStrike">
+              <a:solidFill>
+                <a:srgbClr val="000000"/>
+              </a:solidFill>
+              <a:latin typeface="Arial"/>
+              <a:ea typeface="Arial"/>
+              <a:cs typeface="Arial"/>
+              <a:sym typeface="Arial"/>
+            </a:endParaRPr>
           </a:p>
         </p:txBody>
       </p:sp>
@@ -25642,6 +27775,9 @@
           <a:lstStyle/>
           <a:p>
             <a:pPr indent="0" lvl="0" marL="0" marR="0" rtl="0" algn="l">
+              <a:lnSpc>
+                <a:spcPct val="100000"/>
+              </a:lnSpc>
               <a:spcBef>
                 <a:spcPts val="0"/>
               </a:spcBef>
@@ -25714,19 +27850,35 @@
           </a:bodyPr>
           <a:lstStyle/>
           <a:p>
-            <a:pPr indent="0" lvl="0" marL="0" rtl="0" algn="l">
-              <a:spcBef>
-                <a:spcPts val="0"/>
-              </a:spcBef>
-              <a:spcAft>
-                <a:spcPts val="0"/>
-              </a:spcAft>
+            <a:pPr indent="0" lvl="0" marL="0" marR="0" rtl="0" algn="l">
+              <a:lnSpc>
+                <a:spcPct val="100000"/>
+              </a:lnSpc>
+              <a:spcBef>
+                <a:spcPts val="0"/>
+              </a:spcBef>
+              <a:spcAft>
+                <a:spcPts val="0"/>
+              </a:spcAft>
+              <a:buClr>
+                <a:srgbClr val="000000"/>
+              </a:buClr>
+              <a:buSzPts val="1400"/>
+              <a:buFont typeface="Arial"/>
               <a:buNone/>
             </a:pPr>
             <a:r>
               <a:t/>
             </a:r>
-            <a:endParaRPr/>
+            <a:endParaRPr b="0" i="0" sz="1400" u="none" cap="none" strike="noStrike">
+              <a:solidFill>
+                <a:srgbClr val="000000"/>
+              </a:solidFill>
+              <a:latin typeface="Arial"/>
+              <a:ea typeface="Arial"/>
+              <a:cs typeface="Arial"/>
+              <a:sym typeface="Arial"/>
+            </a:endParaRPr>
           </a:p>
         </p:txBody>
       </p:sp>
@@ -25822,6 +27974,9 @@
           <a:lstStyle/>
           <a:p>
             <a:pPr indent="0" lvl="0" marL="0" marR="0" rtl="0" algn="l">
+              <a:lnSpc>
+                <a:spcPct val="100000"/>
+              </a:lnSpc>
               <a:spcBef>
                 <a:spcPts val="0"/>
               </a:spcBef>
@@ -25894,19 +28049,35 @@
           </a:bodyPr>
           <a:lstStyle/>
           <a:p>
-            <a:pPr indent="0" lvl="0" marL="0" rtl="0" algn="l">
-              <a:spcBef>
-                <a:spcPts val="0"/>
-              </a:spcBef>
-              <a:spcAft>
-                <a:spcPts val="0"/>
-              </a:spcAft>
+            <a:pPr indent="0" lvl="0" marL="0" marR="0" rtl="0" algn="l">
+              <a:lnSpc>
+                <a:spcPct val="100000"/>
+              </a:lnSpc>
+              <a:spcBef>
+                <a:spcPts val="0"/>
+              </a:spcBef>
+              <a:spcAft>
+                <a:spcPts val="0"/>
+              </a:spcAft>
+              <a:buClr>
+                <a:srgbClr val="000000"/>
+              </a:buClr>
+              <a:buSzPts val="1400"/>
+              <a:buFont typeface="Arial"/>
               <a:buNone/>
             </a:pPr>
             <a:r>
               <a:t/>
             </a:r>
-            <a:endParaRPr/>
+            <a:endParaRPr b="0" i="0" sz="1400" u="none" cap="none" strike="noStrike">
+              <a:solidFill>
+                <a:srgbClr val="000000"/>
+              </a:solidFill>
+              <a:latin typeface="Arial"/>
+              <a:ea typeface="Arial"/>
+              <a:cs typeface="Arial"/>
+              <a:sym typeface="Arial"/>
+            </a:endParaRPr>
           </a:p>
         </p:txBody>
       </p:sp>
@@ -25936,6 +28107,9 @@
           <a:lstStyle/>
           <a:p>
             <a:pPr indent="0" lvl="0" marL="0" marR="0" rtl="0" algn="l">
+              <a:lnSpc>
+                <a:spcPct val="100000"/>
+              </a:lnSpc>
               <a:spcBef>
                 <a:spcPts val="0"/>
               </a:spcBef>
@@ -26106,8 +28280,8 @@
         </p:nvSpPr>
         <p:spPr>
           <a:xfrm>
-            <a:off x="1047750" y="1004887"/>
-            <a:ext cx="1504950" cy="285750"/>
+            <a:off x="1047750" y="1004875"/>
+            <a:ext cx="2266800" cy="285900"/>
           </a:xfrm>
           <a:prstGeom prst="rect">
             <a:avLst/>
@@ -26124,6 +28298,9 @@
           <a:lstStyle/>
           <a:p>
             <a:pPr indent="0" lvl="0" marL="0" marR="0" rtl="0" algn="l">
+              <a:lnSpc>
+                <a:spcPct val="100000"/>
+              </a:lnSpc>
               <a:spcBef>
                 <a:spcPts val="0"/>
               </a:spcBef>
@@ -26200,19 +28377,35 @@
           </a:bodyPr>
           <a:lstStyle/>
           <a:p>
-            <a:pPr indent="0" lvl="0" marL="0" rtl="0" algn="l">
-              <a:spcBef>
-                <a:spcPts val="0"/>
-              </a:spcBef>
-              <a:spcAft>
-                <a:spcPts val="0"/>
-              </a:spcAft>
+            <a:pPr indent="0" lvl="0" marL="0" marR="0" rtl="0" algn="l">
+              <a:lnSpc>
+                <a:spcPct val="100000"/>
+              </a:lnSpc>
+              <a:spcBef>
+                <a:spcPts val="0"/>
+              </a:spcBef>
+              <a:spcAft>
+                <a:spcPts val="0"/>
+              </a:spcAft>
+              <a:buClr>
+                <a:srgbClr val="000000"/>
+              </a:buClr>
+              <a:buSzPts val="1400"/>
+              <a:buFont typeface="Arial"/>
               <a:buNone/>
             </a:pPr>
             <a:r>
               <a:t/>
             </a:r>
-            <a:endParaRPr/>
+            <a:endParaRPr b="0" i="0" sz="1400" u="none" cap="none" strike="noStrike">
+              <a:solidFill>
+                <a:srgbClr val="000000"/>
+              </a:solidFill>
+              <a:latin typeface="Arial"/>
+              <a:ea typeface="Arial"/>
+              <a:cs typeface="Arial"/>
+              <a:sym typeface="Arial"/>
+            </a:endParaRPr>
           </a:p>
         </p:txBody>
       </p:sp>
@@ -26224,8 +28417,8 @@
         </p:nvSpPr>
         <p:spPr>
           <a:xfrm>
-            <a:off x="14917936" y="1019175"/>
-            <a:ext cx="2236589" cy="257175"/>
+            <a:off x="14856027" y="994417"/>
+            <a:ext cx="2692200" cy="257100"/>
           </a:xfrm>
           <a:prstGeom prst="rect">
             <a:avLst/>
@@ -26242,6 +28435,9 @@
           <a:lstStyle/>
           <a:p>
             <a:pPr indent="0" lvl="0" marL="0" marR="0" rtl="0" algn="l">
+              <a:lnSpc>
+                <a:spcPct val="100000"/>
+              </a:lnSpc>
               <a:spcBef>
                 <a:spcPts val="0"/>
               </a:spcBef>
@@ -26438,19 +28634,35 @@
           </a:bodyPr>
           <a:lstStyle/>
           <a:p>
-            <a:pPr indent="0" lvl="0" marL="0" rtl="0" algn="l">
-              <a:spcBef>
-                <a:spcPts val="0"/>
-              </a:spcBef>
-              <a:spcAft>
-                <a:spcPts val="0"/>
-              </a:spcAft>
+            <a:pPr indent="0" lvl="0" marL="0" marR="0" rtl="0" algn="l">
+              <a:lnSpc>
+                <a:spcPct val="100000"/>
+              </a:lnSpc>
+              <a:spcBef>
+                <a:spcPts val="0"/>
+              </a:spcBef>
+              <a:spcAft>
+                <a:spcPts val="0"/>
+              </a:spcAft>
+              <a:buClr>
+                <a:srgbClr val="000000"/>
+              </a:buClr>
+              <a:buSzPts val="1400"/>
+              <a:buFont typeface="Arial"/>
               <a:buNone/>
             </a:pPr>
             <a:r>
               <a:t/>
             </a:r>
-            <a:endParaRPr/>
+            <a:endParaRPr b="0" i="0" sz="1400" u="none" cap="none" strike="noStrike">
+              <a:solidFill>
+                <a:srgbClr val="000000"/>
+              </a:solidFill>
+              <a:latin typeface="Arial"/>
+              <a:ea typeface="Arial"/>
+              <a:cs typeface="Arial"/>
+              <a:sym typeface="Arial"/>
+            </a:endParaRPr>
           </a:p>
         </p:txBody>
       </p:sp>
@@ -26462,8 +28674,8 @@
         </p:nvSpPr>
         <p:spPr>
           <a:xfrm>
-            <a:off x="1276350" y="4143077"/>
-            <a:ext cx="476250" cy="280988"/>
+            <a:off x="1276350" y="4143075"/>
+            <a:ext cx="1221300" cy="281100"/>
           </a:xfrm>
           <a:prstGeom prst="rect">
             <a:avLst/>
@@ -26480,6 +28692,9 @@
           <a:lstStyle/>
           <a:p>
             <a:pPr indent="0" lvl="0" marL="0" marR="0" rtl="0" algn="l">
+              <a:lnSpc>
+                <a:spcPct val="100000"/>
+              </a:lnSpc>
               <a:spcBef>
                 <a:spcPts val="0"/>
               </a:spcBef>
@@ -26544,19 +28759,35 @@
           </a:bodyPr>
           <a:lstStyle/>
           <a:p>
-            <a:pPr indent="0" lvl="0" marL="0" rtl="0" algn="l">
-              <a:spcBef>
-                <a:spcPts val="0"/>
-              </a:spcBef>
-              <a:spcAft>
-                <a:spcPts val="0"/>
-              </a:spcAft>
+            <a:pPr indent="0" lvl="0" marL="0" marR="0" rtl="0" algn="l">
+              <a:lnSpc>
+                <a:spcPct val="100000"/>
+              </a:lnSpc>
+              <a:spcBef>
+                <a:spcPts val="0"/>
+              </a:spcBef>
+              <a:spcAft>
+                <a:spcPts val="0"/>
+              </a:spcAft>
+              <a:buClr>
+                <a:srgbClr val="000000"/>
+              </a:buClr>
+              <a:buSzPts val="1400"/>
+              <a:buFont typeface="Arial"/>
               <a:buNone/>
             </a:pPr>
             <a:r>
               <a:t/>
             </a:r>
-            <a:endParaRPr/>
+            <a:endParaRPr b="0" i="0" sz="1400" u="none" cap="none" strike="noStrike">
+              <a:solidFill>
+                <a:srgbClr val="000000"/>
+              </a:solidFill>
+              <a:latin typeface="Arial"/>
+              <a:ea typeface="Arial"/>
+              <a:cs typeface="Arial"/>
+              <a:sym typeface="Arial"/>
+            </a:endParaRPr>
           </a:p>
         </p:txBody>
       </p:sp>
@@ -26586,6 +28817,9 @@
           <a:lstStyle/>
           <a:p>
             <a:pPr indent="0" lvl="0" marL="0" marR="0" rtl="0" algn="l">
+              <a:lnSpc>
+                <a:spcPct val="100000"/>
+              </a:lnSpc>
               <a:spcBef>
                 <a:spcPts val="0"/>
               </a:spcBef>
@@ -26650,19 +28884,35 @@
           </a:bodyPr>
           <a:lstStyle/>
           <a:p>
-            <a:pPr indent="0" lvl="0" marL="0" rtl="0" algn="l">
-              <a:spcBef>
-                <a:spcPts val="0"/>
-              </a:spcBef>
-              <a:spcAft>
-                <a:spcPts val="0"/>
-              </a:spcAft>
+            <a:pPr indent="0" lvl="0" marL="0" marR="0" rtl="0" algn="l">
+              <a:lnSpc>
+                <a:spcPct val="100000"/>
+              </a:lnSpc>
+              <a:spcBef>
+                <a:spcPts val="0"/>
+              </a:spcBef>
+              <a:spcAft>
+                <a:spcPts val="0"/>
+              </a:spcAft>
+              <a:buClr>
+                <a:srgbClr val="000000"/>
+              </a:buClr>
+              <a:buSzPts val="1400"/>
+              <a:buFont typeface="Arial"/>
               <a:buNone/>
             </a:pPr>
             <a:r>
               <a:t/>
             </a:r>
-            <a:endParaRPr/>
+            <a:endParaRPr b="0" i="0" sz="1400" u="none" cap="none" strike="noStrike">
+              <a:solidFill>
+                <a:srgbClr val="000000"/>
+              </a:solidFill>
+              <a:latin typeface="Arial"/>
+              <a:ea typeface="Arial"/>
+              <a:cs typeface="Arial"/>
+              <a:sym typeface="Arial"/>
+            </a:endParaRPr>
           </a:p>
         </p:txBody>
       </p:sp>
@@ -26692,6 +28942,9 @@
           <a:lstStyle/>
           <a:p>
             <a:pPr indent="0" lvl="0" marL="0" marR="0" rtl="0" algn="l">
+              <a:lnSpc>
+                <a:spcPct val="100000"/>
+              </a:lnSpc>
               <a:spcBef>
                 <a:spcPts val="0"/>
               </a:spcBef>
@@ -26756,19 +29009,35 @@
           </a:bodyPr>
           <a:lstStyle/>
           <a:p>
-            <a:pPr indent="0" lvl="0" marL="0" rtl="0" algn="l">
-              <a:spcBef>
-                <a:spcPts val="0"/>
-              </a:spcBef>
-              <a:spcAft>
-                <a:spcPts val="0"/>
-              </a:spcAft>
+            <a:pPr indent="0" lvl="0" marL="0" marR="0" rtl="0" algn="l">
+              <a:lnSpc>
+                <a:spcPct val="100000"/>
+              </a:lnSpc>
+              <a:spcBef>
+                <a:spcPts val="0"/>
+              </a:spcBef>
+              <a:spcAft>
+                <a:spcPts val="0"/>
+              </a:spcAft>
+              <a:buClr>
+                <a:srgbClr val="000000"/>
+              </a:buClr>
+              <a:buSzPts val="1400"/>
+              <a:buFont typeface="Arial"/>
               <a:buNone/>
             </a:pPr>
             <a:r>
               <a:t/>
             </a:r>
-            <a:endParaRPr/>
+            <a:endParaRPr b="0" i="0" sz="1400" u="none" cap="none" strike="noStrike">
+              <a:solidFill>
+                <a:srgbClr val="000000"/>
+              </a:solidFill>
+              <a:latin typeface="Arial"/>
+              <a:ea typeface="Arial"/>
+              <a:cs typeface="Arial"/>
+              <a:sym typeface="Arial"/>
+            </a:endParaRPr>
           </a:p>
         </p:txBody>
       </p:sp>
@@ -26798,6 +29067,9 @@
           <a:lstStyle/>
           <a:p>
             <a:pPr indent="0" lvl="0" marL="0" marR="0" rtl="0" algn="l">
+              <a:lnSpc>
+                <a:spcPct val="100000"/>
+              </a:lnSpc>
               <a:spcBef>
                 <a:spcPts val="0"/>
               </a:spcBef>
@@ -26862,19 +29134,35 @@
           </a:bodyPr>
           <a:lstStyle/>
           <a:p>
-            <a:pPr indent="0" lvl="0" marL="0" rtl="0" algn="l">
-              <a:spcBef>
-                <a:spcPts val="0"/>
-              </a:spcBef>
-              <a:spcAft>
-                <a:spcPts val="0"/>
-              </a:spcAft>
+            <a:pPr indent="0" lvl="0" marL="0" marR="0" rtl="0" algn="l">
+              <a:lnSpc>
+                <a:spcPct val="100000"/>
+              </a:lnSpc>
+              <a:spcBef>
+                <a:spcPts val="0"/>
+              </a:spcBef>
+              <a:spcAft>
+                <a:spcPts val="0"/>
+              </a:spcAft>
+              <a:buClr>
+                <a:srgbClr val="000000"/>
+              </a:buClr>
+              <a:buSzPts val="1400"/>
+              <a:buFont typeface="Arial"/>
               <a:buNone/>
             </a:pPr>
             <a:r>
               <a:t/>
             </a:r>
-            <a:endParaRPr/>
+            <a:endParaRPr b="0" i="0" sz="1400" u="none" cap="none" strike="noStrike">
+              <a:solidFill>
+                <a:srgbClr val="000000"/>
+              </a:solidFill>
+              <a:latin typeface="Arial"/>
+              <a:ea typeface="Arial"/>
+              <a:cs typeface="Arial"/>
+              <a:sym typeface="Arial"/>
+            </a:endParaRPr>
           </a:p>
         </p:txBody>
       </p:sp>
@@ -26904,6 +29192,9 @@
           <a:lstStyle/>
           <a:p>
             <a:pPr indent="0" lvl="0" marL="0" marR="0" rtl="0" algn="l">
+              <a:lnSpc>
+                <a:spcPct val="100000"/>
+              </a:lnSpc>
               <a:spcBef>
                 <a:spcPts val="0"/>
               </a:spcBef>
@@ -26968,19 +29259,35 @@
           </a:bodyPr>
           <a:lstStyle/>
           <a:p>
-            <a:pPr indent="0" lvl="0" marL="0" rtl="0" algn="l">
-              <a:spcBef>
-                <a:spcPts val="0"/>
-              </a:spcBef>
-              <a:spcAft>
-                <a:spcPts val="0"/>
-              </a:spcAft>
+            <a:pPr indent="0" lvl="0" marL="0" marR="0" rtl="0" algn="l">
+              <a:lnSpc>
+                <a:spcPct val="100000"/>
+              </a:lnSpc>
+              <a:spcBef>
+                <a:spcPts val="0"/>
+              </a:spcBef>
+              <a:spcAft>
+                <a:spcPts val="0"/>
+              </a:spcAft>
+              <a:buClr>
+                <a:srgbClr val="000000"/>
+              </a:buClr>
+              <a:buSzPts val="1400"/>
+              <a:buFont typeface="Arial"/>
               <a:buNone/>
             </a:pPr>
             <a:r>
               <a:t/>
             </a:r>
-            <a:endParaRPr/>
+            <a:endParaRPr b="0" i="0" sz="1400" u="none" cap="none" strike="noStrike">
+              <a:solidFill>
+                <a:srgbClr val="000000"/>
+              </a:solidFill>
+              <a:latin typeface="Arial"/>
+              <a:ea typeface="Arial"/>
+              <a:cs typeface="Arial"/>
+              <a:sym typeface="Arial"/>
+            </a:endParaRPr>
           </a:p>
         </p:txBody>
       </p:sp>
@@ -27010,6 +29317,9 @@
           <a:lstStyle/>
           <a:p>
             <a:pPr indent="0" lvl="0" marL="0" marR="0" rtl="0" algn="l">
+              <a:lnSpc>
+                <a:spcPct val="100000"/>
+              </a:lnSpc>
               <a:spcBef>
                 <a:spcPts val="0"/>
               </a:spcBef>
@@ -27074,19 +29384,35 @@
           </a:bodyPr>
           <a:lstStyle/>
           <a:p>
-            <a:pPr indent="0" lvl="0" marL="0" rtl="0" algn="l">
-              <a:spcBef>
-                <a:spcPts val="0"/>
-              </a:spcBef>
-              <a:spcAft>
-                <a:spcPts val="0"/>
-              </a:spcAft>
+            <a:pPr indent="0" lvl="0" marL="0" marR="0" rtl="0" algn="l">
+              <a:lnSpc>
+                <a:spcPct val="100000"/>
+              </a:lnSpc>
+              <a:spcBef>
+                <a:spcPts val="0"/>
+              </a:spcBef>
+              <a:spcAft>
+                <a:spcPts val="0"/>
+              </a:spcAft>
+              <a:buClr>
+                <a:srgbClr val="000000"/>
+              </a:buClr>
+              <a:buSzPts val="1400"/>
+              <a:buFont typeface="Arial"/>
               <a:buNone/>
             </a:pPr>
             <a:r>
               <a:t/>
             </a:r>
-            <a:endParaRPr/>
+            <a:endParaRPr b="0" i="0" sz="1400" u="none" cap="none" strike="noStrike">
+              <a:solidFill>
+                <a:srgbClr val="000000"/>
+              </a:solidFill>
+              <a:latin typeface="Arial"/>
+              <a:ea typeface="Arial"/>
+              <a:cs typeface="Arial"/>
+              <a:sym typeface="Arial"/>
+            </a:endParaRPr>
           </a:p>
         </p:txBody>
       </p:sp>
@@ -27116,6 +29442,9 @@
           <a:lstStyle/>
           <a:p>
             <a:pPr indent="0" lvl="0" marL="0" marR="0" rtl="0" algn="l">
+              <a:lnSpc>
+                <a:spcPct val="100000"/>
+              </a:lnSpc>
               <a:spcBef>
                 <a:spcPts val="0"/>
               </a:spcBef>
@@ -27180,19 +29509,35 @@
           </a:bodyPr>
           <a:lstStyle/>
           <a:p>
-            <a:pPr indent="0" lvl="0" marL="0" rtl="0" algn="l">
-              <a:spcBef>
-                <a:spcPts val="0"/>
-              </a:spcBef>
-              <a:spcAft>
-                <a:spcPts val="0"/>
-              </a:spcAft>
+            <a:pPr indent="0" lvl="0" marL="0" marR="0" rtl="0" algn="l">
+              <a:lnSpc>
+                <a:spcPct val="100000"/>
+              </a:lnSpc>
+              <a:spcBef>
+                <a:spcPts val="0"/>
+              </a:spcBef>
+              <a:spcAft>
+                <a:spcPts val="0"/>
+              </a:spcAft>
+              <a:buClr>
+                <a:srgbClr val="000000"/>
+              </a:buClr>
+              <a:buSzPts val="1400"/>
+              <a:buFont typeface="Arial"/>
               <a:buNone/>
             </a:pPr>
             <a:r>
               <a:t/>
             </a:r>
-            <a:endParaRPr/>
+            <a:endParaRPr b="0" i="0" sz="1400" u="none" cap="none" strike="noStrike">
+              <a:solidFill>
+                <a:srgbClr val="000000"/>
+              </a:solidFill>
+              <a:latin typeface="Arial"/>
+              <a:ea typeface="Arial"/>
+              <a:cs typeface="Arial"/>
+              <a:sym typeface="Arial"/>
+            </a:endParaRPr>
           </a:p>
         </p:txBody>
       </p:sp>
@@ -27222,6 +29567,9 @@
           <a:lstStyle/>
           <a:p>
             <a:pPr indent="0" lvl="0" marL="0" marR="0" rtl="0" algn="l">
+              <a:lnSpc>
+                <a:spcPct val="100000"/>
+              </a:lnSpc>
               <a:spcBef>
                 <a:spcPts val="0"/>
               </a:spcBef>
@@ -27285,6 +29633,9 @@
           <a:lstStyle/>
           <a:p>
             <a:pPr indent="0" lvl="0" marL="0" marR="0" rtl="0" algn="l">
+              <a:lnSpc>
+                <a:spcPct val="100000"/>
+              </a:lnSpc>
               <a:spcBef>
                 <a:spcPts val="0"/>
               </a:spcBef>
@@ -27348,6 +29699,9 @@
           <a:lstStyle/>
           <a:p>
             <a:pPr indent="0" lvl="0" marL="0" marR="0" rtl="0" algn="l">
+              <a:lnSpc>
+                <a:spcPct val="100000"/>
+              </a:lnSpc>
               <a:spcBef>
                 <a:spcPts val="0"/>
               </a:spcBef>
@@ -27420,19 +29774,35 @@
           </a:bodyPr>
           <a:lstStyle/>
           <a:p>
-            <a:pPr indent="0" lvl="0" marL="0" rtl="0" algn="l">
-              <a:spcBef>
-                <a:spcPts val="0"/>
-              </a:spcBef>
-              <a:spcAft>
-                <a:spcPts val="0"/>
-              </a:spcAft>
+            <a:pPr indent="0" lvl="0" marL="0" marR="0" rtl="0" algn="l">
+              <a:lnSpc>
+                <a:spcPct val="100000"/>
+              </a:lnSpc>
+              <a:spcBef>
+                <a:spcPts val="0"/>
+              </a:spcBef>
+              <a:spcAft>
+                <a:spcPts val="0"/>
+              </a:spcAft>
+              <a:buClr>
+                <a:srgbClr val="000000"/>
+              </a:buClr>
+              <a:buSzPts val="1400"/>
+              <a:buFont typeface="Arial"/>
               <a:buNone/>
             </a:pPr>
             <a:r>
               <a:t/>
             </a:r>
-            <a:endParaRPr/>
+            <a:endParaRPr b="0" i="0" sz="1400" u="none" cap="none" strike="noStrike">
+              <a:solidFill>
+                <a:srgbClr val="000000"/>
+              </a:solidFill>
+              <a:latin typeface="Arial"/>
+              <a:ea typeface="Arial"/>
+              <a:cs typeface="Arial"/>
+              <a:sym typeface="Arial"/>
+            </a:endParaRPr>
           </a:p>
         </p:txBody>
       </p:sp>
@@ -27528,6 +29898,9 @@
           <a:lstStyle/>
           <a:p>
             <a:pPr indent="0" lvl="0" marL="0" marR="0" rtl="0" algn="l">
+              <a:lnSpc>
+                <a:spcPct val="100000"/>
+              </a:lnSpc>
               <a:spcBef>
                 <a:spcPts val="0"/>
               </a:spcBef>
@@ -27600,19 +29973,35 @@
           </a:bodyPr>
           <a:lstStyle/>
           <a:p>
-            <a:pPr indent="0" lvl="0" marL="0" rtl="0" algn="l">
-              <a:spcBef>
-                <a:spcPts val="0"/>
-              </a:spcBef>
-              <a:spcAft>
-                <a:spcPts val="0"/>
-              </a:spcAft>
+            <a:pPr indent="0" lvl="0" marL="0" marR="0" rtl="0" algn="l">
+              <a:lnSpc>
+                <a:spcPct val="100000"/>
+              </a:lnSpc>
+              <a:spcBef>
+                <a:spcPts val="0"/>
+              </a:spcBef>
+              <a:spcAft>
+                <a:spcPts val="0"/>
+              </a:spcAft>
+              <a:buClr>
+                <a:srgbClr val="000000"/>
+              </a:buClr>
+              <a:buSzPts val="1400"/>
+              <a:buFont typeface="Arial"/>
               <a:buNone/>
             </a:pPr>
             <a:r>
               <a:t/>
             </a:r>
-            <a:endParaRPr/>
+            <a:endParaRPr b="0" i="0" sz="1400" u="none" cap="none" strike="noStrike">
+              <a:solidFill>
+                <a:srgbClr val="000000"/>
+              </a:solidFill>
+              <a:latin typeface="Arial"/>
+              <a:ea typeface="Arial"/>
+              <a:cs typeface="Arial"/>
+              <a:sym typeface="Arial"/>
+            </a:endParaRPr>
           </a:p>
         </p:txBody>
       </p:sp>
@@ -27708,6 +30097,9 @@
           <a:lstStyle/>
           <a:p>
             <a:pPr indent="0" lvl="0" marL="0" marR="0" rtl="0" algn="l">
+              <a:lnSpc>
+                <a:spcPct val="100000"/>
+              </a:lnSpc>
               <a:spcBef>
                 <a:spcPts val="0"/>
               </a:spcBef>
@@ -27780,19 +30172,35 @@
           </a:bodyPr>
           <a:lstStyle/>
           <a:p>
-            <a:pPr indent="0" lvl="0" marL="0" rtl="0" algn="l">
-              <a:spcBef>
-                <a:spcPts val="0"/>
-              </a:spcBef>
-              <a:spcAft>
-                <a:spcPts val="0"/>
-              </a:spcAft>
+            <a:pPr indent="0" lvl="0" marL="0" marR="0" rtl="0" algn="l">
+              <a:lnSpc>
+                <a:spcPct val="100000"/>
+              </a:lnSpc>
+              <a:spcBef>
+                <a:spcPts val="0"/>
+              </a:spcBef>
+              <a:spcAft>
+                <a:spcPts val="0"/>
+              </a:spcAft>
+              <a:buClr>
+                <a:srgbClr val="000000"/>
+              </a:buClr>
+              <a:buSzPts val="1400"/>
+              <a:buFont typeface="Arial"/>
               <a:buNone/>
             </a:pPr>
             <a:r>
               <a:t/>
             </a:r>
-            <a:endParaRPr/>
+            <a:endParaRPr b="0" i="0" sz="1400" u="none" cap="none" strike="noStrike">
+              <a:solidFill>
+                <a:srgbClr val="000000"/>
+              </a:solidFill>
+              <a:latin typeface="Arial"/>
+              <a:ea typeface="Arial"/>
+              <a:cs typeface="Arial"/>
+              <a:sym typeface="Arial"/>
+            </a:endParaRPr>
           </a:p>
         </p:txBody>
       </p:sp>
@@ -27822,6 +30230,9 @@
           <a:lstStyle/>
           <a:p>
             <a:pPr indent="0" lvl="0" marL="0" marR="0" rtl="0" algn="l">
+              <a:lnSpc>
+                <a:spcPct val="100000"/>
+              </a:lnSpc>
               <a:spcBef>
                 <a:spcPts val="0"/>
               </a:spcBef>
@@ -27960,19 +30371,35 @@
           </a:bodyPr>
           <a:lstStyle/>
           <a:p>
-            <a:pPr indent="0" lvl="0" marL="0" rtl="0" algn="l">
-              <a:spcBef>
-                <a:spcPts val="0"/>
-              </a:spcBef>
-              <a:spcAft>
-                <a:spcPts val="0"/>
-              </a:spcAft>
+            <a:pPr indent="0" lvl="0" marL="0" marR="0" rtl="0" algn="l">
+              <a:lnSpc>
+                <a:spcPct val="100000"/>
+              </a:lnSpc>
+              <a:spcBef>
+                <a:spcPts val="0"/>
+              </a:spcBef>
+              <a:spcAft>
+                <a:spcPts val="0"/>
+              </a:spcAft>
+              <a:buClr>
+                <a:srgbClr val="000000"/>
+              </a:buClr>
+              <a:buSzPts val="1400"/>
+              <a:buFont typeface="Arial"/>
               <a:buNone/>
             </a:pPr>
             <a:r>
               <a:t/>
             </a:r>
-            <a:endParaRPr/>
+            <a:endParaRPr b="0" i="0" sz="1400" u="none" cap="none" strike="noStrike">
+              <a:solidFill>
+                <a:srgbClr val="000000"/>
+              </a:solidFill>
+              <a:latin typeface="Arial"/>
+              <a:ea typeface="Arial"/>
+              <a:cs typeface="Arial"/>
+              <a:sym typeface="Arial"/>
+            </a:endParaRPr>
           </a:p>
         </p:txBody>
       </p:sp>
@@ -28002,6 +30429,9 @@
           <a:lstStyle/>
           <a:p>
             <a:pPr indent="0" lvl="0" marL="0" marR="0" rtl="0" algn="l">
+              <a:lnSpc>
+                <a:spcPct val="100000"/>
+              </a:lnSpc>
               <a:spcBef>
                 <a:spcPts val="0"/>
               </a:spcBef>
@@ -28025,7 +30455,7 @@
                 <a:cs typeface="JetBrains Mono"/>
                 <a:sym typeface="JetBrains Mono"/>
               </a:rPr>
-              <a:t>&lt; 45 минlt; 45 min</a:t>
+              <a:t>&lt; 45 min</a:t>
             </a:r>
             <a:endParaRPr b="0" i="0" sz="2100" u="none" cap="none" strike="noStrike">
               <a:solidFill>
@@ -28047,8 +30477,8 @@
         </p:nvSpPr>
         <p:spPr>
           <a:xfrm>
-            <a:off x="14388405" y="7638008"/>
-            <a:ext cx="2692131" cy="409575"/>
+            <a:off x="14376026" y="7638008"/>
+            <a:ext cx="2692200" cy="409500"/>
           </a:xfrm>
           <a:prstGeom prst="rect">
             <a:avLst/>
